--- a/比賽簡報_升級版.pptx
+++ b/比賽簡報_升級版.pptx
@@ -5,26 +5,26 @@
     <p:sldMasterId id="2147483648" r:id="rId1"/>
   </p:sldMasterIdLst>
   <p:sldIdLst>
-    <p:sldId id="256" r:id="rId7"/>
-    <p:sldId id="257" r:id="rId8"/>
-    <p:sldId id="258" r:id="rId9"/>
-    <p:sldId id="259" r:id="rId10"/>
-    <p:sldId id="260" r:id="rId11"/>
-    <p:sldId id="261" r:id="rId12"/>
-    <p:sldId id="262" r:id="rId13"/>
-    <p:sldId id="263" r:id="rId14"/>
-    <p:sldId id="264" r:id="rId15"/>
-    <p:sldId id="265" r:id="rId16"/>
-    <p:sldId id="266" r:id="rId17"/>
-    <p:sldId id="267" r:id="rId18"/>
-    <p:sldId id="268" r:id="rId19"/>
-    <p:sldId id="269" r:id="rId20"/>
-    <p:sldId id="270" r:id="rId21"/>
-    <p:sldId id="271" r:id="rId22"/>
-    <p:sldId id="272" r:id="rId23"/>
-    <p:sldId id="273" r:id="rId24"/>
+    <p:sldId id="256" r:id="rId2"/>
+    <p:sldId id="257" r:id="rId3"/>
+    <p:sldId id="258" r:id="rId4"/>
+    <p:sldId id="259" r:id="rId5"/>
+    <p:sldId id="260" r:id="rId6"/>
+    <p:sldId id="261" r:id="rId7"/>
+    <p:sldId id="262" r:id="rId8"/>
+    <p:sldId id="263" r:id="rId9"/>
+    <p:sldId id="264" r:id="rId10"/>
+    <p:sldId id="265" r:id="rId11"/>
+    <p:sldId id="266" r:id="rId12"/>
+    <p:sldId id="267" r:id="rId13"/>
+    <p:sldId id="268" r:id="rId14"/>
+    <p:sldId id="269" r:id="rId15"/>
+    <p:sldId id="270" r:id="rId16"/>
+    <p:sldId id="271" r:id="rId17"/>
+    <p:sldId id="272" r:id="rId18"/>
+    <p:sldId id="273" r:id="rId19"/>
   </p:sldIdLst>
-  <p:sldSz cx="12191695" cy="6858000" type="screen4x3"/>
+  <p:sldSz cx="12192000" cy="6858000"/>
   <p:notesSz cx="6858000" cy="9144000"/>
   <p:defaultTextStyle>
     <a:defPPr>
@@ -121,6 +121,22 @@
       </a:defRPr>
     </a:lvl9pPr>
   </p:defaultTextStyle>
+  <p:extLst>
+    <p:ext uri="{EFAFB233-063F-42B5-8137-9DF3F51BA10A}">
+      <p15:sldGuideLst xmlns:p15="http://schemas.microsoft.com/office/powerpoint/2012/main">
+        <p15:guide id="1" orient="horz" pos="2160">
+          <p15:clr>
+            <a:srgbClr val="A4A3A4"/>
+          </p15:clr>
+        </p15:guide>
+        <p15:guide id="2" pos="2880">
+          <p15:clr>
+            <a:srgbClr val="A4A3A4"/>
+          </p15:clr>
+        </p15:guide>
+      </p15:sldGuideLst>
+    </p:ext>
+  </p:extLst>
 </p:presentation>
 </file>
 
@@ -162,10 +178,9 @@
           <a:lstStyle/>
           <a:p>
             <a:r>
-              <a:rPr lang="en-US" smtClean="0"/>
+              <a:rPr lang="en-US"/>
               <a:t>Click to edit Master title style</a:t>
             </a:r>
-            <a:endParaRPr lang="en-US"/>
           </a:p>
         </p:txBody>
       </p:sp>
@@ -281,10 +296,9 @@
           </a:lstStyle>
           <a:p>
             <a:r>
-              <a:rPr lang="en-US" smtClean="0"/>
+              <a:rPr lang="en-US"/>
               <a:t>Click to edit Master subtitle style</a:t>
             </a:r>
-            <a:endParaRPr lang="en-US"/>
           </a:p>
         </p:txBody>
       </p:sp>
@@ -305,7 +319,7 @@
           <a:p>
             <a:fld id="{5BCAD085-E8A6-8845-BD4E-CB4CCA059FC4}" type="datetimeFigureOut">
               <a:rPr lang="en-US" smtClean="0"/>
-              <a:t>1/27/13</a:t>
+              <a:t>7/20/2026</a:t>
             </a:fld>
             <a:endParaRPr lang="en-US"/>
           </a:p>
@@ -399,10 +413,9 @@
           <a:lstStyle/>
           <a:p>
             <a:r>
-              <a:rPr lang="en-US" smtClean="0"/>
+              <a:rPr lang="en-US"/>
               <a:t>Click to edit Master title style</a:t>
             </a:r>
-            <a:endParaRPr lang="en-US"/>
           </a:p>
         </p:txBody>
       </p:sp>
@@ -423,38 +436,37 @@
           <a:p>
             <a:pPr lvl="0"/>
             <a:r>
-              <a:rPr lang="en-US" smtClean="0"/>
+              <a:rPr lang="en-US"/>
               <a:t>Click to edit Master text styles</a:t>
             </a:r>
           </a:p>
           <a:p>
             <a:pPr lvl="1"/>
             <a:r>
-              <a:rPr lang="en-US" smtClean="0"/>
+              <a:rPr lang="en-US"/>
               <a:t>Second level</a:t>
             </a:r>
           </a:p>
           <a:p>
             <a:pPr lvl="2"/>
             <a:r>
-              <a:rPr lang="en-US" smtClean="0"/>
+              <a:rPr lang="en-US"/>
               <a:t>Third level</a:t>
             </a:r>
           </a:p>
           <a:p>
             <a:pPr lvl="3"/>
             <a:r>
-              <a:rPr lang="en-US" smtClean="0"/>
+              <a:rPr lang="en-US"/>
               <a:t>Fourth level</a:t>
             </a:r>
           </a:p>
           <a:p>
             <a:pPr lvl="4"/>
             <a:r>
-              <a:rPr lang="en-US" smtClean="0"/>
+              <a:rPr lang="en-US"/>
               <a:t>Fifth level</a:t>
             </a:r>
-            <a:endParaRPr lang="en-US"/>
           </a:p>
         </p:txBody>
       </p:sp>
@@ -475,7 +487,7 @@
           <a:p>
             <a:fld id="{5BCAD085-E8A6-8845-BD4E-CB4CCA059FC4}" type="datetimeFigureOut">
               <a:rPr lang="en-US" smtClean="0"/>
-              <a:t>1/27/13</a:t>
+              <a:t>7/20/2026</a:t>
             </a:fld>
             <a:endParaRPr lang="en-US"/>
           </a:p>
@@ -574,10 +586,9 @@
           <a:lstStyle/>
           <a:p>
             <a:r>
-              <a:rPr lang="en-US" smtClean="0"/>
+              <a:rPr lang="en-US"/>
               <a:t>Click to edit Master title style</a:t>
             </a:r>
-            <a:endParaRPr lang="en-US"/>
           </a:p>
         </p:txBody>
       </p:sp>
@@ -603,38 +614,37 @@
           <a:p>
             <a:pPr lvl="0"/>
             <a:r>
-              <a:rPr lang="en-US" smtClean="0"/>
+              <a:rPr lang="en-US"/>
               <a:t>Click to edit Master text styles</a:t>
             </a:r>
           </a:p>
           <a:p>
             <a:pPr lvl="1"/>
             <a:r>
-              <a:rPr lang="en-US" smtClean="0"/>
+              <a:rPr lang="en-US"/>
               <a:t>Second level</a:t>
             </a:r>
           </a:p>
           <a:p>
             <a:pPr lvl="2"/>
             <a:r>
-              <a:rPr lang="en-US" smtClean="0"/>
+              <a:rPr lang="en-US"/>
               <a:t>Third level</a:t>
             </a:r>
           </a:p>
           <a:p>
             <a:pPr lvl="3"/>
             <a:r>
-              <a:rPr lang="en-US" smtClean="0"/>
+              <a:rPr lang="en-US"/>
               <a:t>Fourth level</a:t>
             </a:r>
           </a:p>
           <a:p>
             <a:pPr lvl="4"/>
             <a:r>
-              <a:rPr lang="en-US" smtClean="0"/>
+              <a:rPr lang="en-US"/>
               <a:t>Fifth level</a:t>
             </a:r>
-            <a:endParaRPr lang="en-US"/>
           </a:p>
         </p:txBody>
       </p:sp>
@@ -655,7 +665,7 @@
           <a:p>
             <a:fld id="{5BCAD085-E8A6-8845-BD4E-CB4CCA059FC4}" type="datetimeFigureOut">
               <a:rPr lang="en-US" smtClean="0"/>
-              <a:t>1/27/13</a:t>
+              <a:t>7/20/2026</a:t>
             </a:fld>
             <a:endParaRPr lang="en-US"/>
           </a:p>
@@ -749,10 +759,9 @@
           <a:lstStyle/>
           <a:p>
             <a:r>
-              <a:rPr lang="en-US" smtClean="0"/>
+              <a:rPr lang="en-US"/>
               <a:t>Click to edit Master title style</a:t>
             </a:r>
-            <a:endParaRPr lang="en-US"/>
           </a:p>
         </p:txBody>
       </p:sp>
@@ -773,38 +782,37 @@
           <a:p>
             <a:pPr lvl="0"/>
             <a:r>
-              <a:rPr lang="en-US" smtClean="0"/>
+              <a:rPr lang="en-US"/>
               <a:t>Click to edit Master text styles</a:t>
             </a:r>
           </a:p>
           <a:p>
             <a:pPr lvl="1"/>
             <a:r>
-              <a:rPr lang="en-US" smtClean="0"/>
+              <a:rPr lang="en-US"/>
               <a:t>Second level</a:t>
             </a:r>
           </a:p>
           <a:p>
             <a:pPr lvl="2"/>
             <a:r>
-              <a:rPr lang="en-US" smtClean="0"/>
+              <a:rPr lang="en-US"/>
               <a:t>Third level</a:t>
             </a:r>
           </a:p>
           <a:p>
             <a:pPr lvl="3"/>
             <a:r>
-              <a:rPr lang="en-US" smtClean="0"/>
+              <a:rPr lang="en-US"/>
               <a:t>Fourth level</a:t>
             </a:r>
           </a:p>
           <a:p>
             <a:pPr lvl="4"/>
             <a:r>
-              <a:rPr lang="en-US" smtClean="0"/>
+              <a:rPr lang="en-US"/>
               <a:t>Fifth level</a:t>
             </a:r>
-            <a:endParaRPr lang="en-US"/>
           </a:p>
         </p:txBody>
       </p:sp>
@@ -825,7 +833,7 @@
           <a:p>
             <a:fld id="{5BCAD085-E8A6-8845-BD4E-CB4CCA059FC4}" type="datetimeFigureOut">
               <a:rPr lang="en-US" smtClean="0"/>
-              <a:t>1/27/13</a:t>
+              <a:t>7/20/2026</a:t>
             </a:fld>
             <a:endParaRPr lang="en-US"/>
           </a:p>
@@ -928,10 +936,9 @@
           </a:lstStyle>
           <a:p>
             <a:r>
-              <a:rPr lang="en-US" smtClean="0"/>
+              <a:rPr lang="en-US"/>
               <a:t>Click to edit Master title style</a:t>
             </a:r>
-            <a:endParaRPr lang="en-US"/>
           </a:p>
         </p:txBody>
       </p:sp>
@@ -1048,7 +1055,7 @@
           <a:p>
             <a:pPr lvl="0"/>
             <a:r>
-              <a:rPr lang="en-US" smtClean="0"/>
+              <a:rPr lang="en-US"/>
               <a:t>Click to edit Master text styles</a:t>
             </a:r>
           </a:p>
@@ -1071,7 +1078,7 @@
           <a:p>
             <a:fld id="{5BCAD085-E8A6-8845-BD4E-CB4CCA059FC4}" type="datetimeFigureOut">
               <a:rPr lang="en-US" smtClean="0"/>
-              <a:t>1/27/13</a:t>
+              <a:t>7/20/2026</a:t>
             </a:fld>
             <a:endParaRPr lang="en-US"/>
           </a:p>
@@ -1165,10 +1172,9 @@
           <a:lstStyle/>
           <a:p>
             <a:r>
-              <a:rPr lang="en-US" smtClean="0"/>
+              <a:rPr lang="en-US"/>
               <a:t>Click to edit Master title style</a:t>
             </a:r>
-            <a:endParaRPr lang="en-US"/>
           </a:p>
         </p:txBody>
       </p:sp>
@@ -1222,38 +1228,37 @@
           <a:p>
             <a:pPr lvl="0"/>
             <a:r>
-              <a:rPr lang="en-US" smtClean="0"/>
+              <a:rPr lang="en-US"/>
               <a:t>Click to edit Master text styles</a:t>
             </a:r>
           </a:p>
           <a:p>
             <a:pPr lvl="1"/>
             <a:r>
-              <a:rPr lang="en-US" smtClean="0"/>
+              <a:rPr lang="en-US"/>
               <a:t>Second level</a:t>
             </a:r>
           </a:p>
           <a:p>
             <a:pPr lvl="2"/>
             <a:r>
-              <a:rPr lang="en-US" smtClean="0"/>
+              <a:rPr lang="en-US"/>
               <a:t>Third level</a:t>
             </a:r>
           </a:p>
           <a:p>
             <a:pPr lvl="3"/>
             <a:r>
-              <a:rPr lang="en-US" smtClean="0"/>
+              <a:rPr lang="en-US"/>
               <a:t>Fourth level</a:t>
             </a:r>
           </a:p>
           <a:p>
             <a:pPr lvl="4"/>
             <a:r>
-              <a:rPr lang="en-US" smtClean="0"/>
+              <a:rPr lang="en-US"/>
               <a:t>Fifth level</a:t>
             </a:r>
-            <a:endParaRPr lang="en-US"/>
           </a:p>
         </p:txBody>
       </p:sp>
@@ -1307,38 +1312,37 @@
           <a:p>
             <a:pPr lvl="0"/>
             <a:r>
-              <a:rPr lang="en-US" smtClean="0"/>
+              <a:rPr lang="en-US"/>
               <a:t>Click to edit Master text styles</a:t>
             </a:r>
           </a:p>
           <a:p>
             <a:pPr lvl="1"/>
             <a:r>
-              <a:rPr lang="en-US" smtClean="0"/>
+              <a:rPr lang="en-US"/>
               <a:t>Second level</a:t>
             </a:r>
           </a:p>
           <a:p>
             <a:pPr lvl="2"/>
             <a:r>
-              <a:rPr lang="en-US" smtClean="0"/>
+              <a:rPr lang="en-US"/>
               <a:t>Third level</a:t>
             </a:r>
           </a:p>
           <a:p>
             <a:pPr lvl="3"/>
             <a:r>
-              <a:rPr lang="en-US" smtClean="0"/>
+              <a:rPr lang="en-US"/>
               <a:t>Fourth level</a:t>
             </a:r>
           </a:p>
           <a:p>
             <a:pPr lvl="4"/>
             <a:r>
-              <a:rPr lang="en-US" smtClean="0"/>
+              <a:rPr lang="en-US"/>
               <a:t>Fifth level</a:t>
             </a:r>
-            <a:endParaRPr lang="en-US"/>
           </a:p>
         </p:txBody>
       </p:sp>
@@ -1359,7 +1363,7 @@
           <a:p>
             <a:fld id="{5BCAD085-E8A6-8845-BD4E-CB4CCA059FC4}" type="datetimeFigureOut">
               <a:rPr lang="en-US" smtClean="0"/>
-              <a:t>1/27/13</a:t>
+              <a:t>7/20/2026</a:t>
             </a:fld>
             <a:endParaRPr lang="en-US"/>
           </a:p>
@@ -1457,10 +1461,9 @@
           </a:lstStyle>
           <a:p>
             <a:r>
-              <a:rPr lang="en-US" smtClean="0"/>
+              <a:rPr lang="en-US"/>
               <a:t>Click to edit Master title style</a:t>
             </a:r>
-            <a:endParaRPr lang="en-US"/>
           </a:p>
         </p:txBody>
       </p:sp>
@@ -1523,7 +1526,7 @@
           <a:p>
             <a:pPr lvl="0"/>
             <a:r>
-              <a:rPr lang="en-US" smtClean="0"/>
+              <a:rPr lang="en-US"/>
               <a:t>Click to edit Master text styles</a:t>
             </a:r>
           </a:p>
@@ -1579,38 +1582,37 @@
           <a:p>
             <a:pPr lvl="0"/>
             <a:r>
-              <a:rPr lang="en-US" smtClean="0"/>
+              <a:rPr lang="en-US"/>
               <a:t>Click to edit Master text styles</a:t>
             </a:r>
           </a:p>
           <a:p>
             <a:pPr lvl="1"/>
             <a:r>
-              <a:rPr lang="en-US" smtClean="0"/>
+              <a:rPr lang="en-US"/>
               <a:t>Second level</a:t>
             </a:r>
           </a:p>
           <a:p>
             <a:pPr lvl="2"/>
             <a:r>
-              <a:rPr lang="en-US" smtClean="0"/>
+              <a:rPr lang="en-US"/>
               <a:t>Third level</a:t>
             </a:r>
           </a:p>
           <a:p>
             <a:pPr lvl="3"/>
             <a:r>
-              <a:rPr lang="en-US" smtClean="0"/>
+              <a:rPr lang="en-US"/>
               <a:t>Fourth level</a:t>
             </a:r>
           </a:p>
           <a:p>
             <a:pPr lvl="4"/>
             <a:r>
-              <a:rPr lang="en-US" smtClean="0"/>
+              <a:rPr lang="en-US"/>
               <a:t>Fifth level</a:t>
             </a:r>
-            <a:endParaRPr lang="en-US"/>
           </a:p>
         </p:txBody>
       </p:sp>
@@ -1673,7 +1675,7 @@
           <a:p>
             <a:pPr lvl="0"/>
             <a:r>
-              <a:rPr lang="en-US" smtClean="0"/>
+              <a:rPr lang="en-US"/>
               <a:t>Click to edit Master text styles</a:t>
             </a:r>
           </a:p>
@@ -1729,38 +1731,37 @@
           <a:p>
             <a:pPr lvl="0"/>
             <a:r>
-              <a:rPr lang="en-US" smtClean="0"/>
+              <a:rPr lang="en-US"/>
               <a:t>Click to edit Master text styles</a:t>
             </a:r>
           </a:p>
           <a:p>
             <a:pPr lvl="1"/>
             <a:r>
-              <a:rPr lang="en-US" smtClean="0"/>
+              <a:rPr lang="en-US"/>
               <a:t>Second level</a:t>
             </a:r>
           </a:p>
           <a:p>
             <a:pPr lvl="2"/>
             <a:r>
-              <a:rPr lang="en-US" smtClean="0"/>
+              <a:rPr lang="en-US"/>
               <a:t>Third level</a:t>
             </a:r>
           </a:p>
           <a:p>
             <a:pPr lvl="3"/>
             <a:r>
-              <a:rPr lang="en-US" smtClean="0"/>
+              <a:rPr lang="en-US"/>
               <a:t>Fourth level</a:t>
             </a:r>
           </a:p>
           <a:p>
             <a:pPr lvl="4"/>
             <a:r>
-              <a:rPr lang="en-US" smtClean="0"/>
+              <a:rPr lang="en-US"/>
               <a:t>Fifth level</a:t>
             </a:r>
-            <a:endParaRPr lang="en-US"/>
           </a:p>
         </p:txBody>
       </p:sp>
@@ -1781,7 +1782,7 @@
           <a:p>
             <a:fld id="{5BCAD085-E8A6-8845-BD4E-CB4CCA059FC4}" type="datetimeFigureOut">
               <a:rPr lang="en-US" smtClean="0"/>
-              <a:t>1/27/13</a:t>
+              <a:t>7/20/2026</a:t>
             </a:fld>
             <a:endParaRPr lang="en-US"/>
           </a:p>
@@ -1875,10 +1876,9 @@
           <a:lstStyle/>
           <a:p>
             <a:r>
-              <a:rPr lang="en-US" smtClean="0"/>
+              <a:rPr lang="en-US"/>
               <a:t>Click to edit Master title style</a:t>
             </a:r>
-            <a:endParaRPr lang="en-US"/>
           </a:p>
         </p:txBody>
       </p:sp>
@@ -1899,7 +1899,7 @@
           <a:p>
             <a:fld id="{5BCAD085-E8A6-8845-BD4E-CB4CCA059FC4}" type="datetimeFigureOut">
               <a:rPr lang="en-US" smtClean="0"/>
-              <a:t>1/27/13</a:t>
+              <a:t>7/20/2026</a:t>
             </a:fld>
             <a:endParaRPr lang="en-US"/>
           </a:p>
@@ -1994,7 +1994,7 @@
           <a:p>
             <a:fld id="{5BCAD085-E8A6-8845-BD4E-CB4CCA059FC4}" type="datetimeFigureOut">
               <a:rPr lang="en-US" smtClean="0"/>
-              <a:t>1/27/13</a:t>
+              <a:t>7/20/2026</a:t>
             </a:fld>
             <a:endParaRPr lang="en-US"/>
           </a:p>
@@ -2097,10 +2097,9 @@
           </a:lstStyle>
           <a:p>
             <a:r>
-              <a:rPr lang="en-US" smtClean="0"/>
+              <a:rPr lang="en-US"/>
               <a:t>Click to edit Master title style</a:t>
             </a:r>
-            <a:endParaRPr lang="en-US"/>
           </a:p>
         </p:txBody>
       </p:sp>
@@ -2154,38 +2153,37 @@
           <a:p>
             <a:pPr lvl="0"/>
             <a:r>
-              <a:rPr lang="en-US" smtClean="0"/>
+              <a:rPr lang="en-US"/>
               <a:t>Click to edit Master text styles</a:t>
             </a:r>
           </a:p>
           <a:p>
             <a:pPr lvl="1"/>
             <a:r>
-              <a:rPr lang="en-US" smtClean="0"/>
+              <a:rPr lang="en-US"/>
               <a:t>Second level</a:t>
             </a:r>
           </a:p>
           <a:p>
             <a:pPr lvl="2"/>
             <a:r>
-              <a:rPr lang="en-US" smtClean="0"/>
+              <a:rPr lang="en-US"/>
               <a:t>Third level</a:t>
             </a:r>
           </a:p>
           <a:p>
             <a:pPr lvl="3"/>
             <a:r>
-              <a:rPr lang="en-US" smtClean="0"/>
+              <a:rPr lang="en-US"/>
               <a:t>Fourth level</a:t>
             </a:r>
           </a:p>
           <a:p>
             <a:pPr lvl="4"/>
             <a:r>
-              <a:rPr lang="en-US" smtClean="0"/>
+              <a:rPr lang="en-US"/>
               <a:t>Fifth level</a:t>
             </a:r>
-            <a:endParaRPr lang="en-US"/>
           </a:p>
         </p:txBody>
       </p:sp>
@@ -2248,7 +2246,7 @@
           <a:p>
             <a:pPr lvl="0"/>
             <a:r>
-              <a:rPr lang="en-US" smtClean="0"/>
+              <a:rPr lang="en-US"/>
               <a:t>Click to edit Master text styles</a:t>
             </a:r>
           </a:p>
@@ -2271,7 +2269,7 @@
           <a:p>
             <a:fld id="{5BCAD085-E8A6-8845-BD4E-CB4CCA059FC4}" type="datetimeFigureOut">
               <a:rPr lang="en-US" smtClean="0"/>
-              <a:t>1/27/13</a:t>
+              <a:t>7/20/2026</a:t>
             </a:fld>
             <a:endParaRPr lang="en-US"/>
           </a:p>
@@ -2374,10 +2372,9 @@
           </a:lstStyle>
           <a:p>
             <a:r>
-              <a:rPr lang="en-US" smtClean="0"/>
+              <a:rPr lang="en-US"/>
               <a:t>Click to edit Master title style</a:t>
             </a:r>
-            <a:endParaRPr lang="en-US"/>
           </a:p>
         </p:txBody>
       </p:sp>
@@ -2501,7 +2498,7 @@
           <a:p>
             <a:pPr lvl="0"/>
             <a:r>
-              <a:rPr lang="en-US" smtClean="0"/>
+              <a:rPr lang="en-US"/>
               <a:t>Click to edit Master text styles</a:t>
             </a:r>
           </a:p>
@@ -2524,7 +2521,7 @@
           <a:p>
             <a:fld id="{5BCAD085-E8A6-8845-BD4E-CB4CCA059FC4}" type="datetimeFigureOut">
               <a:rPr lang="en-US" smtClean="0"/>
-              <a:t>1/27/13</a:t>
+              <a:t>7/20/2026</a:t>
             </a:fld>
             <a:endParaRPr lang="en-US"/>
           </a:p>
@@ -2633,10 +2630,9 @@
           <a:lstStyle/>
           <a:p>
             <a:r>
-              <a:rPr lang="en-US" smtClean="0"/>
+              <a:rPr lang="en-US"/>
               <a:t>Click to edit Master title style</a:t>
             </a:r>
-            <a:endParaRPr lang="en-US"/>
           </a:p>
         </p:txBody>
       </p:sp>
@@ -2667,38 +2663,37 @@
           <a:p>
             <a:pPr lvl="0"/>
             <a:r>
-              <a:rPr lang="en-US" smtClean="0"/>
+              <a:rPr lang="en-US"/>
               <a:t>Click to edit Master text styles</a:t>
             </a:r>
           </a:p>
           <a:p>
             <a:pPr lvl="1"/>
             <a:r>
-              <a:rPr lang="en-US" smtClean="0"/>
+              <a:rPr lang="en-US"/>
               <a:t>Second level</a:t>
             </a:r>
           </a:p>
           <a:p>
             <a:pPr lvl="2"/>
             <a:r>
-              <a:rPr lang="en-US" smtClean="0"/>
+              <a:rPr lang="en-US"/>
               <a:t>Third level</a:t>
             </a:r>
           </a:p>
           <a:p>
             <a:pPr lvl="3"/>
             <a:r>
-              <a:rPr lang="en-US" smtClean="0"/>
+              <a:rPr lang="en-US"/>
               <a:t>Fourth level</a:t>
             </a:r>
           </a:p>
           <a:p>
             <a:pPr lvl="4"/>
             <a:r>
-              <a:rPr lang="en-US" smtClean="0"/>
+              <a:rPr lang="en-US"/>
               <a:t>Fifth level</a:t>
             </a:r>
-            <a:endParaRPr lang="en-US"/>
           </a:p>
         </p:txBody>
       </p:sp>
@@ -2737,7 +2732,7 @@
           <a:p>
             <a:fld id="{5BCAD085-E8A6-8845-BD4E-CB4CCA059FC4}" type="datetimeFigureOut">
               <a:rPr lang="en-US" smtClean="0"/>
-              <a:t>1/27/13</a:t>
+              <a:t>7/20/2026</a:t>
             </a:fld>
             <a:endParaRPr lang="en-US"/>
           </a:p>
@@ -3096,7 +3091,7 @@
 </file>
 
 <file path=ppt/slides/slide1.xml><?xml version="1.0" encoding="utf-8"?>
-<p:sld xmlns:a="http://schemas.openxmlformats.org/drawingml/2006/main" xmlns:p="http://schemas.openxmlformats.org/presentationml/2006/main" xmlns:r="http://schemas.openxmlformats.org/officeDocument/2006/relationships">
+<p:sld xmlns:a="http://schemas.openxmlformats.org/drawingml/2006/main" xmlns:r="http://schemas.openxmlformats.org/officeDocument/2006/relationships" xmlns:p="http://schemas.openxmlformats.org/presentationml/2006/main">
   <p:cSld>
     <p:bg>
       <p:bgPr>
@@ -3112,7 +3107,14 @@
         <p:cNvGrpSpPr/>
         <p:nvPr/>
       </p:nvGrpSpPr>
-      <p:grpSpPr/>
+      <p:grpSpPr>
+        <a:xfrm>
+          <a:off x="0" y="0"/>
+          <a:ext cx="0" cy="0"/>
+          <a:chOff x="0" y="0"/>
+          <a:chExt cx="0" cy="0"/>
+        </a:xfrm>
+      </p:grpSpPr>
       <p:sp>
         <p:nvSpPr>
           <p:cNvPr id="2" name="Rounded Rectangle 1"/>
@@ -3121,7 +3123,7 @@
         </p:nvSpPr>
         <p:spPr>
           <a:xfrm>
-            <a:off x="0" y="0"/>
+            <a:off x="305" y="0"/>
             <a:ext cx="12191695" cy="6858000"/>
           </a:xfrm>
           <a:prstGeom prst="roundRect">
@@ -3156,226 +3158,7 @@
           <a:lstStyle/>
           <a:p>
             <a:pPr algn="ctr"/>
-          </a:p>
-        </p:txBody>
-      </p:sp>
-      <p:sp>
-        <p:nvSpPr>
-          <p:cNvPr id="3" name="Rectangle 2"/>
-          <p:cNvSpPr/>
-          <p:nvPr/>
-        </p:nvSpPr>
-        <p:spPr>
-          <a:xfrm rot="1080000">
-            <a:off x="10972800" y="-548640"/>
-            <a:ext cx="22860" cy="2926080"/>
-          </a:xfrm>
-          <a:prstGeom prst="rect">
-            <a:avLst/>
-          </a:prstGeom>
-          <a:solidFill>
-            <a:srgbClr val="3A567A"/>
-          </a:solidFill>
-          <a:ln>
-            <a:noFill/>
-          </a:ln>
-          <a:effectLst/>
-        </p:spPr>
-        <p:style>
-          <a:lnRef idx="1">
-            <a:schemeClr val="accent1"/>
-          </a:lnRef>
-          <a:fillRef idx="3">
-            <a:schemeClr val="accent1"/>
-          </a:fillRef>
-          <a:effectRef idx="2">
-            <a:schemeClr val="accent1"/>
-          </a:effectRef>
-          <a:fontRef idx="minor">
-            <a:schemeClr val="lt1"/>
-          </a:fontRef>
-        </p:style>
-        <p:txBody>
-          <a:bodyPr rtlCol="0" anchor="ctr"/>
-          <a:lstStyle/>
-          <a:p>
-            <a:pPr algn="ctr"/>
-          </a:p>
-        </p:txBody>
-      </p:sp>
-      <p:sp>
-        <p:nvSpPr>
-          <p:cNvPr id="4" name="Rectangle 3"/>
-          <p:cNvSpPr/>
-          <p:nvPr/>
-        </p:nvSpPr>
-        <p:spPr>
-          <a:xfrm rot="1800000">
-            <a:off x="10991088" y="-548640"/>
-            <a:ext cx="22860" cy="3063240"/>
-          </a:xfrm>
-          <a:prstGeom prst="rect">
-            <a:avLst/>
-          </a:prstGeom>
-          <a:solidFill>
-            <a:srgbClr val="3A567A"/>
-          </a:solidFill>
-          <a:ln>
-            <a:noFill/>
-          </a:ln>
-          <a:effectLst/>
-        </p:spPr>
-        <p:style>
-          <a:lnRef idx="1">
-            <a:schemeClr val="accent1"/>
-          </a:lnRef>
-          <a:fillRef idx="3">
-            <a:schemeClr val="accent1"/>
-          </a:fillRef>
-          <a:effectRef idx="2">
-            <a:schemeClr val="accent1"/>
-          </a:effectRef>
-          <a:fontRef idx="minor">
-            <a:schemeClr val="lt1"/>
-          </a:fontRef>
-        </p:style>
-        <p:txBody>
-          <a:bodyPr rtlCol="0" anchor="ctr"/>
-          <a:lstStyle/>
-          <a:p>
-            <a:pPr algn="ctr"/>
-          </a:p>
-        </p:txBody>
-      </p:sp>
-      <p:sp>
-        <p:nvSpPr>
-          <p:cNvPr id="5" name="Rectangle 4"/>
-          <p:cNvSpPr/>
-          <p:nvPr/>
-        </p:nvSpPr>
-        <p:spPr>
-          <a:xfrm rot="2520000">
-            <a:off x="11009376" y="-548640"/>
-            <a:ext cx="22860" cy="3200400"/>
-          </a:xfrm>
-          <a:prstGeom prst="rect">
-            <a:avLst/>
-          </a:prstGeom>
-          <a:solidFill>
-            <a:srgbClr val="3A567A"/>
-          </a:solidFill>
-          <a:ln>
-            <a:noFill/>
-          </a:ln>
-          <a:effectLst/>
-        </p:spPr>
-        <p:style>
-          <a:lnRef idx="1">
-            <a:schemeClr val="accent1"/>
-          </a:lnRef>
-          <a:fillRef idx="3">
-            <a:schemeClr val="accent1"/>
-          </a:fillRef>
-          <a:effectRef idx="2">
-            <a:schemeClr val="accent1"/>
-          </a:effectRef>
-          <a:fontRef idx="minor">
-            <a:schemeClr val="lt1"/>
-          </a:fontRef>
-        </p:style>
-        <p:txBody>
-          <a:bodyPr rtlCol="0" anchor="ctr"/>
-          <a:lstStyle/>
-          <a:p>
-            <a:pPr algn="ctr"/>
-          </a:p>
-        </p:txBody>
-      </p:sp>
-      <p:sp>
-        <p:nvSpPr>
-          <p:cNvPr id="6" name="Rectangle 5"/>
-          <p:cNvSpPr/>
-          <p:nvPr/>
-        </p:nvSpPr>
-        <p:spPr>
-          <a:xfrm rot="3240000">
-            <a:off x="11027664" y="-548640"/>
-            <a:ext cx="22860" cy="3337560"/>
-          </a:xfrm>
-          <a:prstGeom prst="rect">
-            <a:avLst/>
-          </a:prstGeom>
-          <a:solidFill>
-            <a:srgbClr val="3A567A"/>
-          </a:solidFill>
-          <a:ln>
-            <a:noFill/>
-          </a:ln>
-          <a:effectLst/>
-        </p:spPr>
-        <p:style>
-          <a:lnRef idx="1">
-            <a:schemeClr val="accent1"/>
-          </a:lnRef>
-          <a:fillRef idx="3">
-            <a:schemeClr val="accent1"/>
-          </a:fillRef>
-          <a:effectRef idx="2">
-            <a:schemeClr val="accent1"/>
-          </a:effectRef>
-          <a:fontRef idx="minor">
-            <a:schemeClr val="lt1"/>
-          </a:fontRef>
-        </p:style>
-        <p:txBody>
-          <a:bodyPr rtlCol="0" anchor="ctr"/>
-          <a:lstStyle/>
-          <a:p>
-            <a:pPr algn="ctr"/>
-          </a:p>
-        </p:txBody>
-      </p:sp>
-      <p:sp>
-        <p:nvSpPr>
-          <p:cNvPr id="7" name="Rectangle 6"/>
-          <p:cNvSpPr/>
-          <p:nvPr/>
-        </p:nvSpPr>
-        <p:spPr>
-          <a:xfrm rot="3960000">
-            <a:off x="11045952" y="-548640"/>
-            <a:ext cx="22860" cy="3474720"/>
-          </a:xfrm>
-          <a:prstGeom prst="rect">
-            <a:avLst/>
-          </a:prstGeom>
-          <a:solidFill>
-            <a:srgbClr val="3A567A"/>
-          </a:solidFill>
-          <a:ln>
-            <a:noFill/>
-          </a:ln>
-          <a:effectLst/>
-        </p:spPr>
-        <p:style>
-          <a:lnRef idx="1">
-            <a:schemeClr val="accent1"/>
-          </a:lnRef>
-          <a:fillRef idx="3">
-            <a:schemeClr val="accent1"/>
-          </a:fillRef>
-          <a:effectRef idx="2">
-            <a:schemeClr val="accent1"/>
-          </a:effectRef>
-          <a:fontRef idx="minor">
-            <a:schemeClr val="lt1"/>
-          </a:fontRef>
-        </p:style>
-        <p:txBody>
-          <a:bodyPr rtlCol="0" anchor="ctr"/>
-          <a:lstStyle/>
-          <a:p>
-            <a:pPr algn="ctr"/>
+            <a:endParaRPr/>
           </a:p>
         </p:txBody>
       </p:sp>
@@ -3420,6 +3203,7 @@
           <a:lstStyle/>
           <a:p>
             <a:pPr algn="ctr"/>
+            <a:endParaRPr/>
           </a:p>
         </p:txBody>
       </p:sp>
@@ -3440,7 +3224,7 @@
           <a:noFill/>
         </p:spPr>
         <p:txBody>
-          <a:bodyPr wrap="square" anchor="t" lIns="0" rIns="0" tIns="0" bIns="0">
+          <a:bodyPr wrap="square" lIns="0" tIns="0" rIns="0" bIns="0" anchor="t">
             <a:spAutoFit/>
           </a:bodyPr>
           <a:lstStyle/>
@@ -3487,7 +3271,7 @@
           <a:noFill/>
         </p:spPr>
         <p:txBody>
-          <a:bodyPr wrap="square" anchor="t" lIns="0" rIns="0" tIns="0" bIns="0">
+          <a:bodyPr wrap="square" lIns="0" tIns="0" rIns="0" bIns="0" anchor="t">
             <a:spAutoFit/>
           </a:bodyPr>
           <a:lstStyle/>
@@ -3534,7 +3318,7 @@
           <a:noFill/>
         </p:spPr>
         <p:txBody>
-          <a:bodyPr wrap="square" anchor="t" lIns="0" rIns="0" tIns="0" bIns="0">
+          <a:bodyPr wrap="square" lIns="0" tIns="0" rIns="0" bIns="0" anchor="t">
             <a:spAutoFit/>
           </a:bodyPr>
           <a:lstStyle/>
@@ -3581,7 +3365,7 @@
           <a:noFill/>
         </p:spPr>
         <p:txBody>
-          <a:bodyPr wrap="square" anchor="t" lIns="0" rIns="0" tIns="0" bIns="0">
+          <a:bodyPr wrap="square" lIns="0" tIns="0" rIns="0" bIns="0" anchor="t">
             <a:spAutoFit/>
           </a:bodyPr>
           <a:lstStyle/>
@@ -3628,7 +3412,7 @@
           <a:noFill/>
         </p:spPr>
         <p:txBody>
-          <a:bodyPr wrap="square" anchor="t" lIns="0" rIns="0" tIns="0" bIns="0">
+          <a:bodyPr wrap="square" lIns="0" tIns="0" rIns="0" bIns="0" anchor="t">
             <a:spAutoFit/>
           </a:bodyPr>
           <a:lstStyle/>
@@ -3667,7 +3451,7 @@
 </file>
 
 <file path=ppt/slides/slide10.xml><?xml version="1.0" encoding="utf-8"?>
-<p:sld xmlns:a="http://schemas.openxmlformats.org/drawingml/2006/main" xmlns:p="http://schemas.openxmlformats.org/presentationml/2006/main" xmlns:r="http://schemas.openxmlformats.org/officeDocument/2006/relationships">
+<p:sld xmlns:a="http://schemas.openxmlformats.org/drawingml/2006/main" xmlns:r="http://schemas.openxmlformats.org/officeDocument/2006/relationships" xmlns:p="http://schemas.openxmlformats.org/presentationml/2006/main">
   <p:cSld>
     <p:bg>
       <p:bgPr>
@@ -3683,227 +3467,14 @@
         <p:cNvGrpSpPr/>
         <p:nvPr/>
       </p:nvGrpSpPr>
-      <p:grpSpPr/>
-      <p:sp>
-        <p:nvSpPr>
-          <p:cNvPr id="2" name="Rectangle 1"/>
-          <p:cNvSpPr/>
-          <p:nvPr/>
-        </p:nvSpPr>
-        <p:spPr>
-          <a:xfrm rot="1080000">
-            <a:off x="10972800" y="-548640"/>
-            <a:ext cx="22860" cy="2926080"/>
-          </a:xfrm>
-          <a:prstGeom prst="rect">
-            <a:avLst/>
-          </a:prstGeom>
-          <a:solidFill>
-            <a:srgbClr val="F3D9D2"/>
-          </a:solidFill>
-          <a:ln>
-            <a:noFill/>
-          </a:ln>
-          <a:effectLst/>
-        </p:spPr>
-        <p:style>
-          <a:lnRef idx="1">
-            <a:schemeClr val="accent1"/>
-          </a:lnRef>
-          <a:fillRef idx="3">
-            <a:schemeClr val="accent1"/>
-          </a:fillRef>
-          <a:effectRef idx="2">
-            <a:schemeClr val="accent1"/>
-          </a:effectRef>
-          <a:fontRef idx="minor">
-            <a:schemeClr val="lt1"/>
-          </a:fontRef>
-        </p:style>
-        <p:txBody>
-          <a:bodyPr rtlCol="0" anchor="ctr"/>
-          <a:lstStyle/>
-          <a:p>
-            <a:pPr algn="ctr"/>
-          </a:p>
-        </p:txBody>
-      </p:sp>
-      <p:sp>
-        <p:nvSpPr>
-          <p:cNvPr id="3" name="Rectangle 2"/>
-          <p:cNvSpPr/>
-          <p:nvPr/>
-        </p:nvSpPr>
-        <p:spPr>
-          <a:xfrm rot="1800000">
-            <a:off x="10991088" y="-548640"/>
-            <a:ext cx="22860" cy="3063240"/>
-          </a:xfrm>
-          <a:prstGeom prst="rect">
-            <a:avLst/>
-          </a:prstGeom>
-          <a:solidFill>
-            <a:srgbClr val="F3D9D2"/>
-          </a:solidFill>
-          <a:ln>
-            <a:noFill/>
-          </a:ln>
-          <a:effectLst/>
-        </p:spPr>
-        <p:style>
-          <a:lnRef idx="1">
-            <a:schemeClr val="accent1"/>
-          </a:lnRef>
-          <a:fillRef idx="3">
-            <a:schemeClr val="accent1"/>
-          </a:fillRef>
-          <a:effectRef idx="2">
-            <a:schemeClr val="accent1"/>
-          </a:effectRef>
-          <a:fontRef idx="minor">
-            <a:schemeClr val="lt1"/>
-          </a:fontRef>
-        </p:style>
-        <p:txBody>
-          <a:bodyPr rtlCol="0" anchor="ctr"/>
-          <a:lstStyle/>
-          <a:p>
-            <a:pPr algn="ctr"/>
-          </a:p>
-        </p:txBody>
-      </p:sp>
-      <p:sp>
-        <p:nvSpPr>
-          <p:cNvPr id="4" name="Rectangle 3"/>
-          <p:cNvSpPr/>
-          <p:nvPr/>
-        </p:nvSpPr>
-        <p:spPr>
-          <a:xfrm rot="2520000">
-            <a:off x="11009376" y="-548640"/>
-            <a:ext cx="22860" cy="3200400"/>
-          </a:xfrm>
-          <a:prstGeom prst="rect">
-            <a:avLst/>
-          </a:prstGeom>
-          <a:solidFill>
-            <a:srgbClr val="F3D9D2"/>
-          </a:solidFill>
-          <a:ln>
-            <a:noFill/>
-          </a:ln>
-          <a:effectLst/>
-        </p:spPr>
-        <p:style>
-          <a:lnRef idx="1">
-            <a:schemeClr val="accent1"/>
-          </a:lnRef>
-          <a:fillRef idx="3">
-            <a:schemeClr val="accent1"/>
-          </a:fillRef>
-          <a:effectRef idx="2">
-            <a:schemeClr val="accent1"/>
-          </a:effectRef>
-          <a:fontRef idx="minor">
-            <a:schemeClr val="lt1"/>
-          </a:fontRef>
-        </p:style>
-        <p:txBody>
-          <a:bodyPr rtlCol="0" anchor="ctr"/>
-          <a:lstStyle/>
-          <a:p>
-            <a:pPr algn="ctr"/>
-          </a:p>
-        </p:txBody>
-      </p:sp>
-      <p:sp>
-        <p:nvSpPr>
-          <p:cNvPr id="5" name="Rectangle 4"/>
-          <p:cNvSpPr/>
-          <p:nvPr/>
-        </p:nvSpPr>
-        <p:spPr>
-          <a:xfrm rot="3240000">
-            <a:off x="11027664" y="-548640"/>
-            <a:ext cx="22860" cy="3337560"/>
-          </a:xfrm>
-          <a:prstGeom prst="rect">
-            <a:avLst/>
-          </a:prstGeom>
-          <a:solidFill>
-            <a:srgbClr val="F3D9D2"/>
-          </a:solidFill>
-          <a:ln>
-            <a:noFill/>
-          </a:ln>
-          <a:effectLst/>
-        </p:spPr>
-        <p:style>
-          <a:lnRef idx="1">
-            <a:schemeClr val="accent1"/>
-          </a:lnRef>
-          <a:fillRef idx="3">
-            <a:schemeClr val="accent1"/>
-          </a:fillRef>
-          <a:effectRef idx="2">
-            <a:schemeClr val="accent1"/>
-          </a:effectRef>
-          <a:fontRef idx="minor">
-            <a:schemeClr val="lt1"/>
-          </a:fontRef>
-        </p:style>
-        <p:txBody>
-          <a:bodyPr rtlCol="0" anchor="ctr"/>
-          <a:lstStyle/>
-          <a:p>
-            <a:pPr algn="ctr"/>
-          </a:p>
-        </p:txBody>
-      </p:sp>
-      <p:sp>
-        <p:nvSpPr>
-          <p:cNvPr id="6" name="Rectangle 5"/>
-          <p:cNvSpPr/>
-          <p:nvPr/>
-        </p:nvSpPr>
-        <p:spPr>
-          <a:xfrm rot="3960000">
-            <a:off x="11045952" y="-548640"/>
-            <a:ext cx="22860" cy="3474720"/>
-          </a:xfrm>
-          <a:prstGeom prst="rect">
-            <a:avLst/>
-          </a:prstGeom>
-          <a:solidFill>
-            <a:srgbClr val="F3D9D2"/>
-          </a:solidFill>
-          <a:ln>
-            <a:noFill/>
-          </a:ln>
-          <a:effectLst/>
-        </p:spPr>
-        <p:style>
-          <a:lnRef idx="1">
-            <a:schemeClr val="accent1"/>
-          </a:lnRef>
-          <a:fillRef idx="3">
-            <a:schemeClr val="accent1"/>
-          </a:fillRef>
-          <a:effectRef idx="2">
-            <a:schemeClr val="accent1"/>
-          </a:effectRef>
-          <a:fontRef idx="minor">
-            <a:schemeClr val="lt1"/>
-          </a:fontRef>
-        </p:style>
-        <p:txBody>
-          <a:bodyPr rtlCol="0" anchor="ctr"/>
-          <a:lstStyle/>
-          <a:p>
-            <a:pPr algn="ctr"/>
-          </a:p>
-        </p:txBody>
-      </p:sp>
+      <p:grpSpPr>
+        <a:xfrm>
+          <a:off x="0" y="0"/>
+          <a:ext cx="0" cy="0"/>
+          <a:chOff x="0" y="0"/>
+          <a:chExt cx="0" cy="0"/>
+        </a:xfrm>
+      </p:grpSpPr>
       <p:sp>
         <p:nvSpPr>
           <p:cNvPr id="7" name="TextBox 6"/>
@@ -3921,7 +3492,7 @@
           <a:noFill/>
         </p:spPr>
         <p:txBody>
-          <a:bodyPr wrap="square" anchor="t" lIns="0" rIns="0" tIns="0" bIns="0">
+          <a:bodyPr wrap="square" lIns="0" tIns="0" rIns="0" bIns="0" anchor="t">
             <a:spAutoFit/>
           </a:bodyPr>
           <a:lstStyle/>
@@ -3968,7 +3539,7 @@
           <a:noFill/>
         </p:spPr>
         <p:txBody>
-          <a:bodyPr wrap="square" anchor="t" lIns="0" rIns="0" tIns="0" bIns="0">
+          <a:bodyPr wrap="square" lIns="0" tIns="0" rIns="0" bIns="0" anchor="t">
             <a:spAutoFit/>
           </a:bodyPr>
           <a:lstStyle/>
@@ -4043,6 +3614,7 @@
           <a:lstStyle/>
           <a:p>
             <a:pPr algn="ctr"/>
+            <a:endParaRPr/>
           </a:p>
         </p:txBody>
       </p:sp>
@@ -4063,7 +3635,7 @@
           <a:noFill/>
         </p:spPr>
         <p:txBody>
-          <a:bodyPr wrap="square" anchor="t" lIns="0" rIns="0" tIns="0" bIns="0">
+          <a:bodyPr wrap="square" lIns="0" tIns="0" rIns="0" bIns="0" anchor="t">
             <a:spAutoFit/>
           </a:bodyPr>
           <a:lstStyle/>
@@ -4110,7 +3682,7 @@
           <a:noFill/>
         </p:spPr>
         <p:txBody>
-          <a:bodyPr wrap="square" anchor="t" lIns="0" rIns="0" tIns="0" bIns="0">
+          <a:bodyPr wrap="square" lIns="0" tIns="0" rIns="0" bIns="0" anchor="t">
             <a:spAutoFit/>
           </a:bodyPr>
           <a:lstStyle/>
@@ -4185,6 +3757,7 @@
           <a:lstStyle/>
           <a:p>
             <a:pPr algn="ctr"/>
+            <a:endParaRPr/>
           </a:p>
         </p:txBody>
       </p:sp>
@@ -4205,7 +3778,7 @@
           <a:noFill/>
         </p:spPr>
         <p:txBody>
-          <a:bodyPr wrap="square" anchor="t" lIns="0" rIns="0" tIns="0" bIns="0">
+          <a:bodyPr wrap="square" lIns="0" tIns="0" rIns="0" bIns="0" anchor="t">
             <a:spAutoFit/>
           </a:bodyPr>
           <a:lstStyle/>
@@ -4252,7 +3825,7 @@
           <a:noFill/>
         </p:spPr>
         <p:txBody>
-          <a:bodyPr wrap="square" lIns="0" rIns="0" tIns="0" bIns="0">
+          <a:bodyPr wrap="square" lIns="0" tIns="0" rIns="0" bIns="0">
             <a:spAutoFit/>
           </a:bodyPr>
           <a:lstStyle/>
@@ -4447,7 +4020,7 @@
           <a:noFill/>
         </p:spPr>
         <p:txBody>
-          <a:bodyPr wrap="square" anchor="t" lIns="0" rIns="0" tIns="0" bIns="0">
+          <a:bodyPr wrap="square" lIns="0" tIns="0" rIns="0" bIns="0" anchor="t">
             <a:spAutoFit/>
           </a:bodyPr>
           <a:lstStyle/>
@@ -4486,7 +4059,7 @@
 </file>
 
 <file path=ppt/slides/slide11.xml><?xml version="1.0" encoding="utf-8"?>
-<p:sld xmlns:a="http://schemas.openxmlformats.org/drawingml/2006/main" xmlns:p="http://schemas.openxmlformats.org/presentationml/2006/main" xmlns:r="http://schemas.openxmlformats.org/officeDocument/2006/relationships">
+<p:sld xmlns:a="http://schemas.openxmlformats.org/drawingml/2006/main" xmlns:r="http://schemas.openxmlformats.org/officeDocument/2006/relationships" xmlns:p="http://schemas.openxmlformats.org/presentationml/2006/main">
   <p:cSld>
     <p:bg>
       <p:bgPr>
@@ -4502,227 +4075,14 @@
         <p:cNvGrpSpPr/>
         <p:nvPr/>
       </p:nvGrpSpPr>
-      <p:grpSpPr/>
-      <p:sp>
-        <p:nvSpPr>
-          <p:cNvPr id="2" name="Rectangle 1"/>
-          <p:cNvSpPr/>
-          <p:nvPr/>
-        </p:nvSpPr>
-        <p:spPr>
-          <a:xfrm rot="1080000">
-            <a:off x="10972800" y="-548640"/>
-            <a:ext cx="22860" cy="2926080"/>
-          </a:xfrm>
-          <a:prstGeom prst="rect">
-            <a:avLst/>
-          </a:prstGeom>
-          <a:solidFill>
-            <a:srgbClr val="F3D9D2"/>
-          </a:solidFill>
-          <a:ln>
-            <a:noFill/>
-          </a:ln>
-          <a:effectLst/>
-        </p:spPr>
-        <p:style>
-          <a:lnRef idx="1">
-            <a:schemeClr val="accent1"/>
-          </a:lnRef>
-          <a:fillRef idx="3">
-            <a:schemeClr val="accent1"/>
-          </a:fillRef>
-          <a:effectRef idx="2">
-            <a:schemeClr val="accent1"/>
-          </a:effectRef>
-          <a:fontRef idx="minor">
-            <a:schemeClr val="lt1"/>
-          </a:fontRef>
-        </p:style>
-        <p:txBody>
-          <a:bodyPr rtlCol="0" anchor="ctr"/>
-          <a:lstStyle/>
-          <a:p>
-            <a:pPr algn="ctr"/>
-          </a:p>
-        </p:txBody>
-      </p:sp>
-      <p:sp>
-        <p:nvSpPr>
-          <p:cNvPr id="3" name="Rectangle 2"/>
-          <p:cNvSpPr/>
-          <p:nvPr/>
-        </p:nvSpPr>
-        <p:spPr>
-          <a:xfrm rot="1800000">
-            <a:off x="10991088" y="-548640"/>
-            <a:ext cx="22860" cy="3063240"/>
-          </a:xfrm>
-          <a:prstGeom prst="rect">
-            <a:avLst/>
-          </a:prstGeom>
-          <a:solidFill>
-            <a:srgbClr val="F3D9D2"/>
-          </a:solidFill>
-          <a:ln>
-            <a:noFill/>
-          </a:ln>
-          <a:effectLst/>
-        </p:spPr>
-        <p:style>
-          <a:lnRef idx="1">
-            <a:schemeClr val="accent1"/>
-          </a:lnRef>
-          <a:fillRef idx="3">
-            <a:schemeClr val="accent1"/>
-          </a:fillRef>
-          <a:effectRef idx="2">
-            <a:schemeClr val="accent1"/>
-          </a:effectRef>
-          <a:fontRef idx="minor">
-            <a:schemeClr val="lt1"/>
-          </a:fontRef>
-        </p:style>
-        <p:txBody>
-          <a:bodyPr rtlCol="0" anchor="ctr"/>
-          <a:lstStyle/>
-          <a:p>
-            <a:pPr algn="ctr"/>
-          </a:p>
-        </p:txBody>
-      </p:sp>
-      <p:sp>
-        <p:nvSpPr>
-          <p:cNvPr id="4" name="Rectangle 3"/>
-          <p:cNvSpPr/>
-          <p:nvPr/>
-        </p:nvSpPr>
-        <p:spPr>
-          <a:xfrm rot="2520000">
-            <a:off x="11009376" y="-548640"/>
-            <a:ext cx="22860" cy="3200400"/>
-          </a:xfrm>
-          <a:prstGeom prst="rect">
-            <a:avLst/>
-          </a:prstGeom>
-          <a:solidFill>
-            <a:srgbClr val="F3D9D2"/>
-          </a:solidFill>
-          <a:ln>
-            <a:noFill/>
-          </a:ln>
-          <a:effectLst/>
-        </p:spPr>
-        <p:style>
-          <a:lnRef idx="1">
-            <a:schemeClr val="accent1"/>
-          </a:lnRef>
-          <a:fillRef idx="3">
-            <a:schemeClr val="accent1"/>
-          </a:fillRef>
-          <a:effectRef idx="2">
-            <a:schemeClr val="accent1"/>
-          </a:effectRef>
-          <a:fontRef idx="minor">
-            <a:schemeClr val="lt1"/>
-          </a:fontRef>
-        </p:style>
-        <p:txBody>
-          <a:bodyPr rtlCol="0" anchor="ctr"/>
-          <a:lstStyle/>
-          <a:p>
-            <a:pPr algn="ctr"/>
-          </a:p>
-        </p:txBody>
-      </p:sp>
-      <p:sp>
-        <p:nvSpPr>
-          <p:cNvPr id="5" name="Rectangle 4"/>
-          <p:cNvSpPr/>
-          <p:nvPr/>
-        </p:nvSpPr>
-        <p:spPr>
-          <a:xfrm rot="3240000">
-            <a:off x="11027664" y="-548640"/>
-            <a:ext cx="22860" cy="3337560"/>
-          </a:xfrm>
-          <a:prstGeom prst="rect">
-            <a:avLst/>
-          </a:prstGeom>
-          <a:solidFill>
-            <a:srgbClr val="F3D9D2"/>
-          </a:solidFill>
-          <a:ln>
-            <a:noFill/>
-          </a:ln>
-          <a:effectLst/>
-        </p:spPr>
-        <p:style>
-          <a:lnRef idx="1">
-            <a:schemeClr val="accent1"/>
-          </a:lnRef>
-          <a:fillRef idx="3">
-            <a:schemeClr val="accent1"/>
-          </a:fillRef>
-          <a:effectRef idx="2">
-            <a:schemeClr val="accent1"/>
-          </a:effectRef>
-          <a:fontRef idx="minor">
-            <a:schemeClr val="lt1"/>
-          </a:fontRef>
-        </p:style>
-        <p:txBody>
-          <a:bodyPr rtlCol="0" anchor="ctr"/>
-          <a:lstStyle/>
-          <a:p>
-            <a:pPr algn="ctr"/>
-          </a:p>
-        </p:txBody>
-      </p:sp>
-      <p:sp>
-        <p:nvSpPr>
-          <p:cNvPr id="6" name="Rectangle 5"/>
-          <p:cNvSpPr/>
-          <p:nvPr/>
-        </p:nvSpPr>
-        <p:spPr>
-          <a:xfrm rot="3960000">
-            <a:off x="11045952" y="-548640"/>
-            <a:ext cx="22860" cy="3474720"/>
-          </a:xfrm>
-          <a:prstGeom prst="rect">
-            <a:avLst/>
-          </a:prstGeom>
-          <a:solidFill>
-            <a:srgbClr val="F3D9D2"/>
-          </a:solidFill>
-          <a:ln>
-            <a:noFill/>
-          </a:ln>
-          <a:effectLst/>
-        </p:spPr>
-        <p:style>
-          <a:lnRef idx="1">
-            <a:schemeClr val="accent1"/>
-          </a:lnRef>
-          <a:fillRef idx="3">
-            <a:schemeClr val="accent1"/>
-          </a:fillRef>
-          <a:effectRef idx="2">
-            <a:schemeClr val="accent1"/>
-          </a:effectRef>
-          <a:fontRef idx="minor">
-            <a:schemeClr val="lt1"/>
-          </a:fontRef>
-        </p:style>
-        <p:txBody>
-          <a:bodyPr rtlCol="0" anchor="ctr"/>
-          <a:lstStyle/>
-          <a:p>
-            <a:pPr algn="ctr"/>
-          </a:p>
-        </p:txBody>
-      </p:sp>
+      <p:grpSpPr>
+        <a:xfrm>
+          <a:off x="0" y="0"/>
+          <a:ext cx="0" cy="0"/>
+          <a:chOff x="0" y="0"/>
+          <a:chExt cx="0" cy="0"/>
+        </a:xfrm>
+      </p:grpSpPr>
       <p:sp>
         <p:nvSpPr>
           <p:cNvPr id="7" name="TextBox 6"/>
@@ -4740,7 +4100,7 @@
           <a:noFill/>
         </p:spPr>
         <p:txBody>
-          <a:bodyPr wrap="square" anchor="t" lIns="0" rIns="0" tIns="0" bIns="0">
+          <a:bodyPr wrap="square" lIns="0" tIns="0" rIns="0" bIns="0" anchor="t">
             <a:spAutoFit/>
           </a:bodyPr>
           <a:lstStyle/>
@@ -4765,7 +4125,7 @@
                 <a:ea typeface="Microsoft JhengHei"/>
                 <a:cs typeface="Microsoft JhengHei"/>
               </a:rPr>
-              <a:t>技術亮點 ② · 跨機構對齊＋中文檢索</a:t>
+              <a:t>技術亮點 ② · 資料治理與跨機構對齊</a:t>
             </a:r>
           </a:p>
         </p:txBody>
@@ -4787,7 +4147,7 @@
           <a:noFill/>
         </p:spPr>
         <p:txBody>
-          <a:bodyPr wrap="square" anchor="t" lIns="0" rIns="0" tIns="0" bIns="0">
+          <a:bodyPr wrap="square" lIns="0" tIns="0" rIns="0" bIns="0" anchor="t">
             <a:spAutoFit/>
           </a:bodyPr>
           <a:lstStyle/>
@@ -4812,7 +4172,7 @@
                 <a:ea typeface="Microsoft JhengHei"/>
                 <a:cs typeface="Microsoft JhengHei"/>
               </a:rPr>
-              <a:t>術語不一致？照樣對得起來</a:t>
+              <a:t>把資料整乾淨，AI 才不會答錯</a:t>
             </a:r>
           </a:p>
         </p:txBody>
@@ -4862,6 +4222,7 @@
           <a:lstStyle/>
           <a:p>
             <a:pPr algn="ctr"/>
+            <a:endParaRPr/>
           </a:p>
         </p:txBody>
       </p:sp>
@@ -4882,7 +4243,7 @@
           <a:noFill/>
         </p:spPr>
         <p:txBody>
-          <a:bodyPr wrap="square" anchor="t" lIns="0" rIns="0" tIns="0" bIns="0">
+          <a:bodyPr wrap="square" lIns="0" tIns="0" rIns="0" bIns="0" anchor="t">
             <a:spAutoFit/>
           </a:bodyPr>
           <a:lstStyle/>
@@ -4929,7 +4290,7 @@
           <a:noFill/>
         </p:spPr>
         <p:txBody>
-          <a:bodyPr wrap="square" anchor="t" lIns="0" rIns="0" tIns="0" bIns="0">
+          <a:bodyPr wrap="square" lIns="0" tIns="0" rIns="0" bIns="0" anchor="t">
             <a:spAutoFit/>
           </a:bodyPr>
           <a:lstStyle/>
@@ -4954,7 +4315,7 @@
                 <a:ea typeface="Microsoft JhengHei"/>
                 <a:cs typeface="Microsoft JhengHei"/>
               </a:rPr>
-              <a:t>各家用詞不同、金額單位不同；平台預設英文 embedding 對中文檢索不準。</a:t>
+              <a:t>原始圖譜有 211 個同名 ROE 節點、數值掛在關係上，檢索常抓錯期間；各家術語與單位又不一致。</a:t>
             </a:r>
           </a:p>
         </p:txBody>
@@ -5004,6 +4365,7 @@
           <a:lstStyle/>
           <a:p>
             <a:pPr algn="ctr"/>
+            <a:endParaRPr/>
           </a:p>
         </p:txBody>
       </p:sp>
@@ -5024,7 +4386,7 @@
           <a:noFill/>
         </p:spPr>
         <p:txBody>
-          <a:bodyPr wrap="square" anchor="t" lIns="0" rIns="0" tIns="0" bIns="0">
+          <a:bodyPr wrap="square" lIns="0" tIns="0" rIns="0" bIns="0" anchor="t">
             <a:spAutoFit/>
           </a:bodyPr>
           <a:lstStyle/>
@@ -5071,7 +4433,7 @@
           <a:noFill/>
         </p:spPr>
         <p:txBody>
-          <a:bodyPr wrap="square" lIns="0" rIns="0" tIns="0" bIns="0">
+          <a:bodyPr wrap="square" lIns="0" tIns="0" rIns="0" bIns="0">
             <a:spAutoFit/>
           </a:bodyPr>
           <a:lstStyle/>
@@ -5104,6 +4466,135 @@
                 <a:ea typeface="Microsoft JhengHei"/>
                 <a:cs typeface="Microsoft JhengHei"/>
               </a:rPr>
+              <a:t>知識圖譜重建　</a:t>
+            </a:r>
+            <a:r>
+              <a:rPr sz="1500">
+                <a:solidFill>
+                  <a:srgbClr val="434343"/>
+                </a:solidFill>
+                <a:latin typeface="Microsoft JhengHei"/>
+                <a:ea typeface="Microsoft JhengHei"/>
+                <a:cs typeface="Microsoft JhengHei"/>
+              </a:rPr>
+              <a:t>每指標唯一節點（公司｜期間｜指標）</a:t>
+            </a:r>
+          </a:p>
+          <a:p>
+            <a:pPr>
+              <a:lnSpc>
+                <a:spcPct val="115000"/>
+              </a:lnSpc>
+              <a:spcAft>
+                <a:spcPts val="1200"/>
+              </a:spcAft>
+            </a:pPr>
+            <a:r>
+              <a:rPr sz="1300" b="1">
+                <a:solidFill>
+                  <a:srgbClr val="E8654E"/>
+                </a:solidFill>
+                <a:latin typeface="Microsoft JhengHei"/>
+                <a:ea typeface="Microsoft JhengHei"/>
+                <a:cs typeface="Microsoft JhengHei"/>
+              </a:rPr>
+              <a:t>●  </a:t>
+            </a:r>
+            <a:r>
+              <a:rPr sz="1500" b="1">
+                <a:solidFill>
+                  <a:srgbClr val="1E3A5F"/>
+                </a:solidFill>
+                <a:latin typeface="Microsoft JhengHei"/>
+                <a:ea typeface="Microsoft JhengHei"/>
+                <a:cs typeface="Microsoft JhengHei"/>
+              </a:rPr>
+              <a:t>數值掛節點　</a:t>
+            </a:r>
+            <a:r>
+              <a:rPr sz="1500">
+                <a:solidFill>
+                  <a:srgbClr val="434343"/>
+                </a:solidFill>
+                <a:latin typeface="Microsoft JhengHei"/>
+                <a:ea typeface="Microsoft JhengHei"/>
+                <a:cs typeface="Microsoft JhengHei"/>
+              </a:rPr>
+              <a:t>不掛關係，結構上杜絕跨期誤配</a:t>
+            </a:r>
+          </a:p>
+          <a:p>
+            <a:pPr>
+              <a:lnSpc>
+                <a:spcPct val="115000"/>
+              </a:lnSpc>
+              <a:spcAft>
+                <a:spcPts val="1200"/>
+              </a:spcAft>
+            </a:pPr>
+            <a:r>
+              <a:rPr sz="1300" b="1">
+                <a:solidFill>
+                  <a:srgbClr val="E8654E"/>
+                </a:solidFill>
+                <a:latin typeface="Microsoft JhengHei"/>
+                <a:ea typeface="Microsoft JhengHei"/>
+                <a:cs typeface="Microsoft JhengHei"/>
+              </a:rPr>
+              <a:t>●  </a:t>
+            </a:r>
+            <a:r>
+              <a:rPr sz="1500" b="1">
+                <a:solidFill>
+                  <a:srgbClr val="1E3A5F"/>
+                </a:solidFill>
+                <a:latin typeface="Microsoft JhengHei"/>
+                <a:ea typeface="Microsoft JhengHei"/>
+                <a:cs typeface="Microsoft JhengHei"/>
+              </a:rPr>
+              <a:t>語義欄位固化　</a:t>
+            </a:r>
+            <a:r>
+              <a:rPr sz="1500">
+                <a:solidFill>
+                  <a:srgbClr val="434343"/>
+                </a:solidFill>
+                <a:latin typeface="Microsoft JhengHei"/>
+                <a:ea typeface="Microsoft JhengHei"/>
+                <a:cs typeface="Microsoft JhengHei"/>
+              </a:rPr>
+              <a:t>累計別／層級／單位／可比性入欄</a:t>
+            </a:r>
+          </a:p>
+          <a:p>
+            <a:pPr>
+              <a:lnSpc>
+                <a:spcPct val="115000"/>
+              </a:lnSpc>
+              <a:spcAft>
+                <a:spcPts val="1200"/>
+              </a:spcAft>
+            </a:pPr>
+            <a:r>
+              <a:rPr sz="1300" b="1">
+                <a:solidFill>
+                  <a:srgbClr val="E8654E"/>
+                </a:solidFill>
+                <a:latin typeface="Microsoft JhengHei"/>
+                <a:ea typeface="Microsoft JhengHei"/>
+                <a:cs typeface="Microsoft JhengHei"/>
+              </a:rPr>
+              <a:t>●  </a:t>
+            </a:r>
+            <a:r>
+              <a:rPr sz="1500" b="1">
+                <a:solidFill>
+                  <a:srgbClr val="1E3A5F"/>
+                </a:solidFill>
+                <a:latin typeface="Microsoft JhengHei"/>
+                <a:ea typeface="Microsoft JhengHei"/>
+                <a:cs typeface="Microsoft JhengHei"/>
+              </a:rPr>
               <a:t>標準比率字典　</a:t>
             </a:r>
             <a:r>
@@ -5115,136 +4606,7 @@
                 <a:ea typeface="Microsoft JhengHei"/>
                 <a:cs typeface="Microsoft JhengHei"/>
               </a:rPr>
-              <a:t>ROE／ROA／NIM／EPS 用定義對齊</a:t>
-            </a:r>
-          </a:p>
-          <a:p>
-            <a:pPr>
-              <a:lnSpc>
-                <a:spcPct val="115000"/>
-              </a:lnSpc>
-              <a:spcAft>
-                <a:spcPts val="1200"/>
-              </a:spcAft>
-            </a:pPr>
-            <a:r>
-              <a:rPr sz="1300" b="1">
-                <a:solidFill>
-                  <a:srgbClr val="E8654E"/>
-                </a:solidFill>
-                <a:latin typeface="Microsoft JhengHei"/>
-                <a:ea typeface="Microsoft JhengHei"/>
-                <a:cs typeface="Microsoft JhengHei"/>
-              </a:rPr>
-              <a:t>●  </a:t>
-            </a:r>
-            <a:r>
-              <a:rPr sz="1500" b="1">
-                <a:solidFill>
-                  <a:srgbClr val="1E3A5F"/>
-                </a:solidFill>
-                <a:latin typeface="Microsoft JhengHei"/>
-                <a:ea typeface="Microsoft JhengHei"/>
-                <a:cs typeface="Microsoft JhengHei"/>
-              </a:rPr>
-              <a:t>金額換算　</a:t>
-            </a:r>
-            <a:r>
-              <a:rPr sz="1500">
-                <a:solidFill>
-                  <a:srgbClr val="434343"/>
-                </a:solidFill>
-                <a:latin typeface="Microsoft JhengHei"/>
-                <a:ea typeface="Microsoft JhengHei"/>
-                <a:cs typeface="Microsoft JhengHei"/>
-              </a:rPr>
-              <a:t>自動統一換算成億元再比</a:t>
-            </a:r>
-          </a:p>
-          <a:p>
-            <a:pPr>
-              <a:lnSpc>
-                <a:spcPct val="115000"/>
-              </a:lnSpc>
-              <a:spcAft>
-                <a:spcPts val="1200"/>
-              </a:spcAft>
-            </a:pPr>
-            <a:r>
-              <a:rPr sz="1300" b="1">
-                <a:solidFill>
-                  <a:srgbClr val="E8654E"/>
-                </a:solidFill>
-                <a:latin typeface="Microsoft JhengHei"/>
-                <a:ea typeface="Microsoft JhengHei"/>
-                <a:cs typeface="Microsoft JhengHei"/>
-              </a:rPr>
-              <a:t>●  </a:t>
-            </a:r>
-            <a:r>
-              <a:rPr sz="1500" b="1">
-                <a:solidFill>
-                  <a:srgbClr val="1E3A5F"/>
-                </a:solidFill>
-                <a:latin typeface="Microsoft JhengHei"/>
-                <a:ea typeface="Microsoft JhengHei"/>
-                <a:cs typeface="Microsoft JhengHei"/>
-              </a:rPr>
-              <a:t>中文關鍵字混合檢索　</a:t>
-            </a:r>
-            <a:r>
-              <a:rPr sz="1500">
-                <a:solidFill>
-                  <a:srgbClr val="434343"/>
-                </a:solidFill>
-                <a:latin typeface="Microsoft JhengHei"/>
-                <a:ea typeface="Microsoft JhengHei"/>
-                <a:cs typeface="Microsoft JhengHei"/>
-              </a:rPr>
-              <a:t>解決英文 embedding 對中文不準</a:t>
-            </a:r>
-          </a:p>
-          <a:p>
-            <a:pPr>
-              <a:lnSpc>
-                <a:spcPct val="115000"/>
-              </a:lnSpc>
-              <a:spcAft>
-                <a:spcPts val="1200"/>
-              </a:spcAft>
-            </a:pPr>
-            <a:r>
-              <a:rPr sz="1300" b="1">
-                <a:solidFill>
-                  <a:srgbClr val="E8654E"/>
-                </a:solidFill>
-                <a:latin typeface="Microsoft JhengHei"/>
-                <a:ea typeface="Microsoft JhengHei"/>
-                <a:cs typeface="Microsoft JhengHei"/>
-              </a:rPr>
-              <a:t>●  </a:t>
-            </a:r>
-            <a:r>
-              <a:rPr sz="1500" b="1">
-                <a:solidFill>
-                  <a:srgbClr val="1E3A5F"/>
-                </a:solidFill>
-                <a:latin typeface="Microsoft JhengHei"/>
-                <a:ea typeface="Microsoft JhengHei"/>
-                <a:cs typeface="Microsoft JhengHei"/>
-              </a:rPr>
-              <a:t>高精確度優先　</a:t>
-            </a:r>
-            <a:r>
-              <a:rPr sz="1500">
-                <a:solidFill>
-                  <a:srgbClr val="434343"/>
-                </a:solidFill>
-                <a:latin typeface="Microsoft JhengHei"/>
-                <a:ea typeface="Microsoft JhengHei"/>
-                <a:cs typeface="Microsoft JhengHei"/>
-              </a:rPr>
-              <a:t>寧可少配、也不配錯</a:t>
+              <a:t>ROE／ROA／NIM／EPS 依定義對齊</a:t>
             </a:r>
           </a:p>
         </p:txBody>
@@ -5266,7 +4628,7 @@
           <a:noFill/>
         </p:spPr>
         <p:txBody>
-          <a:bodyPr wrap="square" anchor="t" lIns="0" rIns="0" tIns="0" bIns="0">
+          <a:bodyPr wrap="square" lIns="0" tIns="0" rIns="0" bIns="0" anchor="t">
             <a:spAutoFit/>
           </a:bodyPr>
           <a:lstStyle/>
@@ -5305,7 +4667,7 @@
 </file>
 
 <file path=ppt/slides/slide12.xml><?xml version="1.0" encoding="utf-8"?>
-<p:sld xmlns:a="http://schemas.openxmlformats.org/drawingml/2006/main" xmlns:p="http://schemas.openxmlformats.org/presentationml/2006/main" xmlns:r="http://schemas.openxmlformats.org/officeDocument/2006/relationships">
+<p:sld xmlns:a="http://schemas.openxmlformats.org/drawingml/2006/main" xmlns:r="http://schemas.openxmlformats.org/officeDocument/2006/relationships" xmlns:p="http://schemas.openxmlformats.org/presentationml/2006/main">
   <p:cSld>
     <p:bg>
       <p:bgPr>
@@ -5321,227 +4683,14 @@
         <p:cNvGrpSpPr/>
         <p:nvPr/>
       </p:nvGrpSpPr>
-      <p:grpSpPr/>
-      <p:sp>
-        <p:nvSpPr>
-          <p:cNvPr id="2" name="Rectangle 1"/>
-          <p:cNvSpPr/>
-          <p:nvPr/>
-        </p:nvSpPr>
-        <p:spPr>
-          <a:xfrm rot="1080000">
-            <a:off x="10972800" y="-548640"/>
-            <a:ext cx="22860" cy="2926080"/>
-          </a:xfrm>
-          <a:prstGeom prst="rect">
-            <a:avLst/>
-          </a:prstGeom>
-          <a:solidFill>
-            <a:srgbClr val="F3D9D2"/>
-          </a:solidFill>
-          <a:ln>
-            <a:noFill/>
-          </a:ln>
-          <a:effectLst/>
-        </p:spPr>
-        <p:style>
-          <a:lnRef idx="1">
-            <a:schemeClr val="accent1"/>
-          </a:lnRef>
-          <a:fillRef idx="3">
-            <a:schemeClr val="accent1"/>
-          </a:fillRef>
-          <a:effectRef idx="2">
-            <a:schemeClr val="accent1"/>
-          </a:effectRef>
-          <a:fontRef idx="minor">
-            <a:schemeClr val="lt1"/>
-          </a:fontRef>
-        </p:style>
-        <p:txBody>
-          <a:bodyPr rtlCol="0" anchor="ctr"/>
-          <a:lstStyle/>
-          <a:p>
-            <a:pPr algn="ctr"/>
-          </a:p>
-        </p:txBody>
-      </p:sp>
-      <p:sp>
-        <p:nvSpPr>
-          <p:cNvPr id="3" name="Rectangle 2"/>
-          <p:cNvSpPr/>
-          <p:nvPr/>
-        </p:nvSpPr>
-        <p:spPr>
-          <a:xfrm rot="1800000">
-            <a:off x="10991088" y="-548640"/>
-            <a:ext cx="22860" cy="3063240"/>
-          </a:xfrm>
-          <a:prstGeom prst="rect">
-            <a:avLst/>
-          </a:prstGeom>
-          <a:solidFill>
-            <a:srgbClr val="F3D9D2"/>
-          </a:solidFill>
-          <a:ln>
-            <a:noFill/>
-          </a:ln>
-          <a:effectLst/>
-        </p:spPr>
-        <p:style>
-          <a:lnRef idx="1">
-            <a:schemeClr val="accent1"/>
-          </a:lnRef>
-          <a:fillRef idx="3">
-            <a:schemeClr val="accent1"/>
-          </a:fillRef>
-          <a:effectRef idx="2">
-            <a:schemeClr val="accent1"/>
-          </a:effectRef>
-          <a:fontRef idx="minor">
-            <a:schemeClr val="lt1"/>
-          </a:fontRef>
-        </p:style>
-        <p:txBody>
-          <a:bodyPr rtlCol="0" anchor="ctr"/>
-          <a:lstStyle/>
-          <a:p>
-            <a:pPr algn="ctr"/>
-          </a:p>
-        </p:txBody>
-      </p:sp>
-      <p:sp>
-        <p:nvSpPr>
-          <p:cNvPr id="4" name="Rectangle 3"/>
-          <p:cNvSpPr/>
-          <p:nvPr/>
-        </p:nvSpPr>
-        <p:spPr>
-          <a:xfrm rot="2520000">
-            <a:off x="11009376" y="-548640"/>
-            <a:ext cx="22860" cy="3200400"/>
-          </a:xfrm>
-          <a:prstGeom prst="rect">
-            <a:avLst/>
-          </a:prstGeom>
-          <a:solidFill>
-            <a:srgbClr val="F3D9D2"/>
-          </a:solidFill>
-          <a:ln>
-            <a:noFill/>
-          </a:ln>
-          <a:effectLst/>
-        </p:spPr>
-        <p:style>
-          <a:lnRef idx="1">
-            <a:schemeClr val="accent1"/>
-          </a:lnRef>
-          <a:fillRef idx="3">
-            <a:schemeClr val="accent1"/>
-          </a:fillRef>
-          <a:effectRef idx="2">
-            <a:schemeClr val="accent1"/>
-          </a:effectRef>
-          <a:fontRef idx="minor">
-            <a:schemeClr val="lt1"/>
-          </a:fontRef>
-        </p:style>
-        <p:txBody>
-          <a:bodyPr rtlCol="0" anchor="ctr"/>
-          <a:lstStyle/>
-          <a:p>
-            <a:pPr algn="ctr"/>
-          </a:p>
-        </p:txBody>
-      </p:sp>
-      <p:sp>
-        <p:nvSpPr>
-          <p:cNvPr id="5" name="Rectangle 4"/>
-          <p:cNvSpPr/>
-          <p:nvPr/>
-        </p:nvSpPr>
-        <p:spPr>
-          <a:xfrm rot="3240000">
-            <a:off x="11027664" y="-548640"/>
-            <a:ext cx="22860" cy="3337560"/>
-          </a:xfrm>
-          <a:prstGeom prst="rect">
-            <a:avLst/>
-          </a:prstGeom>
-          <a:solidFill>
-            <a:srgbClr val="F3D9D2"/>
-          </a:solidFill>
-          <a:ln>
-            <a:noFill/>
-          </a:ln>
-          <a:effectLst/>
-        </p:spPr>
-        <p:style>
-          <a:lnRef idx="1">
-            <a:schemeClr val="accent1"/>
-          </a:lnRef>
-          <a:fillRef idx="3">
-            <a:schemeClr val="accent1"/>
-          </a:fillRef>
-          <a:effectRef idx="2">
-            <a:schemeClr val="accent1"/>
-          </a:effectRef>
-          <a:fontRef idx="minor">
-            <a:schemeClr val="lt1"/>
-          </a:fontRef>
-        </p:style>
-        <p:txBody>
-          <a:bodyPr rtlCol="0" anchor="ctr"/>
-          <a:lstStyle/>
-          <a:p>
-            <a:pPr algn="ctr"/>
-          </a:p>
-        </p:txBody>
-      </p:sp>
-      <p:sp>
-        <p:nvSpPr>
-          <p:cNvPr id="6" name="Rectangle 5"/>
-          <p:cNvSpPr/>
-          <p:nvPr/>
-        </p:nvSpPr>
-        <p:spPr>
-          <a:xfrm rot="3960000">
-            <a:off x="11045952" y="-548640"/>
-            <a:ext cx="22860" cy="3474720"/>
-          </a:xfrm>
-          <a:prstGeom prst="rect">
-            <a:avLst/>
-          </a:prstGeom>
-          <a:solidFill>
-            <a:srgbClr val="F3D9D2"/>
-          </a:solidFill>
-          <a:ln>
-            <a:noFill/>
-          </a:ln>
-          <a:effectLst/>
-        </p:spPr>
-        <p:style>
-          <a:lnRef idx="1">
-            <a:schemeClr val="accent1"/>
-          </a:lnRef>
-          <a:fillRef idx="3">
-            <a:schemeClr val="accent1"/>
-          </a:fillRef>
-          <a:effectRef idx="2">
-            <a:schemeClr val="accent1"/>
-          </a:effectRef>
-          <a:fontRef idx="minor">
-            <a:schemeClr val="lt1"/>
-          </a:fontRef>
-        </p:style>
-        <p:txBody>
-          <a:bodyPr rtlCol="0" anchor="ctr"/>
-          <a:lstStyle/>
-          <a:p>
-            <a:pPr algn="ctr"/>
-          </a:p>
-        </p:txBody>
-      </p:sp>
+      <p:grpSpPr>
+        <a:xfrm>
+          <a:off x="0" y="0"/>
+          <a:ext cx="0" cy="0"/>
+          <a:chOff x="0" y="0"/>
+          <a:chExt cx="0" cy="0"/>
+        </a:xfrm>
+      </p:grpSpPr>
       <p:sp>
         <p:nvSpPr>
           <p:cNvPr id="7" name="TextBox 6"/>
@@ -5559,7 +4708,7 @@
           <a:noFill/>
         </p:spPr>
         <p:txBody>
-          <a:bodyPr wrap="square" anchor="t" lIns="0" rIns="0" tIns="0" bIns="0">
+          <a:bodyPr wrap="square" lIns="0" tIns="0" rIns="0" bIns="0" anchor="t">
             <a:spAutoFit/>
           </a:bodyPr>
           <a:lstStyle/>
@@ -5606,7 +4755,7 @@
           <a:noFill/>
         </p:spPr>
         <p:txBody>
-          <a:bodyPr wrap="square" anchor="t" lIns="0" rIns="0" tIns="0" bIns="0">
+          <a:bodyPr wrap="square" lIns="0" tIns="0" rIns="0" bIns="0" anchor="t">
             <a:spAutoFit/>
           </a:bodyPr>
           <a:lstStyle/>
@@ -5653,7 +4802,7 @@
           <a:noFill/>
         </p:spPr>
         <p:txBody>
-          <a:bodyPr wrap="square" anchor="t" lIns="0" rIns="0" tIns="0" bIns="0">
+          <a:bodyPr wrap="square" lIns="0" tIns="0" rIns="0" bIns="0" anchor="t">
             <a:spAutoFit/>
           </a:bodyPr>
           <a:lstStyle/>
@@ -5678,7 +4827,7 @@
                 <a:ea typeface="Microsoft JhengHei"/>
                 <a:cs typeface="Microsoft JhengHei"/>
               </a:rPr>
-              <a:t>冷數據 → 溫決策：數字可驗證、說法有出處</a:t>
+              <a:t>冷數據 → 溫決策：數字可驗證、說法有出處、雙引擎交叉核對</a:t>
             </a:r>
           </a:p>
         </p:txBody>
@@ -5728,6 +4877,7 @@
           <a:lstStyle/>
           <a:p>
             <a:pPr algn="ctr"/>
+            <a:endParaRPr/>
           </a:p>
         </p:txBody>
       </p:sp>
@@ -5748,7 +4898,7 @@
           <a:noFill/>
         </p:spPr>
         <p:txBody>
-          <a:bodyPr wrap="square" anchor="t" lIns="0" rIns="0" tIns="0" bIns="0">
+          <a:bodyPr wrap="square" lIns="0" tIns="0" rIns="0" bIns="0" anchor="t">
             <a:spAutoFit/>
           </a:bodyPr>
           <a:lstStyle/>
@@ -5821,6 +4971,7 @@
           <a:lstStyle/>
           <a:p>
             <a:pPr algn="ctr"/>
+            <a:endParaRPr/>
           </a:p>
         </p:txBody>
       </p:sp>
@@ -5841,7 +4992,7 @@
           <a:noFill/>
         </p:spPr>
         <p:txBody>
-          <a:bodyPr wrap="square" anchor="ctr" lIns="0" rIns="0" tIns="0" bIns="0">
+          <a:bodyPr wrap="square" lIns="0" tIns="0" rIns="0" bIns="0" anchor="ctr">
             <a:spAutoFit/>
           </a:bodyPr>
           <a:lstStyle/>
@@ -5888,7 +5039,7 @@
           <a:noFill/>
         </p:spPr>
         <p:txBody>
-          <a:bodyPr wrap="square" anchor="t" lIns="0" rIns="0" tIns="0" bIns="0">
+          <a:bodyPr wrap="square" lIns="0" tIns="0" rIns="0" bIns="0" anchor="t">
             <a:spAutoFit/>
           </a:bodyPr>
           <a:lstStyle/>
@@ -5974,6 +5125,7 @@
           <a:lstStyle/>
           <a:p>
             <a:pPr algn="ctr"/>
+            <a:endParaRPr/>
           </a:p>
         </p:txBody>
       </p:sp>
@@ -5994,7 +5146,7 @@
           <a:noFill/>
         </p:spPr>
         <p:txBody>
-          <a:bodyPr wrap="square" anchor="t" lIns="0" rIns="0" tIns="0" bIns="0">
+          <a:bodyPr wrap="square" lIns="0" tIns="0" rIns="0" bIns="0" anchor="t">
             <a:spAutoFit/>
           </a:bodyPr>
           <a:lstStyle/>
@@ -6093,6 +5245,7 @@
           <a:lstStyle/>
           <a:p>
             <a:pPr algn="ctr"/>
+            <a:endParaRPr/>
           </a:p>
         </p:txBody>
       </p:sp>
@@ -6113,7 +5266,7 @@
           <a:noFill/>
         </p:spPr>
         <p:txBody>
-          <a:bodyPr wrap="square" anchor="t" lIns="0" rIns="0" tIns="0" bIns="0">
+          <a:bodyPr wrap="square" lIns="0" tIns="0" rIns="0" bIns="0" anchor="t">
             <a:spAutoFit/>
           </a:bodyPr>
           <a:lstStyle/>
@@ -6138,7 +5291,7 @@
                 <a:ea typeface="Microsoft JhengHei"/>
                 <a:cs typeface="Microsoft JhengHei"/>
               </a:rPr>
-              <a:t>② 檢索驗證（EAP／VectorRAG）</a:t>
+              <a:t>② 檢索驗證＋交叉核對（EAP）</a:t>
             </a:r>
           </a:p>
         </p:txBody>
@@ -6186,6 +5339,7 @@
           <a:lstStyle/>
           <a:p>
             <a:pPr algn="ctr"/>
+            <a:endParaRPr/>
           </a:p>
         </p:txBody>
       </p:sp>
@@ -6206,7 +5360,7 @@
           <a:noFill/>
         </p:spPr>
         <p:txBody>
-          <a:bodyPr wrap="square" anchor="ctr" lIns="0" rIns="0" tIns="0" bIns="0">
+          <a:bodyPr wrap="square" lIns="0" tIns="0" rIns="0" bIns="0" anchor="ctr">
             <a:spAutoFit/>
           </a:bodyPr>
           <a:lstStyle/>
@@ -6253,7 +5407,7 @@
           <a:noFill/>
         </p:spPr>
         <p:txBody>
-          <a:bodyPr wrap="square" anchor="t" lIns="0" rIns="0" tIns="0" bIns="0">
+          <a:bodyPr wrap="square" lIns="0" tIns="0" rIns="0" bIns="0" anchor="t">
             <a:spAutoFit/>
           </a:bodyPr>
           <a:lstStyle/>
@@ -6328,6 +5482,7 @@
           <a:lstStyle/>
           <a:p>
             <a:pPr algn="ctr"/>
+            <a:endParaRPr/>
           </a:p>
         </p:txBody>
       </p:sp>
@@ -6348,7 +5503,7 @@
           <a:noFill/>
         </p:spPr>
         <p:txBody>
-          <a:bodyPr wrap="square" anchor="t" lIns="0" rIns="0" tIns="0" bIns="0">
+          <a:bodyPr wrap="square" lIns="0" tIns="0" rIns="0" bIns="0" anchor="t">
             <a:spAutoFit/>
           </a:bodyPr>
           <a:lstStyle/>
@@ -6397,7 +5552,7 @@
                 <a:ea typeface="Microsoft JhengHei"/>
                 <a:cs typeface="Microsoft JhengHei"/>
               </a:rPr>
-              <a:t>每則答案附出處，可回溯查證。</a:t>
+              <a:t>附出處可回溯，並與本地數值交叉核對。</a:t>
             </a:r>
           </a:p>
         </p:txBody>
@@ -6419,7 +5574,7 @@
           <a:noFill/>
         </p:spPr>
         <p:txBody>
-          <a:bodyPr wrap="square" anchor="t" lIns="0" rIns="0" tIns="0" bIns="0">
+          <a:bodyPr wrap="square" lIns="0" tIns="0" rIns="0" bIns="0" anchor="t">
             <a:spAutoFit/>
           </a:bodyPr>
           <a:lstStyle/>
@@ -6458,7 +5613,7 @@
 </file>
 
 <file path=ppt/slides/slide13.xml><?xml version="1.0" encoding="utf-8"?>
-<p:sld xmlns:a="http://schemas.openxmlformats.org/drawingml/2006/main" xmlns:p="http://schemas.openxmlformats.org/presentationml/2006/main" xmlns:r="http://schemas.openxmlformats.org/officeDocument/2006/relationships">
+<p:sld xmlns:a="http://schemas.openxmlformats.org/drawingml/2006/main" xmlns:r="http://schemas.openxmlformats.org/officeDocument/2006/relationships" xmlns:p="http://schemas.openxmlformats.org/presentationml/2006/main">
   <p:cSld>
     <p:bg>
       <p:bgPr>
@@ -6474,227 +5629,14 @@
         <p:cNvGrpSpPr/>
         <p:nvPr/>
       </p:nvGrpSpPr>
-      <p:grpSpPr/>
-      <p:sp>
-        <p:nvSpPr>
-          <p:cNvPr id="2" name="Rectangle 1"/>
-          <p:cNvSpPr/>
-          <p:nvPr/>
-        </p:nvSpPr>
-        <p:spPr>
-          <a:xfrm rot="1080000">
-            <a:off x="10972800" y="-548640"/>
-            <a:ext cx="22860" cy="2926080"/>
-          </a:xfrm>
-          <a:prstGeom prst="rect">
-            <a:avLst/>
-          </a:prstGeom>
-          <a:solidFill>
-            <a:srgbClr val="F3D9D2"/>
-          </a:solidFill>
-          <a:ln>
-            <a:noFill/>
-          </a:ln>
-          <a:effectLst/>
-        </p:spPr>
-        <p:style>
-          <a:lnRef idx="1">
-            <a:schemeClr val="accent1"/>
-          </a:lnRef>
-          <a:fillRef idx="3">
-            <a:schemeClr val="accent1"/>
-          </a:fillRef>
-          <a:effectRef idx="2">
-            <a:schemeClr val="accent1"/>
-          </a:effectRef>
-          <a:fontRef idx="minor">
-            <a:schemeClr val="lt1"/>
-          </a:fontRef>
-        </p:style>
-        <p:txBody>
-          <a:bodyPr rtlCol="0" anchor="ctr"/>
-          <a:lstStyle/>
-          <a:p>
-            <a:pPr algn="ctr"/>
-          </a:p>
-        </p:txBody>
-      </p:sp>
-      <p:sp>
-        <p:nvSpPr>
-          <p:cNvPr id="3" name="Rectangle 2"/>
-          <p:cNvSpPr/>
-          <p:nvPr/>
-        </p:nvSpPr>
-        <p:spPr>
-          <a:xfrm rot="1800000">
-            <a:off x="10991088" y="-548640"/>
-            <a:ext cx="22860" cy="3063240"/>
-          </a:xfrm>
-          <a:prstGeom prst="rect">
-            <a:avLst/>
-          </a:prstGeom>
-          <a:solidFill>
-            <a:srgbClr val="F3D9D2"/>
-          </a:solidFill>
-          <a:ln>
-            <a:noFill/>
-          </a:ln>
-          <a:effectLst/>
-        </p:spPr>
-        <p:style>
-          <a:lnRef idx="1">
-            <a:schemeClr val="accent1"/>
-          </a:lnRef>
-          <a:fillRef idx="3">
-            <a:schemeClr val="accent1"/>
-          </a:fillRef>
-          <a:effectRef idx="2">
-            <a:schemeClr val="accent1"/>
-          </a:effectRef>
-          <a:fontRef idx="minor">
-            <a:schemeClr val="lt1"/>
-          </a:fontRef>
-        </p:style>
-        <p:txBody>
-          <a:bodyPr rtlCol="0" anchor="ctr"/>
-          <a:lstStyle/>
-          <a:p>
-            <a:pPr algn="ctr"/>
-          </a:p>
-        </p:txBody>
-      </p:sp>
-      <p:sp>
-        <p:nvSpPr>
-          <p:cNvPr id="4" name="Rectangle 3"/>
-          <p:cNvSpPr/>
-          <p:nvPr/>
-        </p:nvSpPr>
-        <p:spPr>
-          <a:xfrm rot="2520000">
-            <a:off x="11009376" y="-548640"/>
-            <a:ext cx="22860" cy="3200400"/>
-          </a:xfrm>
-          <a:prstGeom prst="rect">
-            <a:avLst/>
-          </a:prstGeom>
-          <a:solidFill>
-            <a:srgbClr val="F3D9D2"/>
-          </a:solidFill>
-          <a:ln>
-            <a:noFill/>
-          </a:ln>
-          <a:effectLst/>
-        </p:spPr>
-        <p:style>
-          <a:lnRef idx="1">
-            <a:schemeClr val="accent1"/>
-          </a:lnRef>
-          <a:fillRef idx="3">
-            <a:schemeClr val="accent1"/>
-          </a:fillRef>
-          <a:effectRef idx="2">
-            <a:schemeClr val="accent1"/>
-          </a:effectRef>
-          <a:fontRef idx="minor">
-            <a:schemeClr val="lt1"/>
-          </a:fontRef>
-        </p:style>
-        <p:txBody>
-          <a:bodyPr rtlCol="0" anchor="ctr"/>
-          <a:lstStyle/>
-          <a:p>
-            <a:pPr algn="ctr"/>
-          </a:p>
-        </p:txBody>
-      </p:sp>
-      <p:sp>
-        <p:nvSpPr>
-          <p:cNvPr id="5" name="Rectangle 4"/>
-          <p:cNvSpPr/>
-          <p:nvPr/>
-        </p:nvSpPr>
-        <p:spPr>
-          <a:xfrm rot="3240000">
-            <a:off x="11027664" y="-548640"/>
-            <a:ext cx="22860" cy="3337560"/>
-          </a:xfrm>
-          <a:prstGeom prst="rect">
-            <a:avLst/>
-          </a:prstGeom>
-          <a:solidFill>
-            <a:srgbClr val="F3D9D2"/>
-          </a:solidFill>
-          <a:ln>
-            <a:noFill/>
-          </a:ln>
-          <a:effectLst/>
-        </p:spPr>
-        <p:style>
-          <a:lnRef idx="1">
-            <a:schemeClr val="accent1"/>
-          </a:lnRef>
-          <a:fillRef idx="3">
-            <a:schemeClr val="accent1"/>
-          </a:fillRef>
-          <a:effectRef idx="2">
-            <a:schemeClr val="accent1"/>
-          </a:effectRef>
-          <a:fontRef idx="minor">
-            <a:schemeClr val="lt1"/>
-          </a:fontRef>
-        </p:style>
-        <p:txBody>
-          <a:bodyPr rtlCol="0" anchor="ctr"/>
-          <a:lstStyle/>
-          <a:p>
-            <a:pPr algn="ctr"/>
-          </a:p>
-        </p:txBody>
-      </p:sp>
-      <p:sp>
-        <p:nvSpPr>
-          <p:cNvPr id="6" name="Rectangle 5"/>
-          <p:cNvSpPr/>
-          <p:nvPr/>
-        </p:nvSpPr>
-        <p:spPr>
-          <a:xfrm rot="3960000">
-            <a:off x="11045952" y="-548640"/>
-            <a:ext cx="22860" cy="3474720"/>
-          </a:xfrm>
-          <a:prstGeom prst="rect">
-            <a:avLst/>
-          </a:prstGeom>
-          <a:solidFill>
-            <a:srgbClr val="F3D9D2"/>
-          </a:solidFill>
-          <a:ln>
-            <a:noFill/>
-          </a:ln>
-          <a:effectLst/>
-        </p:spPr>
-        <p:style>
-          <a:lnRef idx="1">
-            <a:schemeClr val="accent1"/>
-          </a:lnRef>
-          <a:fillRef idx="3">
-            <a:schemeClr val="accent1"/>
-          </a:fillRef>
-          <a:effectRef idx="2">
-            <a:schemeClr val="accent1"/>
-          </a:effectRef>
-          <a:fontRef idx="minor">
-            <a:schemeClr val="lt1"/>
-          </a:fontRef>
-        </p:style>
-        <p:txBody>
-          <a:bodyPr rtlCol="0" anchor="ctr"/>
-          <a:lstStyle/>
-          <a:p>
-            <a:pPr algn="ctr"/>
-          </a:p>
-        </p:txBody>
-      </p:sp>
+      <p:grpSpPr>
+        <a:xfrm>
+          <a:off x="0" y="0"/>
+          <a:ext cx="0" cy="0"/>
+          <a:chOff x="0" y="0"/>
+          <a:chExt cx="0" cy="0"/>
+        </a:xfrm>
+      </p:grpSpPr>
       <p:sp>
         <p:nvSpPr>
           <p:cNvPr id="7" name="TextBox 6"/>
@@ -6712,7 +5654,7 @@
           <a:noFill/>
         </p:spPr>
         <p:txBody>
-          <a:bodyPr wrap="square" anchor="t" lIns="0" rIns="0" tIns="0" bIns="0">
+          <a:bodyPr wrap="square" lIns="0" tIns="0" rIns="0" bIns="0" anchor="t">
             <a:spAutoFit/>
           </a:bodyPr>
           <a:lstStyle/>
@@ -6759,7 +5701,7 @@
           <a:noFill/>
         </p:spPr>
         <p:txBody>
-          <a:bodyPr wrap="square" anchor="t" lIns="0" rIns="0" tIns="0" bIns="0">
+          <a:bodyPr wrap="square" lIns="0" tIns="0" rIns="0" bIns="0" anchor="t">
             <a:spAutoFit/>
           </a:bodyPr>
           <a:lstStyle/>
@@ -6806,7 +5748,7 @@
           <a:noFill/>
         </p:spPr>
         <p:txBody>
-          <a:bodyPr wrap="square" lIns="0" rIns="0" tIns="0" bIns="0">
+          <a:bodyPr wrap="square" lIns="0" tIns="0" rIns="0" bIns="0">
             <a:spAutoFit/>
           </a:bodyPr>
           <a:lstStyle/>
@@ -6925,7 +5867,7 @@
                 <a:ea typeface="Microsoft JhengHei"/>
                 <a:cs typeface="Microsoft JhengHei"/>
               </a:rPr>
-              <a:t>懸停看趨勢　</a:t>
+              <a:t>單位自動補全　</a:t>
             </a:r>
             <a:r>
               <a:rPr sz="1500">
@@ -6936,7 +5878,7 @@
                 <a:ea typeface="Microsoft JhengHei"/>
                 <a:cs typeface="Microsoft JhengHei"/>
               </a:rPr>
-              <a:t>六期 sparkline</a:t>
+              <a:t>五層推定，涵蓋率 97%，推定值標＊</a:t>
             </a:r>
           </a:p>
           <a:p>
@@ -6968,7 +5910,7 @@
                 <a:ea typeface="Microsoft JhengHei"/>
                 <a:cs typeface="Microsoft JhengHei"/>
               </a:rPr>
-              <a:t>AI 觀點總結　</a:t>
+              <a:t>誠實揭露　</a:t>
             </a:r>
             <a:r>
               <a:rPr sz="1500">
@@ -6979,7 +5921,7 @@
                 <a:ea typeface="Microsoft JhengHei"/>
                 <a:cs typeface="Microsoft JhengHei"/>
               </a:rPr>
-              <a:t>一句話結論</a:t>
+              <a:t>推不出單位就標「單位未標示」</a:t>
             </a:r>
           </a:p>
           <a:p>
@@ -7011,7 +5953,7 @@
                 <a:ea typeface="Microsoft JhengHei"/>
                 <a:cs typeface="Microsoft JhengHei"/>
               </a:rPr>
-              <a:t>術語 tooltip　</a:t>
+              <a:t>懸停趨勢＋術語　</a:t>
             </a:r>
             <a:r>
               <a:rPr sz="1500">
@@ -7022,7 +5964,7 @@
                 <a:ea typeface="Microsoft JhengHei"/>
                 <a:cs typeface="Microsoft JhengHei"/>
               </a:rPr>
-              <a:t>白話定義</a:t>
+              <a:t>六期 sparkline、白話定義 tooltip</a:t>
             </a:r>
           </a:p>
         </p:txBody>
@@ -7072,6 +6014,7 @@
           <a:lstStyle/>
           <a:p>
             <a:pPr algn="ctr"/>
+            <a:endParaRPr/>
           </a:p>
         </p:txBody>
       </p:sp>
@@ -7116,6 +6059,7 @@
           <a:lstStyle/>
           <a:p>
             <a:pPr algn="ctr"/>
+            <a:endParaRPr/>
           </a:p>
         </p:txBody>
       </p:sp>
@@ -7160,6 +6104,7 @@
           <a:lstStyle/>
           <a:p>
             <a:pPr algn="ctr"/>
+            <a:endParaRPr/>
           </a:p>
         </p:txBody>
       </p:sp>
@@ -7204,6 +6149,7 @@
           <a:lstStyle/>
           <a:p>
             <a:pPr algn="ctr"/>
+            <a:endParaRPr/>
           </a:p>
         </p:txBody>
       </p:sp>
@@ -7248,6 +6194,7 @@
           <a:lstStyle/>
           <a:p>
             <a:pPr algn="ctr"/>
+            <a:endParaRPr/>
           </a:p>
         </p:txBody>
       </p:sp>
@@ -7268,7 +6215,7 @@
           <a:noFill/>
         </p:spPr>
         <p:txBody>
-          <a:bodyPr wrap="square" anchor="ctr" lIns="0" rIns="0" tIns="0" bIns="0">
+          <a:bodyPr wrap="square" lIns="0" tIns="0" rIns="0" bIns="0" anchor="ctr">
             <a:spAutoFit/>
           </a:bodyPr>
           <a:lstStyle/>
@@ -7315,7 +6262,7 @@
           <a:noFill/>
         </p:spPr>
         <p:txBody>
-          <a:bodyPr wrap="square" anchor="ctr" lIns="0" rIns="0" tIns="0" bIns="0">
+          <a:bodyPr wrap="square" lIns="0" tIns="0" rIns="0" bIns="0" anchor="ctr">
             <a:spAutoFit/>
           </a:bodyPr>
           <a:lstStyle/>
@@ -7386,7 +6333,7 @@
           <a:noFill/>
         </p:spPr>
         <p:txBody>
-          <a:bodyPr wrap="square" anchor="t" lIns="0" rIns="0" tIns="0" bIns="0">
+          <a:bodyPr wrap="square" lIns="0" tIns="0" rIns="0" bIns="0" anchor="t">
             <a:spAutoFit/>
           </a:bodyPr>
           <a:lstStyle/>
@@ -7425,7 +6372,7 @@
 </file>
 
 <file path=ppt/slides/slide14.xml><?xml version="1.0" encoding="utf-8"?>
-<p:sld xmlns:a="http://schemas.openxmlformats.org/drawingml/2006/main" xmlns:p="http://schemas.openxmlformats.org/presentationml/2006/main" xmlns:r="http://schemas.openxmlformats.org/officeDocument/2006/relationships">
+<p:sld xmlns:a="http://schemas.openxmlformats.org/drawingml/2006/main" xmlns:r="http://schemas.openxmlformats.org/officeDocument/2006/relationships" xmlns:p="http://schemas.openxmlformats.org/presentationml/2006/main">
   <p:cSld>
     <p:bg>
       <p:bgPr>
@@ -7441,227 +6388,14 @@
         <p:cNvGrpSpPr/>
         <p:nvPr/>
       </p:nvGrpSpPr>
-      <p:grpSpPr/>
-      <p:sp>
-        <p:nvSpPr>
-          <p:cNvPr id="2" name="Rectangle 1"/>
-          <p:cNvSpPr/>
-          <p:nvPr/>
-        </p:nvSpPr>
-        <p:spPr>
-          <a:xfrm rot="1080000">
-            <a:off x="10972800" y="-548640"/>
-            <a:ext cx="22860" cy="2926080"/>
-          </a:xfrm>
-          <a:prstGeom prst="rect">
-            <a:avLst/>
-          </a:prstGeom>
-          <a:solidFill>
-            <a:srgbClr val="F3D9D2"/>
-          </a:solidFill>
-          <a:ln>
-            <a:noFill/>
-          </a:ln>
-          <a:effectLst/>
-        </p:spPr>
-        <p:style>
-          <a:lnRef idx="1">
-            <a:schemeClr val="accent1"/>
-          </a:lnRef>
-          <a:fillRef idx="3">
-            <a:schemeClr val="accent1"/>
-          </a:fillRef>
-          <a:effectRef idx="2">
-            <a:schemeClr val="accent1"/>
-          </a:effectRef>
-          <a:fontRef idx="minor">
-            <a:schemeClr val="lt1"/>
-          </a:fontRef>
-        </p:style>
-        <p:txBody>
-          <a:bodyPr rtlCol="0" anchor="ctr"/>
-          <a:lstStyle/>
-          <a:p>
-            <a:pPr algn="ctr"/>
-          </a:p>
-        </p:txBody>
-      </p:sp>
-      <p:sp>
-        <p:nvSpPr>
-          <p:cNvPr id="3" name="Rectangle 2"/>
-          <p:cNvSpPr/>
-          <p:nvPr/>
-        </p:nvSpPr>
-        <p:spPr>
-          <a:xfrm rot="1800000">
-            <a:off x="10991088" y="-548640"/>
-            <a:ext cx="22860" cy="3063240"/>
-          </a:xfrm>
-          <a:prstGeom prst="rect">
-            <a:avLst/>
-          </a:prstGeom>
-          <a:solidFill>
-            <a:srgbClr val="F3D9D2"/>
-          </a:solidFill>
-          <a:ln>
-            <a:noFill/>
-          </a:ln>
-          <a:effectLst/>
-        </p:spPr>
-        <p:style>
-          <a:lnRef idx="1">
-            <a:schemeClr val="accent1"/>
-          </a:lnRef>
-          <a:fillRef idx="3">
-            <a:schemeClr val="accent1"/>
-          </a:fillRef>
-          <a:effectRef idx="2">
-            <a:schemeClr val="accent1"/>
-          </a:effectRef>
-          <a:fontRef idx="minor">
-            <a:schemeClr val="lt1"/>
-          </a:fontRef>
-        </p:style>
-        <p:txBody>
-          <a:bodyPr rtlCol="0" anchor="ctr"/>
-          <a:lstStyle/>
-          <a:p>
-            <a:pPr algn="ctr"/>
-          </a:p>
-        </p:txBody>
-      </p:sp>
-      <p:sp>
-        <p:nvSpPr>
-          <p:cNvPr id="4" name="Rectangle 3"/>
-          <p:cNvSpPr/>
-          <p:nvPr/>
-        </p:nvSpPr>
-        <p:spPr>
-          <a:xfrm rot="2520000">
-            <a:off x="11009376" y="-548640"/>
-            <a:ext cx="22860" cy="3200400"/>
-          </a:xfrm>
-          <a:prstGeom prst="rect">
-            <a:avLst/>
-          </a:prstGeom>
-          <a:solidFill>
-            <a:srgbClr val="F3D9D2"/>
-          </a:solidFill>
-          <a:ln>
-            <a:noFill/>
-          </a:ln>
-          <a:effectLst/>
-        </p:spPr>
-        <p:style>
-          <a:lnRef idx="1">
-            <a:schemeClr val="accent1"/>
-          </a:lnRef>
-          <a:fillRef idx="3">
-            <a:schemeClr val="accent1"/>
-          </a:fillRef>
-          <a:effectRef idx="2">
-            <a:schemeClr val="accent1"/>
-          </a:effectRef>
-          <a:fontRef idx="minor">
-            <a:schemeClr val="lt1"/>
-          </a:fontRef>
-        </p:style>
-        <p:txBody>
-          <a:bodyPr rtlCol="0" anchor="ctr"/>
-          <a:lstStyle/>
-          <a:p>
-            <a:pPr algn="ctr"/>
-          </a:p>
-        </p:txBody>
-      </p:sp>
-      <p:sp>
-        <p:nvSpPr>
-          <p:cNvPr id="5" name="Rectangle 4"/>
-          <p:cNvSpPr/>
-          <p:nvPr/>
-        </p:nvSpPr>
-        <p:spPr>
-          <a:xfrm rot="3240000">
-            <a:off x="11027664" y="-548640"/>
-            <a:ext cx="22860" cy="3337560"/>
-          </a:xfrm>
-          <a:prstGeom prst="rect">
-            <a:avLst/>
-          </a:prstGeom>
-          <a:solidFill>
-            <a:srgbClr val="F3D9D2"/>
-          </a:solidFill>
-          <a:ln>
-            <a:noFill/>
-          </a:ln>
-          <a:effectLst/>
-        </p:spPr>
-        <p:style>
-          <a:lnRef idx="1">
-            <a:schemeClr val="accent1"/>
-          </a:lnRef>
-          <a:fillRef idx="3">
-            <a:schemeClr val="accent1"/>
-          </a:fillRef>
-          <a:effectRef idx="2">
-            <a:schemeClr val="accent1"/>
-          </a:effectRef>
-          <a:fontRef idx="minor">
-            <a:schemeClr val="lt1"/>
-          </a:fontRef>
-        </p:style>
-        <p:txBody>
-          <a:bodyPr rtlCol="0" anchor="ctr"/>
-          <a:lstStyle/>
-          <a:p>
-            <a:pPr algn="ctr"/>
-          </a:p>
-        </p:txBody>
-      </p:sp>
-      <p:sp>
-        <p:nvSpPr>
-          <p:cNvPr id="6" name="Rectangle 5"/>
-          <p:cNvSpPr/>
-          <p:nvPr/>
-        </p:nvSpPr>
-        <p:spPr>
-          <a:xfrm rot="3960000">
-            <a:off x="11045952" y="-548640"/>
-            <a:ext cx="22860" cy="3474720"/>
-          </a:xfrm>
-          <a:prstGeom prst="rect">
-            <a:avLst/>
-          </a:prstGeom>
-          <a:solidFill>
-            <a:srgbClr val="F3D9D2"/>
-          </a:solidFill>
-          <a:ln>
-            <a:noFill/>
-          </a:ln>
-          <a:effectLst/>
-        </p:spPr>
-        <p:style>
-          <a:lnRef idx="1">
-            <a:schemeClr val="accent1"/>
-          </a:lnRef>
-          <a:fillRef idx="3">
-            <a:schemeClr val="accent1"/>
-          </a:fillRef>
-          <a:effectRef idx="2">
-            <a:schemeClr val="accent1"/>
-          </a:effectRef>
-          <a:fontRef idx="minor">
-            <a:schemeClr val="lt1"/>
-          </a:fontRef>
-        </p:style>
-        <p:txBody>
-          <a:bodyPr rtlCol="0" anchor="ctr"/>
-          <a:lstStyle/>
-          <a:p>
-            <a:pPr algn="ctr"/>
-          </a:p>
-        </p:txBody>
-      </p:sp>
+      <p:grpSpPr>
+        <a:xfrm>
+          <a:off x="0" y="0"/>
+          <a:ext cx="0" cy="0"/>
+          <a:chOff x="0" y="0"/>
+          <a:chExt cx="0" cy="0"/>
+        </a:xfrm>
+      </p:grpSpPr>
       <p:sp>
         <p:nvSpPr>
           <p:cNvPr id="7" name="TextBox 6"/>
@@ -7679,7 +6413,7 @@
           <a:noFill/>
         </p:spPr>
         <p:txBody>
-          <a:bodyPr wrap="square" anchor="t" lIns="0" rIns="0" tIns="0" bIns="0">
+          <a:bodyPr wrap="square" lIns="0" tIns="0" rIns="0" bIns="0" anchor="t">
             <a:spAutoFit/>
           </a:bodyPr>
           <a:lstStyle/>
@@ -7726,7 +6460,7 @@
           <a:noFill/>
         </p:spPr>
         <p:txBody>
-          <a:bodyPr wrap="square" anchor="t" lIns="0" rIns="0" tIns="0" bIns="0">
+          <a:bodyPr wrap="square" lIns="0" tIns="0" rIns="0" bIns="0" anchor="t">
             <a:spAutoFit/>
           </a:bodyPr>
           <a:lstStyle/>
@@ -7773,7 +6507,7 @@
           <a:noFill/>
         </p:spPr>
         <p:txBody>
-          <a:bodyPr wrap="square" lIns="0" rIns="0" tIns="0" bIns="0">
+          <a:bodyPr wrap="square" lIns="0" tIns="0" rIns="0" bIns="0">
             <a:spAutoFit/>
           </a:bodyPr>
           <a:lstStyle/>
@@ -8039,6 +6773,7 @@
           <a:lstStyle/>
           <a:p>
             <a:pPr algn="ctr"/>
+            <a:endParaRPr/>
           </a:p>
         </p:txBody>
       </p:sp>
@@ -8083,6 +6818,7 @@
           <a:lstStyle/>
           <a:p>
             <a:pPr algn="ctr"/>
+            <a:endParaRPr/>
           </a:p>
         </p:txBody>
       </p:sp>
@@ -8127,6 +6863,7 @@
           <a:lstStyle/>
           <a:p>
             <a:pPr algn="ctr"/>
+            <a:endParaRPr/>
           </a:p>
         </p:txBody>
       </p:sp>
@@ -8171,6 +6908,7 @@
           <a:lstStyle/>
           <a:p>
             <a:pPr algn="ctr"/>
+            <a:endParaRPr/>
           </a:p>
         </p:txBody>
       </p:sp>
@@ -8215,6 +6953,7 @@
           <a:lstStyle/>
           <a:p>
             <a:pPr algn="ctr"/>
+            <a:endParaRPr/>
           </a:p>
         </p:txBody>
       </p:sp>
@@ -8235,7 +6974,7 @@
           <a:noFill/>
         </p:spPr>
         <p:txBody>
-          <a:bodyPr wrap="square" anchor="ctr" lIns="0" rIns="0" tIns="0" bIns="0">
+          <a:bodyPr wrap="square" lIns="0" tIns="0" rIns="0" bIns="0" anchor="ctr">
             <a:spAutoFit/>
           </a:bodyPr>
           <a:lstStyle/>
@@ -8282,7 +7021,7 @@
           <a:noFill/>
         </p:spPr>
         <p:txBody>
-          <a:bodyPr wrap="square" anchor="ctr" lIns="0" rIns="0" tIns="0" bIns="0">
+          <a:bodyPr wrap="square" lIns="0" tIns="0" rIns="0" bIns="0" anchor="ctr">
             <a:spAutoFit/>
           </a:bodyPr>
           <a:lstStyle/>
@@ -8353,7 +7092,7 @@
           <a:noFill/>
         </p:spPr>
         <p:txBody>
-          <a:bodyPr wrap="square" anchor="t" lIns="0" rIns="0" tIns="0" bIns="0">
+          <a:bodyPr wrap="square" lIns="0" tIns="0" rIns="0" bIns="0" anchor="t">
             <a:spAutoFit/>
           </a:bodyPr>
           <a:lstStyle/>
@@ -8392,7 +7131,7 @@
 </file>
 
 <file path=ppt/slides/slide15.xml><?xml version="1.0" encoding="utf-8"?>
-<p:sld xmlns:a="http://schemas.openxmlformats.org/drawingml/2006/main" xmlns:p="http://schemas.openxmlformats.org/presentationml/2006/main" xmlns:r="http://schemas.openxmlformats.org/officeDocument/2006/relationships">
+<p:sld xmlns:a="http://schemas.openxmlformats.org/drawingml/2006/main" xmlns:r="http://schemas.openxmlformats.org/officeDocument/2006/relationships" xmlns:p="http://schemas.openxmlformats.org/presentationml/2006/main">
   <p:cSld>
     <p:bg>
       <p:bgPr>
@@ -8408,227 +7147,14 @@
         <p:cNvGrpSpPr/>
         <p:nvPr/>
       </p:nvGrpSpPr>
-      <p:grpSpPr/>
-      <p:sp>
-        <p:nvSpPr>
-          <p:cNvPr id="2" name="Rectangle 1"/>
-          <p:cNvSpPr/>
-          <p:nvPr/>
-        </p:nvSpPr>
-        <p:spPr>
-          <a:xfrm rot="1080000">
-            <a:off x="10972800" y="-548640"/>
-            <a:ext cx="22860" cy="2926080"/>
-          </a:xfrm>
-          <a:prstGeom prst="rect">
-            <a:avLst/>
-          </a:prstGeom>
-          <a:solidFill>
-            <a:srgbClr val="F3D9D2"/>
-          </a:solidFill>
-          <a:ln>
-            <a:noFill/>
-          </a:ln>
-          <a:effectLst/>
-        </p:spPr>
-        <p:style>
-          <a:lnRef idx="1">
-            <a:schemeClr val="accent1"/>
-          </a:lnRef>
-          <a:fillRef idx="3">
-            <a:schemeClr val="accent1"/>
-          </a:fillRef>
-          <a:effectRef idx="2">
-            <a:schemeClr val="accent1"/>
-          </a:effectRef>
-          <a:fontRef idx="minor">
-            <a:schemeClr val="lt1"/>
-          </a:fontRef>
-        </p:style>
-        <p:txBody>
-          <a:bodyPr rtlCol="0" anchor="ctr"/>
-          <a:lstStyle/>
-          <a:p>
-            <a:pPr algn="ctr"/>
-          </a:p>
-        </p:txBody>
-      </p:sp>
-      <p:sp>
-        <p:nvSpPr>
-          <p:cNvPr id="3" name="Rectangle 2"/>
-          <p:cNvSpPr/>
-          <p:nvPr/>
-        </p:nvSpPr>
-        <p:spPr>
-          <a:xfrm rot="1800000">
-            <a:off x="10991088" y="-548640"/>
-            <a:ext cx="22860" cy="3063240"/>
-          </a:xfrm>
-          <a:prstGeom prst="rect">
-            <a:avLst/>
-          </a:prstGeom>
-          <a:solidFill>
-            <a:srgbClr val="F3D9D2"/>
-          </a:solidFill>
-          <a:ln>
-            <a:noFill/>
-          </a:ln>
-          <a:effectLst/>
-        </p:spPr>
-        <p:style>
-          <a:lnRef idx="1">
-            <a:schemeClr val="accent1"/>
-          </a:lnRef>
-          <a:fillRef idx="3">
-            <a:schemeClr val="accent1"/>
-          </a:fillRef>
-          <a:effectRef idx="2">
-            <a:schemeClr val="accent1"/>
-          </a:effectRef>
-          <a:fontRef idx="minor">
-            <a:schemeClr val="lt1"/>
-          </a:fontRef>
-        </p:style>
-        <p:txBody>
-          <a:bodyPr rtlCol="0" anchor="ctr"/>
-          <a:lstStyle/>
-          <a:p>
-            <a:pPr algn="ctr"/>
-          </a:p>
-        </p:txBody>
-      </p:sp>
-      <p:sp>
-        <p:nvSpPr>
-          <p:cNvPr id="4" name="Rectangle 3"/>
-          <p:cNvSpPr/>
-          <p:nvPr/>
-        </p:nvSpPr>
-        <p:spPr>
-          <a:xfrm rot="2520000">
-            <a:off x="11009376" y="-548640"/>
-            <a:ext cx="22860" cy="3200400"/>
-          </a:xfrm>
-          <a:prstGeom prst="rect">
-            <a:avLst/>
-          </a:prstGeom>
-          <a:solidFill>
-            <a:srgbClr val="F3D9D2"/>
-          </a:solidFill>
-          <a:ln>
-            <a:noFill/>
-          </a:ln>
-          <a:effectLst/>
-        </p:spPr>
-        <p:style>
-          <a:lnRef idx="1">
-            <a:schemeClr val="accent1"/>
-          </a:lnRef>
-          <a:fillRef idx="3">
-            <a:schemeClr val="accent1"/>
-          </a:fillRef>
-          <a:effectRef idx="2">
-            <a:schemeClr val="accent1"/>
-          </a:effectRef>
-          <a:fontRef idx="minor">
-            <a:schemeClr val="lt1"/>
-          </a:fontRef>
-        </p:style>
-        <p:txBody>
-          <a:bodyPr rtlCol="0" anchor="ctr"/>
-          <a:lstStyle/>
-          <a:p>
-            <a:pPr algn="ctr"/>
-          </a:p>
-        </p:txBody>
-      </p:sp>
-      <p:sp>
-        <p:nvSpPr>
-          <p:cNvPr id="5" name="Rectangle 4"/>
-          <p:cNvSpPr/>
-          <p:nvPr/>
-        </p:nvSpPr>
-        <p:spPr>
-          <a:xfrm rot="3240000">
-            <a:off x="11027664" y="-548640"/>
-            <a:ext cx="22860" cy="3337560"/>
-          </a:xfrm>
-          <a:prstGeom prst="rect">
-            <a:avLst/>
-          </a:prstGeom>
-          <a:solidFill>
-            <a:srgbClr val="F3D9D2"/>
-          </a:solidFill>
-          <a:ln>
-            <a:noFill/>
-          </a:ln>
-          <a:effectLst/>
-        </p:spPr>
-        <p:style>
-          <a:lnRef idx="1">
-            <a:schemeClr val="accent1"/>
-          </a:lnRef>
-          <a:fillRef idx="3">
-            <a:schemeClr val="accent1"/>
-          </a:fillRef>
-          <a:effectRef idx="2">
-            <a:schemeClr val="accent1"/>
-          </a:effectRef>
-          <a:fontRef idx="minor">
-            <a:schemeClr val="lt1"/>
-          </a:fontRef>
-        </p:style>
-        <p:txBody>
-          <a:bodyPr rtlCol="0" anchor="ctr"/>
-          <a:lstStyle/>
-          <a:p>
-            <a:pPr algn="ctr"/>
-          </a:p>
-        </p:txBody>
-      </p:sp>
-      <p:sp>
-        <p:nvSpPr>
-          <p:cNvPr id="6" name="Rectangle 5"/>
-          <p:cNvSpPr/>
-          <p:nvPr/>
-        </p:nvSpPr>
-        <p:spPr>
-          <a:xfrm rot="3960000">
-            <a:off x="11045952" y="-548640"/>
-            <a:ext cx="22860" cy="3474720"/>
-          </a:xfrm>
-          <a:prstGeom prst="rect">
-            <a:avLst/>
-          </a:prstGeom>
-          <a:solidFill>
-            <a:srgbClr val="F3D9D2"/>
-          </a:solidFill>
-          <a:ln>
-            <a:noFill/>
-          </a:ln>
-          <a:effectLst/>
-        </p:spPr>
-        <p:style>
-          <a:lnRef idx="1">
-            <a:schemeClr val="accent1"/>
-          </a:lnRef>
-          <a:fillRef idx="3">
-            <a:schemeClr val="accent1"/>
-          </a:fillRef>
-          <a:effectRef idx="2">
-            <a:schemeClr val="accent1"/>
-          </a:effectRef>
-          <a:fontRef idx="minor">
-            <a:schemeClr val="lt1"/>
-          </a:fontRef>
-        </p:style>
-        <p:txBody>
-          <a:bodyPr rtlCol="0" anchor="ctr"/>
-          <a:lstStyle/>
-          <a:p>
-            <a:pPr algn="ctr"/>
-          </a:p>
-        </p:txBody>
-      </p:sp>
+      <p:grpSpPr>
+        <a:xfrm>
+          <a:off x="0" y="0"/>
+          <a:ext cx="0" cy="0"/>
+          <a:chOff x="0" y="0"/>
+          <a:chExt cx="0" cy="0"/>
+        </a:xfrm>
+      </p:grpSpPr>
       <p:sp>
         <p:nvSpPr>
           <p:cNvPr id="7" name="TextBox 6"/>
@@ -8646,7 +7172,7 @@
           <a:noFill/>
         </p:spPr>
         <p:txBody>
-          <a:bodyPr wrap="square" anchor="t" lIns="0" rIns="0" tIns="0" bIns="0">
+          <a:bodyPr wrap="square" lIns="0" tIns="0" rIns="0" bIns="0" anchor="t">
             <a:spAutoFit/>
           </a:bodyPr>
           <a:lstStyle/>
@@ -8693,7 +7219,7 @@
           <a:noFill/>
         </p:spPr>
         <p:txBody>
-          <a:bodyPr wrap="square" anchor="t" lIns="0" rIns="0" tIns="0" bIns="0">
+          <a:bodyPr wrap="square" lIns="0" tIns="0" rIns="0" bIns="0" anchor="t">
             <a:spAutoFit/>
           </a:bodyPr>
           <a:lstStyle/>
@@ -8740,7 +7266,7 @@
           <a:noFill/>
         </p:spPr>
         <p:txBody>
-          <a:bodyPr wrap="square" lIns="0" rIns="0" tIns="0" bIns="0">
+          <a:bodyPr wrap="square" lIns="0" tIns="0" rIns="0" bIns="0">
             <a:spAutoFit/>
           </a:bodyPr>
           <a:lstStyle/>
@@ -8784,7 +7310,7 @@
                 <a:ea typeface="Microsoft JhengHei"/>
                 <a:cs typeface="Microsoft JhengHei"/>
               </a:rPr>
-              <a:t>主要走 EAP 平台回答</a:t>
+              <a:t>主引擎，答案走 EAP 平台</a:t>
             </a:r>
           </a:p>
           <a:p>
@@ -8816,6 +7342,135 @@
                 <a:ea typeface="Microsoft JhengHei"/>
                 <a:cs typeface="Microsoft JhengHei"/>
               </a:rPr>
+              <a:t>範圍鎖定　</a:t>
+            </a:r>
+            <a:r>
+              <a:rPr sz="1500">
+                <a:solidFill>
+                  <a:srgbClr val="434343"/>
+                </a:solidFill>
+                <a:latin typeface="Microsoft JhengHei"/>
+                <a:ea typeface="Microsoft JhengHei"/>
+                <a:cs typeface="Microsoft JhengHei"/>
+              </a:rPr>
+              <a:t>選定公司／期間，後續提問免重打</a:t>
+            </a:r>
+          </a:p>
+          <a:p>
+            <a:pPr>
+              <a:lnSpc>
+                <a:spcPct val="115000"/>
+              </a:lnSpc>
+              <a:spcAft>
+                <a:spcPts val="1300"/>
+              </a:spcAft>
+            </a:pPr>
+            <a:r>
+              <a:rPr sz="1300" b="1">
+                <a:solidFill>
+                  <a:srgbClr val="E8654E"/>
+                </a:solidFill>
+                <a:latin typeface="Microsoft JhengHei"/>
+                <a:ea typeface="Microsoft JhengHei"/>
+                <a:cs typeface="Microsoft JhengHei"/>
+              </a:rPr>
+              <a:t>●  </a:t>
+            </a:r>
+            <a:r>
+              <a:rPr sz="1500" b="1">
+                <a:solidFill>
+                  <a:srgbClr val="1E3A5F"/>
+                </a:solidFill>
+                <a:latin typeface="Microsoft JhengHei"/>
+                <a:ea typeface="Microsoft JhengHei"/>
+                <a:cs typeface="Microsoft JhengHei"/>
+              </a:rPr>
+              <a:t>交叉驗證　</a:t>
+            </a:r>
+            <a:r>
+              <a:rPr sz="1500">
+                <a:solidFill>
+                  <a:srgbClr val="434343"/>
+                </a:solidFill>
+                <a:latin typeface="Microsoft JhengHei"/>
+                <a:ea typeface="Microsoft JhengHei"/>
+                <a:cs typeface="Microsoft JhengHei"/>
+              </a:rPr>
+              <a:t>EAP 數字與本地不符自動標紅</a:t>
+            </a:r>
+          </a:p>
+          <a:p>
+            <a:pPr>
+              <a:lnSpc>
+                <a:spcPct val="115000"/>
+              </a:lnSpc>
+              <a:spcAft>
+                <a:spcPts val="1300"/>
+              </a:spcAft>
+            </a:pPr>
+            <a:r>
+              <a:rPr sz="1300" b="1">
+                <a:solidFill>
+                  <a:srgbClr val="E8654E"/>
+                </a:solidFill>
+                <a:latin typeface="Microsoft JhengHei"/>
+                <a:ea typeface="Microsoft JhengHei"/>
+                <a:cs typeface="Microsoft JhengHei"/>
+              </a:rPr>
+              <a:t>●  </a:t>
+            </a:r>
+            <a:r>
+              <a:rPr sz="1500" b="1">
+                <a:solidFill>
+                  <a:srgbClr val="1E3A5F"/>
+                </a:solidFill>
+                <a:latin typeface="Microsoft JhengHei"/>
+                <a:ea typeface="Microsoft JhengHei"/>
+                <a:cs typeface="Microsoft JhengHei"/>
+              </a:rPr>
+              <a:t>一鍵取正解　</a:t>
+            </a:r>
+            <a:r>
+              <a:rPr sz="1500">
+                <a:solidFill>
+                  <a:srgbClr val="434343"/>
+                </a:solidFill>
+                <a:latin typeface="Microsoft JhengHei"/>
+                <a:ea typeface="Microsoft JhengHei"/>
+                <a:cs typeface="Microsoft JhengHei"/>
+              </a:rPr>
+              <a:t>紅框可切回本地公式驗證值</a:t>
+            </a:r>
+          </a:p>
+          <a:p>
+            <a:pPr>
+              <a:lnSpc>
+                <a:spcPct val="115000"/>
+              </a:lnSpc>
+              <a:spcAft>
+                <a:spcPts val="1300"/>
+              </a:spcAft>
+            </a:pPr>
+            <a:r>
+              <a:rPr sz="1300" b="1">
+                <a:solidFill>
+                  <a:srgbClr val="E8654E"/>
+                </a:solidFill>
+                <a:latin typeface="Microsoft JhengHei"/>
+                <a:ea typeface="Microsoft JhengHei"/>
+                <a:cs typeface="Microsoft JhengHei"/>
+              </a:rPr>
+              <a:t>●  </a:t>
+            </a:r>
+            <a:r>
+              <a:rPr sz="1500" b="1">
+                <a:solidFill>
+                  <a:srgbClr val="1E3A5F"/>
+                </a:solidFill>
+                <a:latin typeface="Microsoft JhengHei"/>
+                <a:ea typeface="Microsoft JhengHei"/>
+                <a:cs typeface="Microsoft JhengHei"/>
+              </a:rPr>
               <a:t>Gemini 輔助　</a:t>
             </a:r>
             <a:r>
@@ -8827,136 +7482,7 @@
                 <a:ea typeface="Microsoft JhengHei"/>
                 <a:cs typeface="Microsoft JhengHei"/>
               </a:rPr>
-              <a:t>備援 LLM，一鍵切換</a:t>
-            </a:r>
-          </a:p>
-          <a:p>
-            <a:pPr>
-              <a:lnSpc>
-                <a:spcPct val="115000"/>
-              </a:lnSpc>
-              <a:spcAft>
-                <a:spcPts val="1300"/>
-              </a:spcAft>
-            </a:pPr>
-            <a:r>
-              <a:rPr sz="1300" b="1">
-                <a:solidFill>
-                  <a:srgbClr val="E8654E"/>
-                </a:solidFill>
-                <a:latin typeface="Microsoft JhengHei"/>
-                <a:ea typeface="Microsoft JhengHei"/>
-                <a:cs typeface="Microsoft JhengHei"/>
-              </a:rPr>
-              <a:t>●  </a:t>
-            </a:r>
-            <a:r>
-              <a:rPr sz="1500" b="1">
-                <a:solidFill>
-                  <a:srgbClr val="1E3A5F"/>
-                </a:solidFill>
-                <a:latin typeface="Microsoft JhengHei"/>
-                <a:ea typeface="Microsoft JhengHei"/>
-                <a:cs typeface="Microsoft JhengHei"/>
-              </a:rPr>
-              <a:t>答案附圖　</a:t>
-            </a:r>
-            <a:r>
-              <a:rPr sz="1500">
-                <a:solidFill>
-                  <a:srgbClr val="434343"/>
-                </a:solidFill>
-                <a:latin typeface="Microsoft JhengHei"/>
-                <a:ea typeface="Microsoft JhengHei"/>
-                <a:cs typeface="Microsoft JhengHei"/>
-              </a:rPr>
-              <a:t>牽涉指標自動畫趨勢圖</a:t>
-            </a:r>
-          </a:p>
-          <a:p>
-            <a:pPr>
-              <a:lnSpc>
-                <a:spcPct val="115000"/>
-              </a:lnSpc>
-              <a:spcAft>
-                <a:spcPts val="1300"/>
-              </a:spcAft>
-            </a:pPr>
-            <a:r>
-              <a:rPr sz="1300" b="1">
-                <a:solidFill>
-                  <a:srgbClr val="E8654E"/>
-                </a:solidFill>
-                <a:latin typeface="Microsoft JhengHei"/>
-                <a:ea typeface="Microsoft JhengHei"/>
-                <a:cs typeface="Microsoft JhengHei"/>
-              </a:rPr>
-              <a:t>●  </a:t>
-            </a:r>
-            <a:r>
-              <a:rPr sz="1500" b="1">
-                <a:solidFill>
-                  <a:srgbClr val="1E3A5F"/>
-                </a:solidFill>
-                <a:latin typeface="Microsoft JhengHei"/>
-                <a:ea typeface="Microsoft JhengHei"/>
-                <a:cs typeface="Microsoft JhengHei"/>
-              </a:rPr>
-              <a:t>自動辨識　</a:t>
-            </a:r>
-            <a:r>
-              <a:rPr sz="1500">
-                <a:solidFill>
-                  <a:srgbClr val="434343"/>
-                </a:solidFill>
-                <a:latin typeface="Microsoft JhengHei"/>
-                <a:ea typeface="Microsoft JhengHei"/>
-                <a:cs typeface="Microsoft JhengHei"/>
-              </a:rPr>
-              <a:t>公司／期間打在問題裡</a:t>
-            </a:r>
-          </a:p>
-          <a:p>
-            <a:pPr>
-              <a:lnSpc>
-                <a:spcPct val="115000"/>
-              </a:lnSpc>
-              <a:spcAft>
-                <a:spcPts val="1300"/>
-              </a:spcAft>
-            </a:pPr>
-            <a:r>
-              <a:rPr sz="1300" b="1">
-                <a:solidFill>
-                  <a:srgbClr val="E8654E"/>
-                </a:solidFill>
-                <a:latin typeface="Microsoft JhengHei"/>
-                <a:ea typeface="Microsoft JhengHei"/>
-                <a:cs typeface="Microsoft JhengHei"/>
-              </a:rPr>
-              <a:t>●  </a:t>
-            </a:r>
-            <a:r>
-              <a:rPr sz="1500" b="1">
-                <a:solidFill>
-                  <a:srgbClr val="1E3A5F"/>
-                </a:solidFill>
-                <a:latin typeface="Microsoft JhengHei"/>
-                <a:ea typeface="Microsoft JhengHei"/>
-                <a:cs typeface="Microsoft JhengHei"/>
-              </a:rPr>
-              <a:t>一鍵 Word　</a:t>
-            </a:r>
-            <a:r>
-              <a:rPr sz="1500">
-                <a:solidFill>
-                  <a:srgbClr val="434343"/>
-                </a:solidFill>
-                <a:latin typeface="Microsoft JhengHei"/>
-                <a:ea typeface="Microsoft JhengHei"/>
-                <a:cs typeface="Microsoft JhengHei"/>
-              </a:rPr>
-              <a:t>真表格＋嵌圖</a:t>
+              <a:t>備援 LLM ＋ 一鍵匯出 Word</a:t>
             </a:r>
           </a:p>
         </p:txBody>
@@ -9006,6 +7532,7 @@
           <a:lstStyle/>
           <a:p>
             <a:pPr algn="ctr"/>
+            <a:endParaRPr/>
           </a:p>
         </p:txBody>
       </p:sp>
@@ -9050,6 +7577,7 @@
           <a:lstStyle/>
           <a:p>
             <a:pPr algn="ctr"/>
+            <a:endParaRPr/>
           </a:p>
         </p:txBody>
       </p:sp>
@@ -9094,6 +7622,7 @@
           <a:lstStyle/>
           <a:p>
             <a:pPr algn="ctr"/>
+            <a:endParaRPr/>
           </a:p>
         </p:txBody>
       </p:sp>
@@ -9138,6 +7667,7 @@
           <a:lstStyle/>
           <a:p>
             <a:pPr algn="ctr"/>
+            <a:endParaRPr/>
           </a:p>
         </p:txBody>
       </p:sp>
@@ -9182,6 +7712,7 @@
           <a:lstStyle/>
           <a:p>
             <a:pPr algn="ctr"/>
+            <a:endParaRPr/>
           </a:p>
         </p:txBody>
       </p:sp>
@@ -9202,7 +7733,7 @@
           <a:noFill/>
         </p:spPr>
         <p:txBody>
-          <a:bodyPr wrap="square" anchor="ctr" lIns="0" rIns="0" tIns="0" bIns="0">
+          <a:bodyPr wrap="square" lIns="0" tIns="0" rIns="0" bIns="0" anchor="ctr">
             <a:spAutoFit/>
           </a:bodyPr>
           <a:lstStyle/>
@@ -9249,7 +7780,7 @@
           <a:noFill/>
         </p:spPr>
         <p:txBody>
-          <a:bodyPr wrap="square" anchor="ctr" lIns="0" rIns="0" tIns="0" bIns="0">
+          <a:bodyPr wrap="square" lIns="0" tIns="0" rIns="0" bIns="0" anchor="ctr">
             <a:spAutoFit/>
           </a:bodyPr>
           <a:lstStyle/>
@@ -9320,7 +7851,7 @@
           <a:noFill/>
         </p:spPr>
         <p:txBody>
-          <a:bodyPr wrap="square" anchor="t" lIns="0" rIns="0" tIns="0" bIns="0">
+          <a:bodyPr wrap="square" lIns="0" tIns="0" rIns="0" bIns="0" anchor="t">
             <a:spAutoFit/>
           </a:bodyPr>
           <a:lstStyle/>
@@ -9359,7 +7890,7 @@
 </file>
 
 <file path=ppt/slides/slide16.xml><?xml version="1.0" encoding="utf-8"?>
-<p:sld xmlns:a="http://schemas.openxmlformats.org/drawingml/2006/main" xmlns:p="http://schemas.openxmlformats.org/presentationml/2006/main" xmlns:r="http://schemas.openxmlformats.org/officeDocument/2006/relationships">
+<p:sld xmlns:a="http://schemas.openxmlformats.org/drawingml/2006/main" xmlns:r="http://schemas.openxmlformats.org/officeDocument/2006/relationships" xmlns:p="http://schemas.openxmlformats.org/presentationml/2006/main">
   <p:cSld>
     <p:bg>
       <p:bgPr>
@@ -9375,7 +7906,14 @@
         <p:cNvGrpSpPr/>
         <p:nvPr/>
       </p:nvGrpSpPr>
-      <p:grpSpPr/>
+      <p:grpSpPr>
+        <a:xfrm>
+          <a:off x="0" y="0"/>
+          <a:ext cx="0" cy="0"/>
+          <a:chOff x="0" y="0"/>
+          <a:chExt cx="0" cy="0"/>
+        </a:xfrm>
+      </p:grpSpPr>
       <p:sp>
         <p:nvSpPr>
           <p:cNvPr id="2" name="Rounded Rectangle 1"/>
@@ -9419,226 +7957,7 @@
           <a:lstStyle/>
           <a:p>
             <a:pPr algn="ctr"/>
-          </a:p>
-        </p:txBody>
-      </p:sp>
-      <p:sp>
-        <p:nvSpPr>
-          <p:cNvPr id="3" name="Rectangle 2"/>
-          <p:cNvSpPr/>
-          <p:nvPr/>
-        </p:nvSpPr>
-        <p:spPr>
-          <a:xfrm rot="1080000">
-            <a:off x="10972800" y="-548640"/>
-            <a:ext cx="22860" cy="2926080"/>
-          </a:xfrm>
-          <a:prstGeom prst="rect">
-            <a:avLst/>
-          </a:prstGeom>
-          <a:solidFill>
-            <a:srgbClr val="3A567A"/>
-          </a:solidFill>
-          <a:ln>
-            <a:noFill/>
-          </a:ln>
-          <a:effectLst/>
-        </p:spPr>
-        <p:style>
-          <a:lnRef idx="1">
-            <a:schemeClr val="accent1"/>
-          </a:lnRef>
-          <a:fillRef idx="3">
-            <a:schemeClr val="accent1"/>
-          </a:fillRef>
-          <a:effectRef idx="2">
-            <a:schemeClr val="accent1"/>
-          </a:effectRef>
-          <a:fontRef idx="minor">
-            <a:schemeClr val="lt1"/>
-          </a:fontRef>
-        </p:style>
-        <p:txBody>
-          <a:bodyPr rtlCol="0" anchor="ctr"/>
-          <a:lstStyle/>
-          <a:p>
-            <a:pPr algn="ctr"/>
-          </a:p>
-        </p:txBody>
-      </p:sp>
-      <p:sp>
-        <p:nvSpPr>
-          <p:cNvPr id="4" name="Rectangle 3"/>
-          <p:cNvSpPr/>
-          <p:nvPr/>
-        </p:nvSpPr>
-        <p:spPr>
-          <a:xfrm rot="1800000">
-            <a:off x="10991088" y="-548640"/>
-            <a:ext cx="22860" cy="3063240"/>
-          </a:xfrm>
-          <a:prstGeom prst="rect">
-            <a:avLst/>
-          </a:prstGeom>
-          <a:solidFill>
-            <a:srgbClr val="3A567A"/>
-          </a:solidFill>
-          <a:ln>
-            <a:noFill/>
-          </a:ln>
-          <a:effectLst/>
-        </p:spPr>
-        <p:style>
-          <a:lnRef idx="1">
-            <a:schemeClr val="accent1"/>
-          </a:lnRef>
-          <a:fillRef idx="3">
-            <a:schemeClr val="accent1"/>
-          </a:fillRef>
-          <a:effectRef idx="2">
-            <a:schemeClr val="accent1"/>
-          </a:effectRef>
-          <a:fontRef idx="minor">
-            <a:schemeClr val="lt1"/>
-          </a:fontRef>
-        </p:style>
-        <p:txBody>
-          <a:bodyPr rtlCol="0" anchor="ctr"/>
-          <a:lstStyle/>
-          <a:p>
-            <a:pPr algn="ctr"/>
-          </a:p>
-        </p:txBody>
-      </p:sp>
-      <p:sp>
-        <p:nvSpPr>
-          <p:cNvPr id="5" name="Rectangle 4"/>
-          <p:cNvSpPr/>
-          <p:nvPr/>
-        </p:nvSpPr>
-        <p:spPr>
-          <a:xfrm rot="2520000">
-            <a:off x="11009376" y="-548640"/>
-            <a:ext cx="22860" cy="3200400"/>
-          </a:xfrm>
-          <a:prstGeom prst="rect">
-            <a:avLst/>
-          </a:prstGeom>
-          <a:solidFill>
-            <a:srgbClr val="3A567A"/>
-          </a:solidFill>
-          <a:ln>
-            <a:noFill/>
-          </a:ln>
-          <a:effectLst/>
-        </p:spPr>
-        <p:style>
-          <a:lnRef idx="1">
-            <a:schemeClr val="accent1"/>
-          </a:lnRef>
-          <a:fillRef idx="3">
-            <a:schemeClr val="accent1"/>
-          </a:fillRef>
-          <a:effectRef idx="2">
-            <a:schemeClr val="accent1"/>
-          </a:effectRef>
-          <a:fontRef idx="minor">
-            <a:schemeClr val="lt1"/>
-          </a:fontRef>
-        </p:style>
-        <p:txBody>
-          <a:bodyPr rtlCol="0" anchor="ctr"/>
-          <a:lstStyle/>
-          <a:p>
-            <a:pPr algn="ctr"/>
-          </a:p>
-        </p:txBody>
-      </p:sp>
-      <p:sp>
-        <p:nvSpPr>
-          <p:cNvPr id="6" name="Rectangle 5"/>
-          <p:cNvSpPr/>
-          <p:nvPr/>
-        </p:nvSpPr>
-        <p:spPr>
-          <a:xfrm rot="3240000">
-            <a:off x="11027664" y="-548640"/>
-            <a:ext cx="22860" cy="3337560"/>
-          </a:xfrm>
-          <a:prstGeom prst="rect">
-            <a:avLst/>
-          </a:prstGeom>
-          <a:solidFill>
-            <a:srgbClr val="3A567A"/>
-          </a:solidFill>
-          <a:ln>
-            <a:noFill/>
-          </a:ln>
-          <a:effectLst/>
-        </p:spPr>
-        <p:style>
-          <a:lnRef idx="1">
-            <a:schemeClr val="accent1"/>
-          </a:lnRef>
-          <a:fillRef idx="3">
-            <a:schemeClr val="accent1"/>
-          </a:fillRef>
-          <a:effectRef idx="2">
-            <a:schemeClr val="accent1"/>
-          </a:effectRef>
-          <a:fontRef idx="minor">
-            <a:schemeClr val="lt1"/>
-          </a:fontRef>
-        </p:style>
-        <p:txBody>
-          <a:bodyPr rtlCol="0" anchor="ctr"/>
-          <a:lstStyle/>
-          <a:p>
-            <a:pPr algn="ctr"/>
-          </a:p>
-        </p:txBody>
-      </p:sp>
-      <p:sp>
-        <p:nvSpPr>
-          <p:cNvPr id="7" name="Rectangle 6"/>
-          <p:cNvSpPr/>
-          <p:nvPr/>
-        </p:nvSpPr>
-        <p:spPr>
-          <a:xfrm rot="3960000">
-            <a:off x="11045952" y="-548640"/>
-            <a:ext cx="22860" cy="3474720"/>
-          </a:xfrm>
-          <a:prstGeom prst="rect">
-            <a:avLst/>
-          </a:prstGeom>
-          <a:solidFill>
-            <a:srgbClr val="3A567A"/>
-          </a:solidFill>
-          <a:ln>
-            <a:noFill/>
-          </a:ln>
-          <a:effectLst/>
-        </p:spPr>
-        <p:style>
-          <a:lnRef idx="1">
-            <a:schemeClr val="accent1"/>
-          </a:lnRef>
-          <a:fillRef idx="3">
-            <a:schemeClr val="accent1"/>
-          </a:fillRef>
-          <a:effectRef idx="2">
-            <a:schemeClr val="accent1"/>
-          </a:effectRef>
-          <a:fontRef idx="minor">
-            <a:schemeClr val="lt1"/>
-          </a:fontRef>
-        </p:style>
-        <p:txBody>
-          <a:bodyPr rtlCol="0" anchor="ctr"/>
-          <a:lstStyle/>
-          <a:p>
-            <a:pPr algn="ctr"/>
+            <a:endParaRPr/>
           </a:p>
         </p:txBody>
       </p:sp>
@@ -9659,7 +7978,7 @@
           <a:noFill/>
         </p:spPr>
         <p:txBody>
-          <a:bodyPr wrap="square" anchor="t" lIns="0" rIns="0" tIns="0" bIns="0">
+          <a:bodyPr wrap="square" lIns="0" tIns="0" rIns="0" bIns="0" anchor="t">
             <a:spAutoFit/>
           </a:bodyPr>
           <a:lstStyle/>
@@ -9706,7 +8025,7 @@
           <a:noFill/>
         </p:spPr>
         <p:txBody>
-          <a:bodyPr wrap="square" anchor="t" lIns="0" rIns="0" tIns="0" bIns="0">
+          <a:bodyPr wrap="square" lIns="0" tIns="0" rIns="0" bIns="0" anchor="t">
             <a:spAutoFit/>
           </a:bodyPr>
           <a:lstStyle/>
@@ -9753,7 +8072,7 @@
           <a:noFill/>
         </p:spPr>
         <p:txBody>
-          <a:bodyPr wrap="square" anchor="t" lIns="0" rIns="0" tIns="0" bIns="0">
+          <a:bodyPr wrap="square" lIns="0" tIns="0" rIns="0" bIns="0" anchor="t">
             <a:spAutoFit/>
           </a:bodyPr>
           <a:lstStyle/>
@@ -9828,6 +8147,7 @@
           <a:lstStyle/>
           <a:p>
             <a:pPr algn="ctr"/>
+            <a:endParaRPr/>
           </a:p>
         </p:txBody>
       </p:sp>
@@ -9848,7 +8168,7 @@
           <a:noFill/>
         </p:spPr>
         <p:txBody>
-          <a:bodyPr wrap="square" anchor="ctr" lIns="0" rIns="0" tIns="0" bIns="0">
+          <a:bodyPr wrap="square" lIns="0" tIns="0" rIns="0" bIns="0" anchor="ctr">
             <a:spAutoFit/>
           </a:bodyPr>
           <a:lstStyle/>
@@ -9919,6 +8239,7 @@
           <a:lstStyle/>
           <a:p>
             <a:pPr algn="ctr"/>
+            <a:endParaRPr/>
           </a:p>
         </p:txBody>
       </p:sp>
@@ -9967,6 +8288,7 @@
           <a:lstStyle/>
           <a:p>
             <a:pPr algn="ctr"/>
+            <a:endParaRPr/>
           </a:p>
         </p:txBody>
       </p:sp>
@@ -9987,7 +8309,7 @@
           <a:noFill/>
         </p:spPr>
         <p:txBody>
-          <a:bodyPr wrap="square" anchor="ctr" lIns="0" rIns="0" tIns="0" bIns="0">
+          <a:bodyPr wrap="square" lIns="0" tIns="0" rIns="0" bIns="0" anchor="ctr">
             <a:spAutoFit/>
           </a:bodyPr>
           <a:lstStyle/>
@@ -10082,6 +8404,7 @@
           <a:lstStyle/>
           <a:p>
             <a:pPr algn="ctr"/>
+            <a:endParaRPr/>
           </a:p>
         </p:txBody>
       </p:sp>
@@ -10130,6 +8453,7 @@
           <a:lstStyle/>
           <a:p>
             <a:pPr algn="ctr"/>
+            <a:endParaRPr/>
           </a:p>
         </p:txBody>
       </p:sp>
@@ -10150,7 +8474,7 @@
           <a:noFill/>
         </p:spPr>
         <p:txBody>
-          <a:bodyPr wrap="square" anchor="ctr" lIns="0" rIns="0" tIns="0" bIns="0">
+          <a:bodyPr wrap="square" lIns="0" tIns="0" rIns="0" bIns="0" anchor="ctr">
             <a:spAutoFit/>
           </a:bodyPr>
           <a:lstStyle/>
@@ -10225,6 +8549,7 @@
           <a:lstStyle/>
           <a:p>
             <a:pPr algn="ctr"/>
+            <a:endParaRPr/>
           </a:p>
         </p:txBody>
       </p:sp>
@@ -10245,7 +8570,7 @@
           <a:noFill/>
         </p:spPr>
         <p:txBody>
-          <a:bodyPr wrap="square" anchor="ctr" lIns="0" rIns="0" tIns="0" bIns="0">
+          <a:bodyPr wrap="square" lIns="0" tIns="0" rIns="0" bIns="0" anchor="ctr">
             <a:spAutoFit/>
           </a:bodyPr>
           <a:lstStyle/>
@@ -10320,6 +8645,7 @@
           <a:lstStyle/>
           <a:p>
             <a:pPr algn="ctr"/>
+            <a:endParaRPr/>
           </a:p>
         </p:txBody>
       </p:sp>
@@ -10340,7 +8666,7 @@
           <a:noFill/>
         </p:spPr>
         <p:txBody>
-          <a:bodyPr wrap="square" anchor="ctr" lIns="0" rIns="0" tIns="0" bIns="0">
+          <a:bodyPr wrap="square" lIns="0" tIns="0" rIns="0" bIns="0" anchor="ctr">
             <a:spAutoFit/>
           </a:bodyPr>
           <a:lstStyle/>
@@ -10415,6 +8741,7 @@
           <a:lstStyle/>
           <a:p>
             <a:pPr algn="ctr"/>
+            <a:endParaRPr/>
           </a:p>
         </p:txBody>
       </p:sp>
@@ -10435,7 +8762,7 @@
           <a:noFill/>
         </p:spPr>
         <p:txBody>
-          <a:bodyPr wrap="square" anchor="ctr" lIns="0" rIns="0" tIns="0" bIns="0">
+          <a:bodyPr wrap="square" lIns="0" tIns="0" rIns="0" bIns="0" anchor="ctr">
             <a:spAutoFit/>
           </a:bodyPr>
           <a:lstStyle/>
@@ -10510,6 +8837,7 @@
           <a:lstStyle/>
           <a:p>
             <a:pPr algn="ctr"/>
+            <a:endParaRPr/>
           </a:p>
         </p:txBody>
       </p:sp>
@@ -10530,7 +8858,7 @@
           <a:noFill/>
         </p:spPr>
         <p:txBody>
-          <a:bodyPr wrap="square" anchor="t" lIns="0" rIns="0" tIns="0" bIns="0">
+          <a:bodyPr wrap="square" lIns="0" tIns="0" rIns="0" bIns="0" anchor="t">
             <a:spAutoFit/>
           </a:bodyPr>
           <a:lstStyle/>
@@ -10577,7 +8905,7 @@
           <a:noFill/>
         </p:spPr>
         <p:txBody>
-          <a:bodyPr wrap="square" anchor="t" lIns="0" rIns="0" tIns="0" bIns="0">
+          <a:bodyPr wrap="square" lIns="0" tIns="0" rIns="0" bIns="0" anchor="t">
             <a:spAutoFit/>
           </a:bodyPr>
           <a:lstStyle/>
@@ -10652,6 +8980,7 @@
           <a:lstStyle/>
           <a:p>
             <a:pPr algn="ctr"/>
+            <a:endParaRPr/>
           </a:p>
         </p:txBody>
       </p:sp>
@@ -10672,7 +9001,7 @@
           <a:noFill/>
         </p:spPr>
         <p:txBody>
-          <a:bodyPr wrap="square" anchor="t" lIns="0" rIns="0" tIns="0" bIns="0">
+          <a:bodyPr wrap="square" lIns="0" tIns="0" rIns="0" bIns="0" anchor="t">
             <a:spAutoFit/>
           </a:bodyPr>
           <a:lstStyle/>
@@ -10719,7 +9048,7 @@
           <a:noFill/>
         </p:spPr>
         <p:txBody>
-          <a:bodyPr wrap="square" anchor="t" lIns="0" rIns="0" tIns="0" bIns="0">
+          <a:bodyPr wrap="square" lIns="0" tIns="0" rIns="0" bIns="0" anchor="t">
             <a:spAutoFit/>
           </a:bodyPr>
           <a:lstStyle/>
@@ -10794,6 +9123,7 @@
           <a:lstStyle/>
           <a:p>
             <a:pPr algn="ctr"/>
+            <a:endParaRPr/>
           </a:p>
         </p:txBody>
       </p:sp>
@@ -10814,7 +9144,7 @@
           <a:noFill/>
         </p:spPr>
         <p:txBody>
-          <a:bodyPr wrap="square" anchor="t" lIns="0" rIns="0" tIns="0" bIns="0">
+          <a:bodyPr wrap="square" lIns="0" tIns="0" rIns="0" bIns="0" anchor="t">
             <a:spAutoFit/>
           </a:bodyPr>
           <a:lstStyle/>
@@ -10861,7 +9191,7 @@
           <a:noFill/>
         </p:spPr>
         <p:txBody>
-          <a:bodyPr wrap="square" anchor="t" lIns="0" rIns="0" tIns="0" bIns="0">
+          <a:bodyPr wrap="square" lIns="0" tIns="0" rIns="0" bIns="0" anchor="t">
             <a:spAutoFit/>
           </a:bodyPr>
           <a:lstStyle/>
@@ -10936,6 +9266,7 @@
           <a:lstStyle/>
           <a:p>
             <a:pPr algn="ctr"/>
+            <a:endParaRPr/>
           </a:p>
         </p:txBody>
       </p:sp>
@@ -10956,7 +9287,7 @@
           <a:noFill/>
         </p:spPr>
         <p:txBody>
-          <a:bodyPr wrap="square" anchor="t" lIns="0" rIns="0" tIns="0" bIns="0">
+          <a:bodyPr wrap="square" lIns="0" tIns="0" rIns="0" bIns="0" anchor="t">
             <a:spAutoFit/>
           </a:bodyPr>
           <a:lstStyle/>
@@ -11003,7 +9334,7 @@
           <a:noFill/>
         </p:spPr>
         <p:txBody>
-          <a:bodyPr wrap="square" anchor="t" lIns="0" rIns="0" tIns="0" bIns="0">
+          <a:bodyPr wrap="square" lIns="0" tIns="0" rIns="0" bIns="0" anchor="t">
             <a:spAutoFit/>
           </a:bodyPr>
           <a:lstStyle/>
@@ -11076,6 +9407,7 @@
           <a:lstStyle/>
           <a:p>
             <a:pPr algn="ctr"/>
+            <a:endParaRPr/>
           </a:p>
         </p:txBody>
       </p:sp>
@@ -11096,7 +9428,7 @@
           <a:noFill/>
         </p:spPr>
         <p:txBody>
-          <a:bodyPr wrap="square" anchor="t" lIns="0" rIns="0" tIns="0" bIns="0">
+          <a:bodyPr wrap="square" lIns="0" tIns="0" rIns="0" bIns="0" anchor="t">
             <a:spAutoFit/>
           </a:bodyPr>
           <a:lstStyle/>
@@ -11132,18 +9464,7 @@
                 <a:ea typeface="Microsoft JhengHei"/>
                 <a:cs typeface="Microsoft JhengHei"/>
               </a:rPr>
-              <a:t>Render 公開網址即可使用；</a:t>
-            </a:r>
-            <a:r>
-              <a:rPr sz="1400" b="0">
-                <a:solidFill>
-                  <a:srgbClr val="FFFFFF"/>
-                </a:solidFill>
-                <a:latin typeface="Microsoft JhengHei"/>
-                <a:ea typeface="Microsoft JhengHei"/>
-                <a:cs typeface="Microsoft JhengHei"/>
-              </a:rPr>
-              <a:t>EAP Hybrid RAG Chat API 可介接投研平台／券商 App／企業 IR。</a:t>
+              <a:t>Render 公開網址即可使用；EAP Hybrid RAG Chat API 可介接投研平台／券商 App／企業 IR。</a:t>
             </a:r>
           </a:p>
           <a:p>
@@ -11189,7 +9510,7 @@
           <a:noFill/>
         </p:spPr>
         <p:txBody>
-          <a:bodyPr wrap="square" anchor="t" lIns="0" rIns="0" tIns="0" bIns="0">
+          <a:bodyPr wrap="square" lIns="0" tIns="0" rIns="0" bIns="0" anchor="t">
             <a:spAutoFit/>
           </a:bodyPr>
           <a:lstStyle/>
@@ -11228,7 +9549,7 @@
 </file>
 
 <file path=ppt/slides/slide17.xml><?xml version="1.0" encoding="utf-8"?>
-<p:sld xmlns:a="http://schemas.openxmlformats.org/drawingml/2006/main" xmlns:p="http://schemas.openxmlformats.org/presentationml/2006/main" xmlns:r="http://schemas.openxmlformats.org/officeDocument/2006/relationships">
+<p:sld xmlns:a="http://schemas.openxmlformats.org/drawingml/2006/main" xmlns:r="http://schemas.openxmlformats.org/officeDocument/2006/relationships" xmlns:p="http://schemas.openxmlformats.org/presentationml/2006/main">
   <p:cSld>
     <p:bg>
       <p:bgPr>
@@ -11244,227 +9565,14 @@
         <p:cNvGrpSpPr/>
         <p:nvPr/>
       </p:nvGrpSpPr>
-      <p:grpSpPr/>
-      <p:sp>
-        <p:nvSpPr>
-          <p:cNvPr id="2" name="Rectangle 1"/>
-          <p:cNvSpPr/>
-          <p:nvPr/>
-        </p:nvSpPr>
-        <p:spPr>
-          <a:xfrm rot="1080000">
-            <a:off x="10972800" y="-548640"/>
-            <a:ext cx="22860" cy="2926080"/>
-          </a:xfrm>
-          <a:prstGeom prst="rect">
-            <a:avLst/>
-          </a:prstGeom>
-          <a:solidFill>
-            <a:srgbClr val="F3D9D2"/>
-          </a:solidFill>
-          <a:ln>
-            <a:noFill/>
-          </a:ln>
-          <a:effectLst/>
-        </p:spPr>
-        <p:style>
-          <a:lnRef idx="1">
-            <a:schemeClr val="accent1"/>
-          </a:lnRef>
-          <a:fillRef idx="3">
-            <a:schemeClr val="accent1"/>
-          </a:fillRef>
-          <a:effectRef idx="2">
-            <a:schemeClr val="accent1"/>
-          </a:effectRef>
-          <a:fontRef idx="minor">
-            <a:schemeClr val="lt1"/>
-          </a:fontRef>
-        </p:style>
-        <p:txBody>
-          <a:bodyPr rtlCol="0" anchor="ctr"/>
-          <a:lstStyle/>
-          <a:p>
-            <a:pPr algn="ctr"/>
-          </a:p>
-        </p:txBody>
-      </p:sp>
-      <p:sp>
-        <p:nvSpPr>
-          <p:cNvPr id="3" name="Rectangle 2"/>
-          <p:cNvSpPr/>
-          <p:nvPr/>
-        </p:nvSpPr>
-        <p:spPr>
-          <a:xfrm rot="1800000">
-            <a:off x="10991088" y="-548640"/>
-            <a:ext cx="22860" cy="3063240"/>
-          </a:xfrm>
-          <a:prstGeom prst="rect">
-            <a:avLst/>
-          </a:prstGeom>
-          <a:solidFill>
-            <a:srgbClr val="F3D9D2"/>
-          </a:solidFill>
-          <a:ln>
-            <a:noFill/>
-          </a:ln>
-          <a:effectLst/>
-        </p:spPr>
-        <p:style>
-          <a:lnRef idx="1">
-            <a:schemeClr val="accent1"/>
-          </a:lnRef>
-          <a:fillRef idx="3">
-            <a:schemeClr val="accent1"/>
-          </a:fillRef>
-          <a:effectRef idx="2">
-            <a:schemeClr val="accent1"/>
-          </a:effectRef>
-          <a:fontRef idx="minor">
-            <a:schemeClr val="lt1"/>
-          </a:fontRef>
-        </p:style>
-        <p:txBody>
-          <a:bodyPr rtlCol="0" anchor="ctr"/>
-          <a:lstStyle/>
-          <a:p>
-            <a:pPr algn="ctr"/>
-          </a:p>
-        </p:txBody>
-      </p:sp>
-      <p:sp>
-        <p:nvSpPr>
-          <p:cNvPr id="4" name="Rectangle 3"/>
-          <p:cNvSpPr/>
-          <p:nvPr/>
-        </p:nvSpPr>
-        <p:spPr>
-          <a:xfrm rot="2520000">
-            <a:off x="11009376" y="-548640"/>
-            <a:ext cx="22860" cy="3200400"/>
-          </a:xfrm>
-          <a:prstGeom prst="rect">
-            <a:avLst/>
-          </a:prstGeom>
-          <a:solidFill>
-            <a:srgbClr val="F3D9D2"/>
-          </a:solidFill>
-          <a:ln>
-            <a:noFill/>
-          </a:ln>
-          <a:effectLst/>
-        </p:spPr>
-        <p:style>
-          <a:lnRef idx="1">
-            <a:schemeClr val="accent1"/>
-          </a:lnRef>
-          <a:fillRef idx="3">
-            <a:schemeClr val="accent1"/>
-          </a:fillRef>
-          <a:effectRef idx="2">
-            <a:schemeClr val="accent1"/>
-          </a:effectRef>
-          <a:fontRef idx="minor">
-            <a:schemeClr val="lt1"/>
-          </a:fontRef>
-        </p:style>
-        <p:txBody>
-          <a:bodyPr rtlCol="0" anchor="ctr"/>
-          <a:lstStyle/>
-          <a:p>
-            <a:pPr algn="ctr"/>
-          </a:p>
-        </p:txBody>
-      </p:sp>
-      <p:sp>
-        <p:nvSpPr>
-          <p:cNvPr id="5" name="Rectangle 4"/>
-          <p:cNvSpPr/>
-          <p:nvPr/>
-        </p:nvSpPr>
-        <p:spPr>
-          <a:xfrm rot="3240000">
-            <a:off x="11027664" y="-548640"/>
-            <a:ext cx="22860" cy="3337560"/>
-          </a:xfrm>
-          <a:prstGeom prst="rect">
-            <a:avLst/>
-          </a:prstGeom>
-          <a:solidFill>
-            <a:srgbClr val="F3D9D2"/>
-          </a:solidFill>
-          <a:ln>
-            <a:noFill/>
-          </a:ln>
-          <a:effectLst/>
-        </p:spPr>
-        <p:style>
-          <a:lnRef idx="1">
-            <a:schemeClr val="accent1"/>
-          </a:lnRef>
-          <a:fillRef idx="3">
-            <a:schemeClr val="accent1"/>
-          </a:fillRef>
-          <a:effectRef idx="2">
-            <a:schemeClr val="accent1"/>
-          </a:effectRef>
-          <a:fontRef idx="minor">
-            <a:schemeClr val="lt1"/>
-          </a:fontRef>
-        </p:style>
-        <p:txBody>
-          <a:bodyPr rtlCol="0" anchor="ctr"/>
-          <a:lstStyle/>
-          <a:p>
-            <a:pPr algn="ctr"/>
-          </a:p>
-        </p:txBody>
-      </p:sp>
-      <p:sp>
-        <p:nvSpPr>
-          <p:cNvPr id="6" name="Rectangle 5"/>
-          <p:cNvSpPr/>
-          <p:nvPr/>
-        </p:nvSpPr>
-        <p:spPr>
-          <a:xfrm rot="3960000">
-            <a:off x="11045952" y="-548640"/>
-            <a:ext cx="22860" cy="3474720"/>
-          </a:xfrm>
-          <a:prstGeom prst="rect">
-            <a:avLst/>
-          </a:prstGeom>
-          <a:solidFill>
-            <a:srgbClr val="F3D9D2"/>
-          </a:solidFill>
-          <a:ln>
-            <a:noFill/>
-          </a:ln>
-          <a:effectLst/>
-        </p:spPr>
-        <p:style>
-          <a:lnRef idx="1">
-            <a:schemeClr val="accent1"/>
-          </a:lnRef>
-          <a:fillRef idx="3">
-            <a:schemeClr val="accent1"/>
-          </a:fillRef>
-          <a:effectRef idx="2">
-            <a:schemeClr val="accent1"/>
-          </a:effectRef>
-          <a:fontRef idx="minor">
-            <a:schemeClr val="lt1"/>
-          </a:fontRef>
-        </p:style>
-        <p:txBody>
-          <a:bodyPr rtlCol="0" anchor="ctr"/>
-          <a:lstStyle/>
-          <a:p>
-            <a:pPr algn="ctr"/>
-          </a:p>
-        </p:txBody>
-      </p:sp>
+      <p:grpSpPr>
+        <a:xfrm>
+          <a:off x="0" y="0"/>
+          <a:ext cx="0" cy="0"/>
+          <a:chOff x="0" y="0"/>
+          <a:chExt cx="0" cy="0"/>
+        </a:xfrm>
+      </p:grpSpPr>
       <p:sp>
         <p:nvSpPr>
           <p:cNvPr id="7" name="TextBox 6"/>
@@ -11482,7 +9590,7 @@
           <a:noFill/>
         </p:spPr>
         <p:txBody>
-          <a:bodyPr wrap="square" anchor="t" lIns="0" rIns="0" tIns="0" bIns="0">
+          <a:bodyPr wrap="square" lIns="0" tIns="0" rIns="0" bIns="0" anchor="t">
             <a:spAutoFit/>
           </a:bodyPr>
           <a:lstStyle/>
@@ -11529,7 +9637,7 @@
           <a:noFill/>
         </p:spPr>
         <p:txBody>
-          <a:bodyPr wrap="square" anchor="t" lIns="0" rIns="0" tIns="0" bIns="0">
+          <a:bodyPr wrap="square" lIns="0" tIns="0" rIns="0" bIns="0" anchor="t">
             <a:spAutoFit/>
           </a:bodyPr>
           <a:lstStyle/>
@@ -11576,7 +9684,7 @@
           <a:noFill/>
         </p:spPr>
         <p:txBody>
-          <a:bodyPr wrap="square" anchor="t" lIns="0" rIns="0" tIns="0" bIns="0">
+          <a:bodyPr wrap="square" lIns="0" tIns="0" rIns="0" bIns="0" anchor="t">
             <a:spAutoFit/>
           </a:bodyPr>
           <a:lstStyle/>
@@ -11623,7 +9731,7 @@
           <a:noFill/>
         </p:spPr>
         <p:txBody>
-          <a:bodyPr wrap="square" anchor="t" lIns="0" rIns="0" tIns="0" bIns="0">
+          <a:bodyPr wrap="square" lIns="0" tIns="0" rIns="0" bIns="0" anchor="t">
             <a:spAutoFit/>
           </a:bodyPr>
           <a:lstStyle/>
@@ -11670,7 +9778,7 @@
           <a:noFill/>
         </p:spPr>
         <p:txBody>
-          <a:bodyPr wrap="square" lIns="0" rIns="0" tIns="0" bIns="0">
+          <a:bodyPr wrap="square" lIns="0" tIns="0" rIns="0" bIns="0">
             <a:spAutoFit/>
           </a:bodyPr>
           <a:lstStyle/>
@@ -11821,7 +9929,7 @@
           <a:noFill/>
         </p:spPr>
         <p:txBody>
-          <a:bodyPr wrap="square" anchor="t" lIns="0" rIns="0" tIns="0" bIns="0">
+          <a:bodyPr wrap="square" lIns="0" tIns="0" rIns="0" bIns="0" anchor="t">
             <a:spAutoFit/>
           </a:bodyPr>
           <a:lstStyle/>
@@ -11868,7 +9976,7 @@
           <a:noFill/>
         </p:spPr>
         <p:txBody>
-          <a:bodyPr wrap="square" lIns="0" rIns="0" tIns="0" bIns="0">
+          <a:bodyPr wrap="square" lIns="0" tIns="0" rIns="0" bIns="0">
             <a:spAutoFit/>
           </a:bodyPr>
           <a:lstStyle/>
@@ -11983,6 +10091,7 @@
           <a:lstStyle/>
           <a:p>
             <a:pPr algn="ctr"/>
+            <a:endParaRPr/>
           </a:p>
         </p:txBody>
       </p:sp>
@@ -12003,7 +10112,7 @@
           <a:noFill/>
         </p:spPr>
         <p:txBody>
-          <a:bodyPr wrap="square" anchor="t" lIns="0" rIns="0" tIns="0" bIns="0">
+          <a:bodyPr wrap="square" lIns="0" tIns="0" rIns="0" bIns="0" anchor="t">
             <a:spAutoFit/>
           </a:bodyPr>
           <a:lstStyle/>
@@ -12050,7 +10159,7 @@
           <a:noFill/>
         </p:spPr>
         <p:txBody>
-          <a:bodyPr wrap="square" anchor="t" lIns="0" rIns="0" tIns="0" bIns="0">
+          <a:bodyPr wrap="square" lIns="0" tIns="0" rIns="0" bIns="0" anchor="t">
             <a:spAutoFit/>
           </a:bodyPr>
           <a:lstStyle/>
@@ -12125,6 +10234,7 @@
           <a:lstStyle/>
           <a:p>
             <a:pPr algn="ctr"/>
+            <a:endParaRPr/>
           </a:p>
         </p:txBody>
       </p:sp>
@@ -12145,7 +10255,7 @@
           <a:noFill/>
         </p:spPr>
         <p:txBody>
-          <a:bodyPr wrap="square" anchor="t" lIns="0" rIns="0" tIns="0" bIns="0">
+          <a:bodyPr wrap="square" lIns="0" tIns="0" rIns="0" bIns="0" anchor="t">
             <a:spAutoFit/>
           </a:bodyPr>
           <a:lstStyle/>
@@ -12192,7 +10302,7 @@
           <a:noFill/>
         </p:spPr>
         <p:txBody>
-          <a:bodyPr wrap="square" anchor="t" lIns="0" rIns="0" tIns="0" bIns="0">
+          <a:bodyPr wrap="square" lIns="0" tIns="0" rIns="0" bIns="0" anchor="t">
             <a:spAutoFit/>
           </a:bodyPr>
           <a:lstStyle/>
@@ -12267,6 +10377,7 @@
           <a:lstStyle/>
           <a:p>
             <a:pPr algn="ctr"/>
+            <a:endParaRPr/>
           </a:p>
         </p:txBody>
       </p:sp>
@@ -12287,7 +10398,7 @@
           <a:noFill/>
         </p:spPr>
         <p:txBody>
-          <a:bodyPr wrap="square" anchor="t" lIns="0" rIns="0" tIns="0" bIns="0">
+          <a:bodyPr wrap="square" lIns="0" tIns="0" rIns="0" bIns="0" anchor="t">
             <a:spAutoFit/>
           </a:bodyPr>
           <a:lstStyle/>
@@ -12334,7 +10445,7 @@
           <a:noFill/>
         </p:spPr>
         <p:txBody>
-          <a:bodyPr wrap="square" anchor="t" lIns="0" rIns="0" tIns="0" bIns="0">
+          <a:bodyPr wrap="square" lIns="0" tIns="0" rIns="0" bIns="0" anchor="t">
             <a:spAutoFit/>
           </a:bodyPr>
           <a:lstStyle/>
@@ -12409,6 +10520,7 @@
           <a:lstStyle/>
           <a:p>
             <a:pPr algn="ctr"/>
+            <a:endParaRPr/>
           </a:p>
         </p:txBody>
       </p:sp>
@@ -12429,7 +10541,7 @@
           <a:noFill/>
         </p:spPr>
         <p:txBody>
-          <a:bodyPr wrap="square" anchor="t" lIns="0" rIns="0" tIns="0" bIns="0">
+          <a:bodyPr wrap="square" lIns="0" tIns="0" rIns="0" bIns="0" anchor="t">
             <a:spAutoFit/>
           </a:bodyPr>
           <a:lstStyle/>
@@ -12476,7 +10588,7 @@
           <a:noFill/>
         </p:spPr>
         <p:txBody>
-          <a:bodyPr wrap="square" anchor="t" lIns="0" rIns="0" tIns="0" bIns="0">
+          <a:bodyPr wrap="square" lIns="0" tIns="0" rIns="0" bIns="0" anchor="t">
             <a:spAutoFit/>
           </a:bodyPr>
           <a:lstStyle/>
@@ -12523,7 +10635,7 @@
           <a:noFill/>
         </p:spPr>
         <p:txBody>
-          <a:bodyPr wrap="square" anchor="t" lIns="0" rIns="0" tIns="0" bIns="0">
+          <a:bodyPr wrap="square" lIns="0" tIns="0" rIns="0" bIns="0" anchor="t">
             <a:spAutoFit/>
           </a:bodyPr>
           <a:lstStyle/>
@@ -12562,7 +10674,7 @@
 </file>
 
 <file path=ppt/slides/slide18.xml><?xml version="1.0" encoding="utf-8"?>
-<p:sld xmlns:a="http://schemas.openxmlformats.org/drawingml/2006/main" xmlns:p="http://schemas.openxmlformats.org/presentationml/2006/main" xmlns:r="http://schemas.openxmlformats.org/officeDocument/2006/relationships">
+<p:sld xmlns:a="http://schemas.openxmlformats.org/drawingml/2006/main" xmlns:r="http://schemas.openxmlformats.org/officeDocument/2006/relationships" xmlns:p="http://schemas.openxmlformats.org/presentationml/2006/main">
   <p:cSld>
     <p:bg>
       <p:bgPr>
@@ -12578,7 +10690,14 @@
         <p:cNvGrpSpPr/>
         <p:nvPr/>
       </p:nvGrpSpPr>
-      <p:grpSpPr/>
+      <p:grpSpPr>
+        <a:xfrm>
+          <a:off x="0" y="0"/>
+          <a:ext cx="0" cy="0"/>
+          <a:chOff x="0" y="0"/>
+          <a:chExt cx="0" cy="0"/>
+        </a:xfrm>
+      </p:grpSpPr>
       <p:sp>
         <p:nvSpPr>
           <p:cNvPr id="2" name="Rounded Rectangle 1"/>
@@ -12622,226 +10741,7 @@
           <a:lstStyle/>
           <a:p>
             <a:pPr algn="ctr"/>
-          </a:p>
-        </p:txBody>
-      </p:sp>
-      <p:sp>
-        <p:nvSpPr>
-          <p:cNvPr id="3" name="Rectangle 2"/>
-          <p:cNvSpPr/>
-          <p:nvPr/>
-        </p:nvSpPr>
-        <p:spPr>
-          <a:xfrm rot="1080000">
-            <a:off x="10972800" y="-548640"/>
-            <a:ext cx="22860" cy="2926080"/>
-          </a:xfrm>
-          <a:prstGeom prst="rect">
-            <a:avLst/>
-          </a:prstGeom>
-          <a:solidFill>
-            <a:srgbClr val="3A567A"/>
-          </a:solidFill>
-          <a:ln>
-            <a:noFill/>
-          </a:ln>
-          <a:effectLst/>
-        </p:spPr>
-        <p:style>
-          <a:lnRef idx="1">
-            <a:schemeClr val="accent1"/>
-          </a:lnRef>
-          <a:fillRef idx="3">
-            <a:schemeClr val="accent1"/>
-          </a:fillRef>
-          <a:effectRef idx="2">
-            <a:schemeClr val="accent1"/>
-          </a:effectRef>
-          <a:fontRef idx="minor">
-            <a:schemeClr val="lt1"/>
-          </a:fontRef>
-        </p:style>
-        <p:txBody>
-          <a:bodyPr rtlCol="0" anchor="ctr"/>
-          <a:lstStyle/>
-          <a:p>
-            <a:pPr algn="ctr"/>
-          </a:p>
-        </p:txBody>
-      </p:sp>
-      <p:sp>
-        <p:nvSpPr>
-          <p:cNvPr id="4" name="Rectangle 3"/>
-          <p:cNvSpPr/>
-          <p:nvPr/>
-        </p:nvSpPr>
-        <p:spPr>
-          <a:xfrm rot="1800000">
-            <a:off x="10991088" y="-548640"/>
-            <a:ext cx="22860" cy="3063240"/>
-          </a:xfrm>
-          <a:prstGeom prst="rect">
-            <a:avLst/>
-          </a:prstGeom>
-          <a:solidFill>
-            <a:srgbClr val="3A567A"/>
-          </a:solidFill>
-          <a:ln>
-            <a:noFill/>
-          </a:ln>
-          <a:effectLst/>
-        </p:spPr>
-        <p:style>
-          <a:lnRef idx="1">
-            <a:schemeClr val="accent1"/>
-          </a:lnRef>
-          <a:fillRef idx="3">
-            <a:schemeClr val="accent1"/>
-          </a:fillRef>
-          <a:effectRef idx="2">
-            <a:schemeClr val="accent1"/>
-          </a:effectRef>
-          <a:fontRef idx="minor">
-            <a:schemeClr val="lt1"/>
-          </a:fontRef>
-        </p:style>
-        <p:txBody>
-          <a:bodyPr rtlCol="0" anchor="ctr"/>
-          <a:lstStyle/>
-          <a:p>
-            <a:pPr algn="ctr"/>
-          </a:p>
-        </p:txBody>
-      </p:sp>
-      <p:sp>
-        <p:nvSpPr>
-          <p:cNvPr id="5" name="Rectangle 4"/>
-          <p:cNvSpPr/>
-          <p:nvPr/>
-        </p:nvSpPr>
-        <p:spPr>
-          <a:xfrm rot="2520000">
-            <a:off x="11009376" y="-548640"/>
-            <a:ext cx="22860" cy="3200400"/>
-          </a:xfrm>
-          <a:prstGeom prst="rect">
-            <a:avLst/>
-          </a:prstGeom>
-          <a:solidFill>
-            <a:srgbClr val="3A567A"/>
-          </a:solidFill>
-          <a:ln>
-            <a:noFill/>
-          </a:ln>
-          <a:effectLst/>
-        </p:spPr>
-        <p:style>
-          <a:lnRef idx="1">
-            <a:schemeClr val="accent1"/>
-          </a:lnRef>
-          <a:fillRef idx="3">
-            <a:schemeClr val="accent1"/>
-          </a:fillRef>
-          <a:effectRef idx="2">
-            <a:schemeClr val="accent1"/>
-          </a:effectRef>
-          <a:fontRef idx="minor">
-            <a:schemeClr val="lt1"/>
-          </a:fontRef>
-        </p:style>
-        <p:txBody>
-          <a:bodyPr rtlCol="0" anchor="ctr"/>
-          <a:lstStyle/>
-          <a:p>
-            <a:pPr algn="ctr"/>
-          </a:p>
-        </p:txBody>
-      </p:sp>
-      <p:sp>
-        <p:nvSpPr>
-          <p:cNvPr id="6" name="Rectangle 5"/>
-          <p:cNvSpPr/>
-          <p:nvPr/>
-        </p:nvSpPr>
-        <p:spPr>
-          <a:xfrm rot="3240000">
-            <a:off x="11027664" y="-548640"/>
-            <a:ext cx="22860" cy="3337560"/>
-          </a:xfrm>
-          <a:prstGeom prst="rect">
-            <a:avLst/>
-          </a:prstGeom>
-          <a:solidFill>
-            <a:srgbClr val="3A567A"/>
-          </a:solidFill>
-          <a:ln>
-            <a:noFill/>
-          </a:ln>
-          <a:effectLst/>
-        </p:spPr>
-        <p:style>
-          <a:lnRef idx="1">
-            <a:schemeClr val="accent1"/>
-          </a:lnRef>
-          <a:fillRef idx="3">
-            <a:schemeClr val="accent1"/>
-          </a:fillRef>
-          <a:effectRef idx="2">
-            <a:schemeClr val="accent1"/>
-          </a:effectRef>
-          <a:fontRef idx="minor">
-            <a:schemeClr val="lt1"/>
-          </a:fontRef>
-        </p:style>
-        <p:txBody>
-          <a:bodyPr rtlCol="0" anchor="ctr"/>
-          <a:lstStyle/>
-          <a:p>
-            <a:pPr algn="ctr"/>
-          </a:p>
-        </p:txBody>
-      </p:sp>
-      <p:sp>
-        <p:nvSpPr>
-          <p:cNvPr id="7" name="Rectangle 6"/>
-          <p:cNvSpPr/>
-          <p:nvPr/>
-        </p:nvSpPr>
-        <p:spPr>
-          <a:xfrm rot="3960000">
-            <a:off x="11045952" y="-548640"/>
-            <a:ext cx="22860" cy="3474720"/>
-          </a:xfrm>
-          <a:prstGeom prst="rect">
-            <a:avLst/>
-          </a:prstGeom>
-          <a:solidFill>
-            <a:srgbClr val="3A567A"/>
-          </a:solidFill>
-          <a:ln>
-            <a:noFill/>
-          </a:ln>
-          <a:effectLst/>
-        </p:spPr>
-        <p:style>
-          <a:lnRef idx="1">
-            <a:schemeClr val="accent1"/>
-          </a:lnRef>
-          <a:fillRef idx="3">
-            <a:schemeClr val="accent1"/>
-          </a:fillRef>
-          <a:effectRef idx="2">
-            <a:schemeClr val="accent1"/>
-          </a:effectRef>
-          <a:fontRef idx="minor">
-            <a:schemeClr val="lt1"/>
-          </a:fontRef>
-        </p:style>
-        <p:txBody>
-          <a:bodyPr rtlCol="0" anchor="ctr"/>
-          <a:lstStyle/>
-          <a:p>
-            <a:pPr algn="ctr"/>
+            <a:endParaRPr/>
           </a:p>
         </p:txBody>
       </p:sp>
@@ -12886,6 +10786,7 @@
           <a:lstStyle/>
           <a:p>
             <a:pPr algn="ctr"/>
+            <a:endParaRPr/>
           </a:p>
         </p:txBody>
       </p:sp>
@@ -12906,7 +10807,7 @@
           <a:noFill/>
         </p:spPr>
         <p:txBody>
-          <a:bodyPr wrap="square" anchor="t" lIns="0" rIns="0" tIns="0" bIns="0">
+          <a:bodyPr wrap="square" lIns="0" tIns="0" rIns="0" bIns="0" anchor="t">
             <a:spAutoFit/>
           </a:bodyPr>
           <a:lstStyle/>
@@ -12977,7 +10878,7 @@
           <a:noFill/>
         </p:spPr>
         <p:txBody>
-          <a:bodyPr wrap="square" anchor="t" lIns="0" rIns="0" tIns="0" bIns="0">
+          <a:bodyPr wrap="square" lIns="0" tIns="0" rIns="0" bIns="0" anchor="t">
             <a:spAutoFit/>
           </a:bodyPr>
           <a:lstStyle/>
@@ -13024,7 +10925,7 @@
           <a:noFill/>
         </p:spPr>
         <p:txBody>
-          <a:bodyPr wrap="square" lIns="0" rIns="0" tIns="0" bIns="0">
+          <a:bodyPr wrap="square" lIns="0" tIns="0" rIns="0" bIns="0">
             <a:spAutoFit/>
           </a:bodyPr>
           <a:lstStyle/>
@@ -13143,7 +11044,7 @@
           <a:noFill/>
         </p:spPr>
         <p:txBody>
-          <a:bodyPr wrap="square" anchor="t" lIns="0" rIns="0" tIns="0" bIns="0">
+          <a:bodyPr wrap="square" lIns="0" tIns="0" rIns="0" bIns="0" anchor="t">
             <a:spAutoFit/>
           </a:bodyPr>
           <a:lstStyle/>
@@ -13182,7 +11083,7 @@
 </file>
 
 <file path=ppt/slides/slide2.xml><?xml version="1.0" encoding="utf-8"?>
-<p:sld xmlns:a="http://schemas.openxmlformats.org/drawingml/2006/main" xmlns:p="http://schemas.openxmlformats.org/presentationml/2006/main" xmlns:r="http://schemas.openxmlformats.org/officeDocument/2006/relationships">
+<p:sld xmlns:a="http://schemas.openxmlformats.org/drawingml/2006/main" xmlns:r="http://schemas.openxmlformats.org/officeDocument/2006/relationships" xmlns:p="http://schemas.openxmlformats.org/presentationml/2006/main">
   <p:cSld>
     <p:bg>
       <p:bgPr>
@@ -13198,227 +11099,14 @@
         <p:cNvGrpSpPr/>
         <p:nvPr/>
       </p:nvGrpSpPr>
-      <p:grpSpPr/>
-      <p:sp>
-        <p:nvSpPr>
-          <p:cNvPr id="2" name="Rectangle 1"/>
-          <p:cNvSpPr/>
-          <p:nvPr/>
-        </p:nvSpPr>
-        <p:spPr>
-          <a:xfrm rot="1080000">
-            <a:off x="10972800" y="-548640"/>
-            <a:ext cx="22860" cy="2926080"/>
-          </a:xfrm>
-          <a:prstGeom prst="rect">
-            <a:avLst/>
-          </a:prstGeom>
-          <a:solidFill>
-            <a:srgbClr val="F3D9D2"/>
-          </a:solidFill>
-          <a:ln>
-            <a:noFill/>
-          </a:ln>
-          <a:effectLst/>
-        </p:spPr>
-        <p:style>
-          <a:lnRef idx="1">
-            <a:schemeClr val="accent1"/>
-          </a:lnRef>
-          <a:fillRef idx="3">
-            <a:schemeClr val="accent1"/>
-          </a:fillRef>
-          <a:effectRef idx="2">
-            <a:schemeClr val="accent1"/>
-          </a:effectRef>
-          <a:fontRef idx="minor">
-            <a:schemeClr val="lt1"/>
-          </a:fontRef>
-        </p:style>
-        <p:txBody>
-          <a:bodyPr rtlCol="0" anchor="ctr"/>
-          <a:lstStyle/>
-          <a:p>
-            <a:pPr algn="ctr"/>
-          </a:p>
-        </p:txBody>
-      </p:sp>
-      <p:sp>
-        <p:nvSpPr>
-          <p:cNvPr id="3" name="Rectangle 2"/>
-          <p:cNvSpPr/>
-          <p:nvPr/>
-        </p:nvSpPr>
-        <p:spPr>
-          <a:xfrm rot="1800000">
-            <a:off x="10991088" y="-548640"/>
-            <a:ext cx="22860" cy="3063240"/>
-          </a:xfrm>
-          <a:prstGeom prst="rect">
-            <a:avLst/>
-          </a:prstGeom>
-          <a:solidFill>
-            <a:srgbClr val="F3D9D2"/>
-          </a:solidFill>
-          <a:ln>
-            <a:noFill/>
-          </a:ln>
-          <a:effectLst/>
-        </p:spPr>
-        <p:style>
-          <a:lnRef idx="1">
-            <a:schemeClr val="accent1"/>
-          </a:lnRef>
-          <a:fillRef idx="3">
-            <a:schemeClr val="accent1"/>
-          </a:fillRef>
-          <a:effectRef idx="2">
-            <a:schemeClr val="accent1"/>
-          </a:effectRef>
-          <a:fontRef idx="minor">
-            <a:schemeClr val="lt1"/>
-          </a:fontRef>
-        </p:style>
-        <p:txBody>
-          <a:bodyPr rtlCol="0" anchor="ctr"/>
-          <a:lstStyle/>
-          <a:p>
-            <a:pPr algn="ctr"/>
-          </a:p>
-        </p:txBody>
-      </p:sp>
-      <p:sp>
-        <p:nvSpPr>
-          <p:cNvPr id="4" name="Rectangle 3"/>
-          <p:cNvSpPr/>
-          <p:nvPr/>
-        </p:nvSpPr>
-        <p:spPr>
-          <a:xfrm rot="2520000">
-            <a:off x="11009376" y="-548640"/>
-            <a:ext cx="22860" cy="3200400"/>
-          </a:xfrm>
-          <a:prstGeom prst="rect">
-            <a:avLst/>
-          </a:prstGeom>
-          <a:solidFill>
-            <a:srgbClr val="F3D9D2"/>
-          </a:solidFill>
-          <a:ln>
-            <a:noFill/>
-          </a:ln>
-          <a:effectLst/>
-        </p:spPr>
-        <p:style>
-          <a:lnRef idx="1">
-            <a:schemeClr val="accent1"/>
-          </a:lnRef>
-          <a:fillRef idx="3">
-            <a:schemeClr val="accent1"/>
-          </a:fillRef>
-          <a:effectRef idx="2">
-            <a:schemeClr val="accent1"/>
-          </a:effectRef>
-          <a:fontRef idx="minor">
-            <a:schemeClr val="lt1"/>
-          </a:fontRef>
-        </p:style>
-        <p:txBody>
-          <a:bodyPr rtlCol="0" anchor="ctr"/>
-          <a:lstStyle/>
-          <a:p>
-            <a:pPr algn="ctr"/>
-          </a:p>
-        </p:txBody>
-      </p:sp>
-      <p:sp>
-        <p:nvSpPr>
-          <p:cNvPr id="5" name="Rectangle 4"/>
-          <p:cNvSpPr/>
-          <p:nvPr/>
-        </p:nvSpPr>
-        <p:spPr>
-          <a:xfrm rot="3240000">
-            <a:off x="11027664" y="-548640"/>
-            <a:ext cx="22860" cy="3337560"/>
-          </a:xfrm>
-          <a:prstGeom prst="rect">
-            <a:avLst/>
-          </a:prstGeom>
-          <a:solidFill>
-            <a:srgbClr val="F3D9D2"/>
-          </a:solidFill>
-          <a:ln>
-            <a:noFill/>
-          </a:ln>
-          <a:effectLst/>
-        </p:spPr>
-        <p:style>
-          <a:lnRef idx="1">
-            <a:schemeClr val="accent1"/>
-          </a:lnRef>
-          <a:fillRef idx="3">
-            <a:schemeClr val="accent1"/>
-          </a:fillRef>
-          <a:effectRef idx="2">
-            <a:schemeClr val="accent1"/>
-          </a:effectRef>
-          <a:fontRef idx="minor">
-            <a:schemeClr val="lt1"/>
-          </a:fontRef>
-        </p:style>
-        <p:txBody>
-          <a:bodyPr rtlCol="0" anchor="ctr"/>
-          <a:lstStyle/>
-          <a:p>
-            <a:pPr algn="ctr"/>
-          </a:p>
-        </p:txBody>
-      </p:sp>
-      <p:sp>
-        <p:nvSpPr>
-          <p:cNvPr id="6" name="Rectangle 5"/>
-          <p:cNvSpPr/>
-          <p:nvPr/>
-        </p:nvSpPr>
-        <p:spPr>
-          <a:xfrm rot="3960000">
-            <a:off x="11045952" y="-548640"/>
-            <a:ext cx="22860" cy="3474720"/>
-          </a:xfrm>
-          <a:prstGeom prst="rect">
-            <a:avLst/>
-          </a:prstGeom>
-          <a:solidFill>
-            <a:srgbClr val="F3D9D2"/>
-          </a:solidFill>
-          <a:ln>
-            <a:noFill/>
-          </a:ln>
-          <a:effectLst/>
-        </p:spPr>
-        <p:style>
-          <a:lnRef idx="1">
-            <a:schemeClr val="accent1"/>
-          </a:lnRef>
-          <a:fillRef idx="3">
-            <a:schemeClr val="accent1"/>
-          </a:fillRef>
-          <a:effectRef idx="2">
-            <a:schemeClr val="accent1"/>
-          </a:effectRef>
-          <a:fontRef idx="minor">
-            <a:schemeClr val="lt1"/>
-          </a:fontRef>
-        </p:style>
-        <p:txBody>
-          <a:bodyPr rtlCol="0" anchor="ctr"/>
-          <a:lstStyle/>
-          <a:p>
-            <a:pPr algn="ctr"/>
-          </a:p>
-        </p:txBody>
-      </p:sp>
+      <p:grpSpPr>
+        <a:xfrm>
+          <a:off x="0" y="0"/>
+          <a:ext cx="0" cy="0"/>
+          <a:chOff x="0" y="0"/>
+          <a:chExt cx="0" cy="0"/>
+        </a:xfrm>
+      </p:grpSpPr>
       <p:sp>
         <p:nvSpPr>
           <p:cNvPr id="7" name="TextBox 6"/>
@@ -13436,7 +11124,7 @@
           <a:noFill/>
         </p:spPr>
         <p:txBody>
-          <a:bodyPr wrap="square" anchor="t" lIns="0" rIns="0" tIns="0" bIns="0">
+          <a:bodyPr wrap="square" lIns="0" tIns="0" rIns="0" bIns="0" anchor="t">
             <a:spAutoFit/>
           </a:bodyPr>
           <a:lstStyle/>
@@ -13483,7 +11171,7 @@
           <a:noFill/>
         </p:spPr>
         <p:txBody>
-          <a:bodyPr wrap="square" anchor="t" lIns="0" rIns="0" tIns="0" bIns="0">
+          <a:bodyPr wrap="square" lIns="0" tIns="0" rIns="0" bIns="0" anchor="t">
             <a:spAutoFit/>
           </a:bodyPr>
           <a:lstStyle/>
@@ -13530,7 +11218,7 @@
           <a:noFill/>
         </p:spPr>
         <p:txBody>
-          <a:bodyPr wrap="square" anchor="t" lIns="0" rIns="0" tIns="0" bIns="0">
+          <a:bodyPr wrap="square" lIns="0" tIns="0" rIns="0" bIns="0" anchor="t">
             <a:spAutoFit/>
           </a:bodyPr>
           <a:lstStyle/>
@@ -13605,6 +11293,7 @@
           <a:lstStyle/>
           <a:p>
             <a:pPr algn="ctr"/>
+            <a:endParaRPr/>
           </a:p>
         </p:txBody>
       </p:sp>
@@ -13649,6 +11338,7 @@
           <a:lstStyle/>
           <a:p>
             <a:pPr algn="ctr"/>
+            <a:endParaRPr/>
           </a:p>
         </p:txBody>
       </p:sp>
@@ -13669,7 +11359,7 @@
           <a:noFill/>
         </p:spPr>
         <p:txBody>
-          <a:bodyPr wrap="square" anchor="t" lIns="0" rIns="0" tIns="0" bIns="0">
+          <a:bodyPr wrap="square" lIns="0" tIns="0" rIns="0" bIns="0" anchor="t">
             <a:spAutoFit/>
           </a:bodyPr>
           <a:lstStyle/>
@@ -13716,7 +11406,7 @@
           <a:noFill/>
         </p:spPr>
         <p:txBody>
-          <a:bodyPr wrap="square" anchor="t" lIns="0" rIns="0" tIns="0" bIns="0">
+          <a:bodyPr wrap="square" lIns="0" tIns="0" rIns="0" bIns="0" anchor="t">
             <a:spAutoFit/>
           </a:bodyPr>
           <a:lstStyle/>
@@ -13787,6 +11477,7 @@
           <a:lstStyle/>
           <a:p>
             <a:pPr algn="ctr"/>
+            <a:endParaRPr/>
           </a:p>
         </p:txBody>
       </p:sp>
@@ -13807,7 +11498,7 @@
           <a:noFill/>
         </p:spPr>
         <p:txBody>
-          <a:bodyPr wrap="square" anchor="t" lIns="0" rIns="0" tIns="0" bIns="0">
+          <a:bodyPr wrap="square" lIns="0" tIns="0" rIns="0" bIns="0" anchor="t">
             <a:spAutoFit/>
           </a:bodyPr>
           <a:lstStyle/>
@@ -13906,6 +11597,7 @@
           <a:lstStyle/>
           <a:p>
             <a:pPr algn="ctr"/>
+            <a:endParaRPr/>
           </a:p>
         </p:txBody>
       </p:sp>
@@ -13950,6 +11642,7 @@
           <a:lstStyle/>
           <a:p>
             <a:pPr algn="ctr"/>
+            <a:endParaRPr/>
           </a:p>
         </p:txBody>
       </p:sp>
@@ -13970,7 +11663,7 @@
           <a:noFill/>
         </p:spPr>
         <p:txBody>
-          <a:bodyPr wrap="square" anchor="t" lIns="0" rIns="0" tIns="0" bIns="0">
+          <a:bodyPr wrap="square" lIns="0" tIns="0" rIns="0" bIns="0" anchor="t">
             <a:spAutoFit/>
           </a:bodyPr>
           <a:lstStyle/>
@@ -14017,7 +11710,7 @@
           <a:noFill/>
         </p:spPr>
         <p:txBody>
-          <a:bodyPr wrap="square" anchor="t" lIns="0" rIns="0" tIns="0" bIns="0">
+          <a:bodyPr wrap="square" lIns="0" tIns="0" rIns="0" bIns="0" anchor="t">
             <a:spAutoFit/>
           </a:bodyPr>
           <a:lstStyle/>
@@ -14088,6 +11781,7 @@
           <a:lstStyle/>
           <a:p>
             <a:pPr algn="ctr"/>
+            <a:endParaRPr/>
           </a:p>
         </p:txBody>
       </p:sp>
@@ -14108,7 +11802,7 @@
           <a:noFill/>
         </p:spPr>
         <p:txBody>
-          <a:bodyPr wrap="square" anchor="t" lIns="0" rIns="0" tIns="0" bIns="0">
+          <a:bodyPr wrap="square" lIns="0" tIns="0" rIns="0" bIns="0" anchor="t">
             <a:spAutoFit/>
           </a:bodyPr>
           <a:lstStyle/>
@@ -14207,6 +11901,7 @@
           <a:lstStyle/>
           <a:p>
             <a:pPr algn="ctr"/>
+            <a:endParaRPr/>
           </a:p>
         </p:txBody>
       </p:sp>
@@ -14251,6 +11946,7 @@
           <a:lstStyle/>
           <a:p>
             <a:pPr algn="ctr"/>
+            <a:endParaRPr/>
           </a:p>
         </p:txBody>
       </p:sp>
@@ -14271,7 +11967,7 @@
           <a:noFill/>
         </p:spPr>
         <p:txBody>
-          <a:bodyPr wrap="square" anchor="t" lIns="0" rIns="0" tIns="0" bIns="0">
+          <a:bodyPr wrap="square" lIns="0" tIns="0" rIns="0" bIns="0" anchor="t">
             <a:spAutoFit/>
           </a:bodyPr>
           <a:lstStyle/>
@@ -14318,7 +12014,7 @@
           <a:noFill/>
         </p:spPr>
         <p:txBody>
-          <a:bodyPr wrap="square" anchor="t" lIns="0" rIns="0" tIns="0" bIns="0">
+          <a:bodyPr wrap="square" lIns="0" tIns="0" rIns="0" bIns="0" anchor="t">
             <a:spAutoFit/>
           </a:bodyPr>
           <a:lstStyle/>
@@ -14389,6 +12085,7 @@
           <a:lstStyle/>
           <a:p>
             <a:pPr algn="ctr"/>
+            <a:endParaRPr/>
           </a:p>
         </p:txBody>
       </p:sp>
@@ -14409,7 +12106,7 @@
           <a:noFill/>
         </p:spPr>
         <p:txBody>
-          <a:bodyPr wrap="square" anchor="t" lIns="0" rIns="0" tIns="0" bIns="0">
+          <a:bodyPr wrap="square" lIns="0" tIns="0" rIns="0" bIns="0" anchor="t">
             <a:spAutoFit/>
           </a:bodyPr>
           <a:lstStyle/>
@@ -14480,7 +12177,7 @@
           <a:noFill/>
         </p:spPr>
         <p:txBody>
-          <a:bodyPr wrap="square" anchor="t" lIns="0" rIns="0" tIns="0" bIns="0">
+          <a:bodyPr wrap="square" lIns="0" tIns="0" rIns="0" bIns="0" anchor="t">
             <a:spAutoFit/>
           </a:bodyPr>
           <a:lstStyle/>
@@ -14519,7 +12216,7 @@
 </file>
 
 <file path=ppt/slides/slide3.xml><?xml version="1.0" encoding="utf-8"?>
-<p:sld xmlns:a="http://schemas.openxmlformats.org/drawingml/2006/main" xmlns:p="http://schemas.openxmlformats.org/presentationml/2006/main" xmlns:r="http://schemas.openxmlformats.org/officeDocument/2006/relationships">
+<p:sld xmlns:a="http://schemas.openxmlformats.org/drawingml/2006/main" xmlns:r="http://schemas.openxmlformats.org/officeDocument/2006/relationships" xmlns:p="http://schemas.openxmlformats.org/presentationml/2006/main">
   <p:cSld>
     <p:bg>
       <p:bgPr>
@@ -14535,227 +12232,14 @@
         <p:cNvGrpSpPr/>
         <p:nvPr/>
       </p:nvGrpSpPr>
-      <p:grpSpPr/>
-      <p:sp>
-        <p:nvSpPr>
-          <p:cNvPr id="2" name="Rectangle 1"/>
-          <p:cNvSpPr/>
-          <p:nvPr/>
-        </p:nvSpPr>
-        <p:spPr>
-          <a:xfrm rot="1080000">
-            <a:off x="10972800" y="-548640"/>
-            <a:ext cx="22860" cy="2926080"/>
-          </a:xfrm>
-          <a:prstGeom prst="rect">
-            <a:avLst/>
-          </a:prstGeom>
-          <a:solidFill>
-            <a:srgbClr val="F3D9D2"/>
-          </a:solidFill>
-          <a:ln>
-            <a:noFill/>
-          </a:ln>
-          <a:effectLst/>
-        </p:spPr>
-        <p:style>
-          <a:lnRef idx="1">
-            <a:schemeClr val="accent1"/>
-          </a:lnRef>
-          <a:fillRef idx="3">
-            <a:schemeClr val="accent1"/>
-          </a:fillRef>
-          <a:effectRef idx="2">
-            <a:schemeClr val="accent1"/>
-          </a:effectRef>
-          <a:fontRef idx="minor">
-            <a:schemeClr val="lt1"/>
-          </a:fontRef>
-        </p:style>
-        <p:txBody>
-          <a:bodyPr rtlCol="0" anchor="ctr"/>
-          <a:lstStyle/>
-          <a:p>
-            <a:pPr algn="ctr"/>
-          </a:p>
-        </p:txBody>
-      </p:sp>
-      <p:sp>
-        <p:nvSpPr>
-          <p:cNvPr id="3" name="Rectangle 2"/>
-          <p:cNvSpPr/>
-          <p:nvPr/>
-        </p:nvSpPr>
-        <p:spPr>
-          <a:xfrm rot="1800000">
-            <a:off x="10991088" y="-548640"/>
-            <a:ext cx="22860" cy="3063240"/>
-          </a:xfrm>
-          <a:prstGeom prst="rect">
-            <a:avLst/>
-          </a:prstGeom>
-          <a:solidFill>
-            <a:srgbClr val="F3D9D2"/>
-          </a:solidFill>
-          <a:ln>
-            <a:noFill/>
-          </a:ln>
-          <a:effectLst/>
-        </p:spPr>
-        <p:style>
-          <a:lnRef idx="1">
-            <a:schemeClr val="accent1"/>
-          </a:lnRef>
-          <a:fillRef idx="3">
-            <a:schemeClr val="accent1"/>
-          </a:fillRef>
-          <a:effectRef idx="2">
-            <a:schemeClr val="accent1"/>
-          </a:effectRef>
-          <a:fontRef idx="minor">
-            <a:schemeClr val="lt1"/>
-          </a:fontRef>
-        </p:style>
-        <p:txBody>
-          <a:bodyPr rtlCol="0" anchor="ctr"/>
-          <a:lstStyle/>
-          <a:p>
-            <a:pPr algn="ctr"/>
-          </a:p>
-        </p:txBody>
-      </p:sp>
-      <p:sp>
-        <p:nvSpPr>
-          <p:cNvPr id="4" name="Rectangle 3"/>
-          <p:cNvSpPr/>
-          <p:nvPr/>
-        </p:nvSpPr>
-        <p:spPr>
-          <a:xfrm rot="2520000">
-            <a:off x="11009376" y="-548640"/>
-            <a:ext cx="22860" cy="3200400"/>
-          </a:xfrm>
-          <a:prstGeom prst="rect">
-            <a:avLst/>
-          </a:prstGeom>
-          <a:solidFill>
-            <a:srgbClr val="F3D9D2"/>
-          </a:solidFill>
-          <a:ln>
-            <a:noFill/>
-          </a:ln>
-          <a:effectLst/>
-        </p:spPr>
-        <p:style>
-          <a:lnRef idx="1">
-            <a:schemeClr val="accent1"/>
-          </a:lnRef>
-          <a:fillRef idx="3">
-            <a:schemeClr val="accent1"/>
-          </a:fillRef>
-          <a:effectRef idx="2">
-            <a:schemeClr val="accent1"/>
-          </a:effectRef>
-          <a:fontRef idx="minor">
-            <a:schemeClr val="lt1"/>
-          </a:fontRef>
-        </p:style>
-        <p:txBody>
-          <a:bodyPr rtlCol="0" anchor="ctr"/>
-          <a:lstStyle/>
-          <a:p>
-            <a:pPr algn="ctr"/>
-          </a:p>
-        </p:txBody>
-      </p:sp>
-      <p:sp>
-        <p:nvSpPr>
-          <p:cNvPr id="5" name="Rectangle 4"/>
-          <p:cNvSpPr/>
-          <p:nvPr/>
-        </p:nvSpPr>
-        <p:spPr>
-          <a:xfrm rot="3240000">
-            <a:off x="11027664" y="-548640"/>
-            <a:ext cx="22860" cy="3337560"/>
-          </a:xfrm>
-          <a:prstGeom prst="rect">
-            <a:avLst/>
-          </a:prstGeom>
-          <a:solidFill>
-            <a:srgbClr val="F3D9D2"/>
-          </a:solidFill>
-          <a:ln>
-            <a:noFill/>
-          </a:ln>
-          <a:effectLst/>
-        </p:spPr>
-        <p:style>
-          <a:lnRef idx="1">
-            <a:schemeClr val="accent1"/>
-          </a:lnRef>
-          <a:fillRef idx="3">
-            <a:schemeClr val="accent1"/>
-          </a:fillRef>
-          <a:effectRef idx="2">
-            <a:schemeClr val="accent1"/>
-          </a:effectRef>
-          <a:fontRef idx="minor">
-            <a:schemeClr val="lt1"/>
-          </a:fontRef>
-        </p:style>
-        <p:txBody>
-          <a:bodyPr rtlCol="0" anchor="ctr"/>
-          <a:lstStyle/>
-          <a:p>
-            <a:pPr algn="ctr"/>
-          </a:p>
-        </p:txBody>
-      </p:sp>
-      <p:sp>
-        <p:nvSpPr>
-          <p:cNvPr id="6" name="Rectangle 5"/>
-          <p:cNvSpPr/>
-          <p:nvPr/>
-        </p:nvSpPr>
-        <p:spPr>
-          <a:xfrm rot="3960000">
-            <a:off x="11045952" y="-548640"/>
-            <a:ext cx="22860" cy="3474720"/>
-          </a:xfrm>
-          <a:prstGeom prst="rect">
-            <a:avLst/>
-          </a:prstGeom>
-          <a:solidFill>
-            <a:srgbClr val="F3D9D2"/>
-          </a:solidFill>
-          <a:ln>
-            <a:noFill/>
-          </a:ln>
-          <a:effectLst/>
-        </p:spPr>
-        <p:style>
-          <a:lnRef idx="1">
-            <a:schemeClr val="accent1"/>
-          </a:lnRef>
-          <a:fillRef idx="3">
-            <a:schemeClr val="accent1"/>
-          </a:fillRef>
-          <a:effectRef idx="2">
-            <a:schemeClr val="accent1"/>
-          </a:effectRef>
-          <a:fontRef idx="minor">
-            <a:schemeClr val="lt1"/>
-          </a:fontRef>
-        </p:style>
-        <p:txBody>
-          <a:bodyPr rtlCol="0" anchor="ctr"/>
-          <a:lstStyle/>
-          <a:p>
-            <a:pPr algn="ctr"/>
-          </a:p>
-        </p:txBody>
-      </p:sp>
+      <p:grpSpPr>
+        <a:xfrm>
+          <a:off x="0" y="0"/>
+          <a:ext cx="0" cy="0"/>
+          <a:chOff x="0" y="0"/>
+          <a:chExt cx="0" cy="0"/>
+        </a:xfrm>
+      </p:grpSpPr>
       <p:sp>
         <p:nvSpPr>
           <p:cNvPr id="7" name="TextBox 6"/>
@@ -14773,7 +12257,7 @@
           <a:noFill/>
         </p:spPr>
         <p:txBody>
-          <a:bodyPr wrap="square" anchor="t" lIns="0" rIns="0" tIns="0" bIns="0">
+          <a:bodyPr wrap="square" lIns="0" tIns="0" rIns="0" bIns="0" anchor="t">
             <a:spAutoFit/>
           </a:bodyPr>
           <a:lstStyle/>
@@ -14820,7 +12304,7 @@
           <a:noFill/>
         </p:spPr>
         <p:txBody>
-          <a:bodyPr wrap="square" anchor="t" lIns="0" rIns="0" tIns="0" bIns="0">
+          <a:bodyPr wrap="square" lIns="0" tIns="0" rIns="0" bIns="0" anchor="t">
             <a:spAutoFit/>
           </a:bodyPr>
           <a:lstStyle/>
@@ -14867,7 +12351,7 @@
           <a:noFill/>
         </p:spPr>
         <p:txBody>
-          <a:bodyPr wrap="square" anchor="t" lIns="0" rIns="0" tIns="0" bIns="0">
+          <a:bodyPr wrap="square" lIns="0" tIns="0" rIns="0" bIns="0" anchor="t">
             <a:spAutoFit/>
           </a:bodyPr>
           <a:lstStyle/>
@@ -14942,6 +12426,7 @@
           <a:lstStyle/>
           <a:p>
             <a:pPr algn="ctr"/>
+            <a:endParaRPr/>
           </a:p>
         </p:txBody>
       </p:sp>
@@ -14982,7 +12467,7 @@
           </a:fontRef>
         </p:style>
         <p:txBody>
-          <a:bodyPr rtlCol="0" anchor="ctr" lIns="0" rIns="0" tIns="0" bIns="0"/>
+          <a:bodyPr lIns="0" tIns="0" rIns="0" bIns="0" rtlCol="0" anchor="ctr"/>
           <a:lstStyle/>
           <a:p>
             <a:pPr algn="ctr"/>
@@ -15017,7 +12502,7 @@
           <a:noFill/>
         </p:spPr>
         <p:txBody>
-          <a:bodyPr wrap="square" anchor="ctr" lIns="0" rIns="0" tIns="0" bIns="0">
+          <a:bodyPr wrap="square" lIns="0" tIns="0" rIns="0" bIns="0" anchor="ctr">
             <a:spAutoFit/>
           </a:bodyPr>
           <a:lstStyle/>
@@ -15103,6 +12588,7 @@
           <a:lstStyle/>
           <a:p>
             <a:pPr algn="ctr"/>
+            <a:endParaRPr/>
           </a:p>
         </p:txBody>
       </p:sp>
@@ -15143,7 +12629,7 @@
           </a:fontRef>
         </p:style>
         <p:txBody>
-          <a:bodyPr rtlCol="0" anchor="ctr" lIns="0" rIns="0" tIns="0" bIns="0"/>
+          <a:bodyPr lIns="0" tIns="0" rIns="0" bIns="0" rtlCol="0" anchor="ctr"/>
           <a:lstStyle/>
           <a:p>
             <a:pPr algn="ctr"/>
@@ -15178,7 +12664,7 @@
           <a:noFill/>
         </p:spPr>
         <p:txBody>
-          <a:bodyPr wrap="square" anchor="ctr" lIns="0" rIns="0" tIns="0" bIns="0">
+          <a:bodyPr wrap="square" lIns="0" tIns="0" rIns="0" bIns="0" anchor="ctr">
             <a:spAutoFit/>
           </a:bodyPr>
           <a:lstStyle/>
@@ -15264,6 +12750,7 @@
           <a:lstStyle/>
           <a:p>
             <a:pPr algn="ctr"/>
+            <a:endParaRPr/>
           </a:p>
         </p:txBody>
       </p:sp>
@@ -15304,7 +12791,7 @@
           </a:fontRef>
         </p:style>
         <p:txBody>
-          <a:bodyPr rtlCol="0" anchor="ctr" lIns="0" rIns="0" tIns="0" bIns="0"/>
+          <a:bodyPr lIns="0" tIns="0" rIns="0" bIns="0" rtlCol="0" anchor="ctr"/>
           <a:lstStyle/>
           <a:p>
             <a:pPr algn="ctr"/>
@@ -15339,7 +12826,7 @@
           <a:noFill/>
         </p:spPr>
         <p:txBody>
-          <a:bodyPr wrap="square" anchor="ctr" lIns="0" rIns="0" tIns="0" bIns="0">
+          <a:bodyPr wrap="square" lIns="0" tIns="0" rIns="0" bIns="0" anchor="ctr">
             <a:spAutoFit/>
           </a:bodyPr>
           <a:lstStyle/>
@@ -15425,6 +12912,7 @@
           <a:lstStyle/>
           <a:p>
             <a:pPr algn="ctr"/>
+            <a:endParaRPr/>
           </a:p>
         </p:txBody>
       </p:sp>
@@ -15465,7 +12953,7 @@
           </a:fontRef>
         </p:style>
         <p:txBody>
-          <a:bodyPr rtlCol="0" anchor="ctr" lIns="0" rIns="0" tIns="0" bIns="0"/>
+          <a:bodyPr lIns="0" tIns="0" rIns="0" bIns="0" rtlCol="0" anchor="ctr"/>
           <a:lstStyle/>
           <a:p>
             <a:pPr algn="ctr"/>
@@ -15500,7 +12988,7 @@
           <a:noFill/>
         </p:spPr>
         <p:txBody>
-          <a:bodyPr wrap="square" anchor="ctr" lIns="0" rIns="0" tIns="0" bIns="0">
+          <a:bodyPr wrap="square" lIns="0" tIns="0" rIns="0" bIns="0" anchor="ctr">
             <a:spAutoFit/>
           </a:bodyPr>
           <a:lstStyle/>
@@ -15584,6 +13072,7 @@
           <a:lstStyle/>
           <a:p>
             <a:pPr algn="ctr"/>
+            <a:endParaRPr/>
           </a:p>
         </p:txBody>
       </p:sp>
@@ -15604,7 +13093,7 @@
           <a:noFill/>
         </p:spPr>
         <p:txBody>
-          <a:bodyPr wrap="square" anchor="t" lIns="0" rIns="0" tIns="0" bIns="0">
+          <a:bodyPr wrap="square" lIns="0" tIns="0" rIns="0" bIns="0" anchor="t">
             <a:spAutoFit/>
           </a:bodyPr>
           <a:lstStyle/>
@@ -15651,7 +13140,7 @@
           <a:noFill/>
         </p:spPr>
         <p:txBody>
-          <a:bodyPr wrap="square" lIns="0" rIns="0" tIns="0" bIns="0">
+          <a:bodyPr wrap="square" lIns="0" tIns="0" rIns="0" bIns="0">
             <a:spAutoFit/>
           </a:bodyPr>
           <a:lstStyle/>
@@ -15802,7 +13291,7 @@
           <a:noFill/>
         </p:spPr>
         <p:txBody>
-          <a:bodyPr wrap="square" anchor="t" lIns="0" rIns="0" tIns="0" bIns="0">
+          <a:bodyPr wrap="square" lIns="0" tIns="0" rIns="0" bIns="0" anchor="t">
             <a:spAutoFit/>
           </a:bodyPr>
           <a:lstStyle/>
@@ -15841,7 +13330,7 @@
 </file>
 
 <file path=ppt/slides/slide4.xml><?xml version="1.0" encoding="utf-8"?>
-<p:sld xmlns:a="http://schemas.openxmlformats.org/drawingml/2006/main" xmlns:p="http://schemas.openxmlformats.org/presentationml/2006/main" xmlns:r="http://schemas.openxmlformats.org/officeDocument/2006/relationships">
+<p:sld xmlns:a="http://schemas.openxmlformats.org/drawingml/2006/main" xmlns:r="http://schemas.openxmlformats.org/officeDocument/2006/relationships" xmlns:p="http://schemas.openxmlformats.org/presentationml/2006/main">
   <p:cSld>
     <p:bg>
       <p:bgPr>
@@ -15857,227 +13346,14 @@
         <p:cNvGrpSpPr/>
         <p:nvPr/>
       </p:nvGrpSpPr>
-      <p:grpSpPr/>
-      <p:sp>
-        <p:nvSpPr>
-          <p:cNvPr id="2" name="Rectangle 1"/>
-          <p:cNvSpPr/>
-          <p:nvPr/>
-        </p:nvSpPr>
-        <p:spPr>
-          <a:xfrm rot="1080000">
-            <a:off x="10972800" y="-548640"/>
-            <a:ext cx="22860" cy="2926080"/>
-          </a:xfrm>
-          <a:prstGeom prst="rect">
-            <a:avLst/>
-          </a:prstGeom>
-          <a:solidFill>
-            <a:srgbClr val="F3D9D2"/>
-          </a:solidFill>
-          <a:ln>
-            <a:noFill/>
-          </a:ln>
-          <a:effectLst/>
-        </p:spPr>
-        <p:style>
-          <a:lnRef idx="1">
-            <a:schemeClr val="accent1"/>
-          </a:lnRef>
-          <a:fillRef idx="3">
-            <a:schemeClr val="accent1"/>
-          </a:fillRef>
-          <a:effectRef idx="2">
-            <a:schemeClr val="accent1"/>
-          </a:effectRef>
-          <a:fontRef idx="minor">
-            <a:schemeClr val="lt1"/>
-          </a:fontRef>
-        </p:style>
-        <p:txBody>
-          <a:bodyPr rtlCol="0" anchor="ctr"/>
-          <a:lstStyle/>
-          <a:p>
-            <a:pPr algn="ctr"/>
-          </a:p>
-        </p:txBody>
-      </p:sp>
-      <p:sp>
-        <p:nvSpPr>
-          <p:cNvPr id="3" name="Rectangle 2"/>
-          <p:cNvSpPr/>
-          <p:nvPr/>
-        </p:nvSpPr>
-        <p:spPr>
-          <a:xfrm rot="1800000">
-            <a:off x="10991088" y="-548640"/>
-            <a:ext cx="22860" cy="3063240"/>
-          </a:xfrm>
-          <a:prstGeom prst="rect">
-            <a:avLst/>
-          </a:prstGeom>
-          <a:solidFill>
-            <a:srgbClr val="F3D9D2"/>
-          </a:solidFill>
-          <a:ln>
-            <a:noFill/>
-          </a:ln>
-          <a:effectLst/>
-        </p:spPr>
-        <p:style>
-          <a:lnRef idx="1">
-            <a:schemeClr val="accent1"/>
-          </a:lnRef>
-          <a:fillRef idx="3">
-            <a:schemeClr val="accent1"/>
-          </a:fillRef>
-          <a:effectRef idx="2">
-            <a:schemeClr val="accent1"/>
-          </a:effectRef>
-          <a:fontRef idx="minor">
-            <a:schemeClr val="lt1"/>
-          </a:fontRef>
-        </p:style>
-        <p:txBody>
-          <a:bodyPr rtlCol="0" anchor="ctr"/>
-          <a:lstStyle/>
-          <a:p>
-            <a:pPr algn="ctr"/>
-          </a:p>
-        </p:txBody>
-      </p:sp>
-      <p:sp>
-        <p:nvSpPr>
-          <p:cNvPr id="4" name="Rectangle 3"/>
-          <p:cNvSpPr/>
-          <p:nvPr/>
-        </p:nvSpPr>
-        <p:spPr>
-          <a:xfrm rot="2520000">
-            <a:off x="11009376" y="-548640"/>
-            <a:ext cx="22860" cy="3200400"/>
-          </a:xfrm>
-          <a:prstGeom prst="rect">
-            <a:avLst/>
-          </a:prstGeom>
-          <a:solidFill>
-            <a:srgbClr val="F3D9D2"/>
-          </a:solidFill>
-          <a:ln>
-            <a:noFill/>
-          </a:ln>
-          <a:effectLst/>
-        </p:spPr>
-        <p:style>
-          <a:lnRef idx="1">
-            <a:schemeClr val="accent1"/>
-          </a:lnRef>
-          <a:fillRef idx="3">
-            <a:schemeClr val="accent1"/>
-          </a:fillRef>
-          <a:effectRef idx="2">
-            <a:schemeClr val="accent1"/>
-          </a:effectRef>
-          <a:fontRef idx="minor">
-            <a:schemeClr val="lt1"/>
-          </a:fontRef>
-        </p:style>
-        <p:txBody>
-          <a:bodyPr rtlCol="0" anchor="ctr"/>
-          <a:lstStyle/>
-          <a:p>
-            <a:pPr algn="ctr"/>
-          </a:p>
-        </p:txBody>
-      </p:sp>
-      <p:sp>
-        <p:nvSpPr>
-          <p:cNvPr id="5" name="Rectangle 4"/>
-          <p:cNvSpPr/>
-          <p:nvPr/>
-        </p:nvSpPr>
-        <p:spPr>
-          <a:xfrm rot="3240000">
-            <a:off x="11027664" y="-548640"/>
-            <a:ext cx="22860" cy="3337560"/>
-          </a:xfrm>
-          <a:prstGeom prst="rect">
-            <a:avLst/>
-          </a:prstGeom>
-          <a:solidFill>
-            <a:srgbClr val="F3D9D2"/>
-          </a:solidFill>
-          <a:ln>
-            <a:noFill/>
-          </a:ln>
-          <a:effectLst/>
-        </p:spPr>
-        <p:style>
-          <a:lnRef idx="1">
-            <a:schemeClr val="accent1"/>
-          </a:lnRef>
-          <a:fillRef idx="3">
-            <a:schemeClr val="accent1"/>
-          </a:fillRef>
-          <a:effectRef idx="2">
-            <a:schemeClr val="accent1"/>
-          </a:effectRef>
-          <a:fontRef idx="minor">
-            <a:schemeClr val="lt1"/>
-          </a:fontRef>
-        </p:style>
-        <p:txBody>
-          <a:bodyPr rtlCol="0" anchor="ctr"/>
-          <a:lstStyle/>
-          <a:p>
-            <a:pPr algn="ctr"/>
-          </a:p>
-        </p:txBody>
-      </p:sp>
-      <p:sp>
-        <p:nvSpPr>
-          <p:cNvPr id="6" name="Rectangle 5"/>
-          <p:cNvSpPr/>
-          <p:nvPr/>
-        </p:nvSpPr>
-        <p:spPr>
-          <a:xfrm rot="3960000">
-            <a:off x="11045952" y="-548640"/>
-            <a:ext cx="22860" cy="3474720"/>
-          </a:xfrm>
-          <a:prstGeom prst="rect">
-            <a:avLst/>
-          </a:prstGeom>
-          <a:solidFill>
-            <a:srgbClr val="F3D9D2"/>
-          </a:solidFill>
-          <a:ln>
-            <a:noFill/>
-          </a:ln>
-          <a:effectLst/>
-        </p:spPr>
-        <p:style>
-          <a:lnRef idx="1">
-            <a:schemeClr val="accent1"/>
-          </a:lnRef>
-          <a:fillRef idx="3">
-            <a:schemeClr val="accent1"/>
-          </a:fillRef>
-          <a:effectRef idx="2">
-            <a:schemeClr val="accent1"/>
-          </a:effectRef>
-          <a:fontRef idx="minor">
-            <a:schemeClr val="lt1"/>
-          </a:fontRef>
-        </p:style>
-        <p:txBody>
-          <a:bodyPr rtlCol="0" anchor="ctr"/>
-          <a:lstStyle/>
-          <a:p>
-            <a:pPr algn="ctr"/>
-          </a:p>
-        </p:txBody>
-      </p:sp>
+      <p:grpSpPr>
+        <a:xfrm>
+          <a:off x="0" y="0"/>
+          <a:ext cx="0" cy="0"/>
+          <a:chOff x="0" y="0"/>
+          <a:chExt cx="0" cy="0"/>
+        </a:xfrm>
+      </p:grpSpPr>
       <p:sp>
         <p:nvSpPr>
           <p:cNvPr id="7" name="TextBox 6"/>
@@ -16095,7 +13371,7 @@
           <a:noFill/>
         </p:spPr>
         <p:txBody>
-          <a:bodyPr wrap="square" anchor="t" lIns="0" rIns="0" tIns="0" bIns="0">
+          <a:bodyPr wrap="square" lIns="0" tIns="0" rIns="0" bIns="0" anchor="t">
             <a:spAutoFit/>
           </a:bodyPr>
           <a:lstStyle/>
@@ -16142,7 +13418,7 @@
           <a:noFill/>
         </p:spPr>
         <p:txBody>
-          <a:bodyPr wrap="square" anchor="t" lIns="0" rIns="0" tIns="0" bIns="0">
+          <a:bodyPr wrap="square" lIns="0" tIns="0" rIns="0" bIns="0" anchor="t">
             <a:spAutoFit/>
           </a:bodyPr>
           <a:lstStyle/>
@@ -16189,7 +13465,7 @@
           <a:noFill/>
         </p:spPr>
         <p:txBody>
-          <a:bodyPr wrap="square" anchor="t" lIns="0" rIns="0" tIns="0" bIns="0">
+          <a:bodyPr wrap="square" lIns="0" tIns="0" rIns="0" bIns="0" anchor="t">
             <a:spAutoFit/>
           </a:bodyPr>
           <a:lstStyle/>
@@ -16264,6 +13540,7 @@
           <a:lstStyle/>
           <a:p>
             <a:pPr algn="ctr"/>
+            <a:endParaRPr/>
           </a:p>
         </p:txBody>
       </p:sp>
@@ -16312,6 +13589,7 @@
           <a:lstStyle/>
           <a:p>
             <a:pPr algn="ctr"/>
+            <a:endParaRPr/>
           </a:p>
         </p:txBody>
       </p:sp>
@@ -16332,7 +13610,7 @@
           <a:noFill/>
         </p:spPr>
         <p:txBody>
-          <a:bodyPr wrap="square" anchor="ctr" lIns="0" rIns="0" tIns="0" bIns="0">
+          <a:bodyPr wrap="square" lIns="0" tIns="0" rIns="0" bIns="0" anchor="ctr">
             <a:spAutoFit/>
           </a:bodyPr>
           <a:lstStyle/>
@@ -16407,6 +13685,7 @@
           <a:lstStyle/>
           <a:p>
             <a:pPr algn="ctr"/>
+            <a:endParaRPr/>
           </a:p>
         </p:txBody>
       </p:sp>
@@ -16427,7 +13706,7 @@
           <a:noFill/>
         </p:spPr>
         <p:txBody>
-          <a:bodyPr wrap="square" anchor="ctr" lIns="0" rIns="0" tIns="0" bIns="0">
+          <a:bodyPr wrap="square" lIns="0" tIns="0" rIns="0" bIns="0" anchor="ctr">
             <a:spAutoFit/>
           </a:bodyPr>
           <a:lstStyle/>
@@ -16526,6 +13805,7 @@
           <a:lstStyle/>
           <a:p>
             <a:pPr algn="ctr"/>
+            <a:endParaRPr/>
           </a:p>
         </p:txBody>
       </p:sp>
@@ -16546,7 +13826,7 @@
           <a:noFill/>
         </p:spPr>
         <p:txBody>
-          <a:bodyPr wrap="square" anchor="ctr" lIns="0" rIns="0" tIns="0" bIns="0">
+          <a:bodyPr wrap="square" lIns="0" tIns="0" rIns="0" bIns="0" anchor="ctr">
             <a:spAutoFit/>
           </a:bodyPr>
           <a:lstStyle/>
@@ -16645,6 +13925,7 @@
           <a:lstStyle/>
           <a:p>
             <a:pPr algn="ctr"/>
+            <a:endParaRPr/>
           </a:p>
         </p:txBody>
       </p:sp>
@@ -16665,7 +13946,7 @@
           <a:noFill/>
         </p:spPr>
         <p:txBody>
-          <a:bodyPr wrap="square" anchor="ctr" lIns="0" rIns="0" tIns="0" bIns="0">
+          <a:bodyPr wrap="square" lIns="0" tIns="0" rIns="0" bIns="0" anchor="ctr">
             <a:spAutoFit/>
           </a:bodyPr>
           <a:lstStyle/>
@@ -16740,6 +14021,7 @@
           <a:lstStyle/>
           <a:p>
             <a:pPr algn="ctr"/>
+            <a:endParaRPr/>
           </a:p>
         </p:txBody>
       </p:sp>
@@ -16760,7 +14042,7 @@
           <a:noFill/>
         </p:spPr>
         <p:txBody>
-          <a:bodyPr wrap="square" anchor="ctr" lIns="0" rIns="0" tIns="0" bIns="0">
+          <a:bodyPr wrap="square" lIns="0" tIns="0" rIns="0" bIns="0" anchor="ctr">
             <a:spAutoFit/>
           </a:bodyPr>
           <a:lstStyle/>
@@ -16835,6 +14117,7 @@
           <a:lstStyle/>
           <a:p>
             <a:pPr algn="ctr"/>
+            <a:endParaRPr/>
           </a:p>
         </p:txBody>
       </p:sp>
@@ -16855,7 +14138,7 @@
           <a:noFill/>
         </p:spPr>
         <p:txBody>
-          <a:bodyPr wrap="square" anchor="ctr" lIns="0" rIns="0" tIns="0" bIns="0">
+          <a:bodyPr wrap="square" lIns="0" tIns="0" rIns="0" bIns="0" anchor="ctr">
             <a:spAutoFit/>
           </a:bodyPr>
           <a:lstStyle/>
@@ -16930,6 +14213,7 @@
           <a:lstStyle/>
           <a:p>
             <a:pPr algn="ctr"/>
+            <a:endParaRPr/>
           </a:p>
         </p:txBody>
       </p:sp>
@@ -16950,7 +14234,7 @@
           <a:noFill/>
         </p:spPr>
         <p:txBody>
-          <a:bodyPr wrap="square" anchor="ctr" lIns="0" rIns="0" tIns="0" bIns="0">
+          <a:bodyPr wrap="square" lIns="0" tIns="0" rIns="0" bIns="0" anchor="ctr">
             <a:spAutoFit/>
           </a:bodyPr>
           <a:lstStyle/>
@@ -17025,6 +14309,7 @@
           <a:lstStyle/>
           <a:p>
             <a:pPr algn="ctr"/>
+            <a:endParaRPr/>
           </a:p>
         </p:txBody>
       </p:sp>
@@ -17045,7 +14330,7 @@
           <a:noFill/>
         </p:spPr>
         <p:txBody>
-          <a:bodyPr wrap="square" anchor="ctr" lIns="0" rIns="0" tIns="0" bIns="0">
+          <a:bodyPr wrap="square" lIns="0" tIns="0" rIns="0" bIns="0" anchor="ctr">
             <a:spAutoFit/>
           </a:bodyPr>
           <a:lstStyle/>
@@ -17120,6 +14405,7 @@
           <a:lstStyle/>
           <a:p>
             <a:pPr algn="ctr"/>
+            <a:endParaRPr/>
           </a:p>
         </p:txBody>
       </p:sp>
@@ -17140,7 +14426,7 @@
           <a:noFill/>
         </p:spPr>
         <p:txBody>
-          <a:bodyPr wrap="square" anchor="ctr" lIns="0" rIns="0" tIns="0" bIns="0">
+          <a:bodyPr wrap="square" lIns="0" tIns="0" rIns="0" bIns="0" anchor="ctr">
             <a:spAutoFit/>
           </a:bodyPr>
           <a:lstStyle/>
@@ -17215,6 +14501,7 @@
           <a:lstStyle/>
           <a:p>
             <a:pPr algn="ctr"/>
+            <a:endParaRPr/>
           </a:p>
         </p:txBody>
       </p:sp>
@@ -17235,7 +14522,7 @@
           <a:noFill/>
         </p:spPr>
         <p:txBody>
-          <a:bodyPr wrap="square" anchor="ctr" lIns="0" rIns="0" tIns="0" bIns="0">
+          <a:bodyPr wrap="square" lIns="0" tIns="0" rIns="0" bIns="0" anchor="ctr">
             <a:spAutoFit/>
           </a:bodyPr>
           <a:lstStyle/>
@@ -17310,6 +14597,7 @@
           <a:lstStyle/>
           <a:p>
             <a:pPr algn="ctr"/>
+            <a:endParaRPr/>
           </a:p>
         </p:txBody>
       </p:sp>
@@ -17330,7 +14618,7 @@
           <a:noFill/>
         </p:spPr>
         <p:txBody>
-          <a:bodyPr wrap="square" anchor="ctr" lIns="0" rIns="0" tIns="0" bIns="0">
+          <a:bodyPr wrap="square" lIns="0" tIns="0" rIns="0" bIns="0" anchor="ctr">
             <a:spAutoFit/>
           </a:bodyPr>
           <a:lstStyle/>
@@ -17405,6 +14693,7 @@
           <a:lstStyle/>
           <a:p>
             <a:pPr algn="ctr"/>
+            <a:endParaRPr/>
           </a:p>
         </p:txBody>
       </p:sp>
@@ -17425,7 +14714,7 @@
           <a:noFill/>
         </p:spPr>
         <p:txBody>
-          <a:bodyPr wrap="square" anchor="ctr" lIns="0" rIns="0" tIns="0" bIns="0">
+          <a:bodyPr wrap="square" lIns="0" tIns="0" rIns="0" bIns="0" anchor="ctr">
             <a:spAutoFit/>
           </a:bodyPr>
           <a:lstStyle/>
@@ -17500,6 +14789,7 @@
           <a:lstStyle/>
           <a:p>
             <a:pPr algn="ctr"/>
+            <a:endParaRPr/>
           </a:p>
         </p:txBody>
       </p:sp>
@@ -17520,7 +14810,7 @@
           <a:noFill/>
         </p:spPr>
         <p:txBody>
-          <a:bodyPr wrap="square" anchor="ctr" lIns="0" rIns="0" tIns="0" bIns="0">
+          <a:bodyPr wrap="square" lIns="0" tIns="0" rIns="0" bIns="0" anchor="ctr">
             <a:spAutoFit/>
           </a:bodyPr>
           <a:lstStyle/>
@@ -17595,6 +14885,7 @@
           <a:lstStyle/>
           <a:p>
             <a:pPr algn="ctr"/>
+            <a:endParaRPr/>
           </a:p>
         </p:txBody>
       </p:sp>
@@ -17615,7 +14906,7 @@
           <a:noFill/>
         </p:spPr>
         <p:txBody>
-          <a:bodyPr wrap="square" anchor="ctr" lIns="0" rIns="0" tIns="0" bIns="0">
+          <a:bodyPr wrap="square" lIns="0" tIns="0" rIns="0" bIns="0" anchor="ctr">
             <a:spAutoFit/>
           </a:bodyPr>
           <a:lstStyle/>
@@ -17690,6 +14981,7 @@
           <a:lstStyle/>
           <a:p>
             <a:pPr algn="ctr"/>
+            <a:endParaRPr/>
           </a:p>
         </p:txBody>
       </p:sp>
@@ -17710,7 +15002,7 @@
           <a:noFill/>
         </p:spPr>
         <p:txBody>
-          <a:bodyPr wrap="square" anchor="ctr" lIns="0" rIns="0" tIns="0" bIns="0">
+          <a:bodyPr wrap="square" lIns="0" tIns="0" rIns="0" bIns="0" anchor="ctr">
             <a:spAutoFit/>
           </a:bodyPr>
           <a:lstStyle/>
@@ -17785,6 +15077,7 @@
           <a:lstStyle/>
           <a:p>
             <a:pPr algn="ctr"/>
+            <a:endParaRPr/>
           </a:p>
         </p:txBody>
       </p:sp>
@@ -17805,7 +15098,7 @@
           <a:noFill/>
         </p:spPr>
         <p:txBody>
-          <a:bodyPr wrap="square" anchor="ctr" lIns="0" rIns="0" tIns="0" bIns="0">
+          <a:bodyPr wrap="square" lIns="0" tIns="0" rIns="0" bIns="0" anchor="ctr">
             <a:spAutoFit/>
           </a:bodyPr>
           <a:lstStyle/>
@@ -17880,6 +15173,7 @@
           <a:lstStyle/>
           <a:p>
             <a:pPr algn="ctr"/>
+            <a:endParaRPr/>
           </a:p>
         </p:txBody>
       </p:sp>
@@ -17900,7 +15194,7 @@
           <a:noFill/>
         </p:spPr>
         <p:txBody>
-          <a:bodyPr wrap="square" anchor="ctr" lIns="0" rIns="0" tIns="0" bIns="0">
+          <a:bodyPr wrap="square" lIns="0" tIns="0" rIns="0" bIns="0" anchor="ctr">
             <a:spAutoFit/>
           </a:bodyPr>
           <a:lstStyle/>
@@ -17975,6 +15269,7 @@
           <a:lstStyle/>
           <a:p>
             <a:pPr algn="ctr"/>
+            <a:endParaRPr/>
           </a:p>
         </p:txBody>
       </p:sp>
@@ -17995,7 +15290,7 @@
           <a:noFill/>
         </p:spPr>
         <p:txBody>
-          <a:bodyPr wrap="square" anchor="ctr" lIns="0" rIns="0" tIns="0" bIns="0">
+          <a:bodyPr wrap="square" lIns="0" tIns="0" rIns="0" bIns="0" anchor="ctr">
             <a:spAutoFit/>
           </a:bodyPr>
           <a:lstStyle/>
@@ -18070,6 +15365,7 @@
           <a:lstStyle/>
           <a:p>
             <a:pPr algn="ctr"/>
+            <a:endParaRPr/>
           </a:p>
         </p:txBody>
       </p:sp>
@@ -18090,7 +15386,7 @@
           <a:noFill/>
         </p:spPr>
         <p:txBody>
-          <a:bodyPr wrap="square" anchor="ctr" lIns="0" rIns="0" tIns="0" bIns="0">
+          <a:bodyPr wrap="square" lIns="0" tIns="0" rIns="0" bIns="0" anchor="ctr">
             <a:spAutoFit/>
           </a:bodyPr>
           <a:lstStyle/>
@@ -18165,6 +15461,7 @@
           <a:lstStyle/>
           <a:p>
             <a:pPr algn="ctr"/>
+            <a:endParaRPr/>
           </a:p>
         </p:txBody>
       </p:sp>
@@ -18185,7 +15482,7 @@
           <a:noFill/>
         </p:spPr>
         <p:txBody>
-          <a:bodyPr wrap="square" anchor="ctr" lIns="0" rIns="0" tIns="0" bIns="0">
+          <a:bodyPr wrap="square" lIns="0" tIns="0" rIns="0" bIns="0" anchor="ctr">
             <a:spAutoFit/>
           </a:bodyPr>
           <a:lstStyle/>
@@ -18260,6 +15557,7 @@
           <a:lstStyle/>
           <a:p>
             <a:pPr algn="ctr"/>
+            <a:endParaRPr/>
           </a:p>
         </p:txBody>
       </p:sp>
@@ -18280,7 +15578,7 @@
           <a:noFill/>
         </p:spPr>
         <p:txBody>
-          <a:bodyPr wrap="square" anchor="ctr" lIns="0" rIns="0" tIns="0" bIns="0">
+          <a:bodyPr wrap="square" lIns="0" tIns="0" rIns="0" bIns="0" anchor="ctr">
             <a:spAutoFit/>
           </a:bodyPr>
           <a:lstStyle/>
@@ -18355,6 +15653,7 @@
           <a:lstStyle/>
           <a:p>
             <a:pPr algn="ctr"/>
+            <a:endParaRPr/>
           </a:p>
         </p:txBody>
       </p:sp>
@@ -18375,7 +15674,7 @@
           <a:noFill/>
         </p:spPr>
         <p:txBody>
-          <a:bodyPr wrap="square" anchor="ctr" lIns="0" rIns="0" tIns="0" bIns="0">
+          <a:bodyPr wrap="square" lIns="0" tIns="0" rIns="0" bIns="0" anchor="ctr">
             <a:spAutoFit/>
           </a:bodyPr>
           <a:lstStyle/>
@@ -18450,6 +15749,7 @@
           <a:lstStyle/>
           <a:p>
             <a:pPr algn="ctr"/>
+            <a:endParaRPr/>
           </a:p>
         </p:txBody>
       </p:sp>
@@ -18470,7 +15770,7 @@
           <a:noFill/>
         </p:spPr>
         <p:txBody>
-          <a:bodyPr wrap="square" anchor="ctr" lIns="0" rIns="0" tIns="0" bIns="0">
+          <a:bodyPr wrap="square" lIns="0" tIns="0" rIns="0" bIns="0" anchor="ctr">
             <a:spAutoFit/>
           </a:bodyPr>
           <a:lstStyle/>
@@ -18517,7 +15817,7 @@
           <a:noFill/>
         </p:spPr>
         <p:txBody>
-          <a:bodyPr wrap="square" anchor="t" lIns="0" rIns="0" tIns="0" bIns="0">
+          <a:bodyPr wrap="square" lIns="0" tIns="0" rIns="0" bIns="0" anchor="t">
             <a:spAutoFit/>
           </a:bodyPr>
           <a:lstStyle/>
@@ -18556,7 +15856,7 @@
 </file>
 
 <file path=ppt/slides/slide5.xml><?xml version="1.0" encoding="utf-8"?>
-<p:sld xmlns:a="http://schemas.openxmlformats.org/drawingml/2006/main" xmlns:p="http://schemas.openxmlformats.org/presentationml/2006/main" xmlns:r="http://schemas.openxmlformats.org/officeDocument/2006/relationships">
+<p:sld xmlns:a="http://schemas.openxmlformats.org/drawingml/2006/main" xmlns:r="http://schemas.openxmlformats.org/officeDocument/2006/relationships" xmlns:p="http://schemas.openxmlformats.org/presentationml/2006/main">
   <p:cSld>
     <p:bg>
       <p:bgPr>
@@ -18572,7 +15872,14 @@
         <p:cNvGrpSpPr/>
         <p:nvPr/>
       </p:nvGrpSpPr>
-      <p:grpSpPr/>
+      <p:grpSpPr>
+        <a:xfrm>
+          <a:off x="0" y="0"/>
+          <a:ext cx="0" cy="0"/>
+          <a:chOff x="0" y="0"/>
+          <a:chExt cx="0" cy="0"/>
+        </a:xfrm>
+      </p:grpSpPr>
       <p:sp>
         <p:nvSpPr>
           <p:cNvPr id="2" name="Rectangle 1"/>
@@ -18614,6 +15921,7 @@
           <a:lstStyle/>
           <a:p>
             <a:pPr algn="ctr"/>
+            <a:endParaRPr/>
           </a:p>
         </p:txBody>
       </p:sp>
@@ -18658,6 +15966,7 @@
           <a:lstStyle/>
           <a:p>
             <a:pPr algn="ctr"/>
+            <a:endParaRPr/>
           </a:p>
         </p:txBody>
       </p:sp>
@@ -18702,6 +16011,7 @@
           <a:lstStyle/>
           <a:p>
             <a:pPr algn="ctr"/>
+            <a:endParaRPr/>
           </a:p>
         </p:txBody>
       </p:sp>
@@ -18746,6 +16056,7 @@
           <a:lstStyle/>
           <a:p>
             <a:pPr algn="ctr"/>
+            <a:endParaRPr/>
           </a:p>
         </p:txBody>
       </p:sp>
@@ -18790,6 +16101,7 @@
           <a:lstStyle/>
           <a:p>
             <a:pPr algn="ctr"/>
+            <a:endParaRPr/>
           </a:p>
         </p:txBody>
       </p:sp>
@@ -18810,7 +16122,7 @@
           <a:noFill/>
         </p:spPr>
         <p:txBody>
-          <a:bodyPr wrap="square" anchor="t" lIns="0" rIns="0" tIns="0" bIns="0">
+          <a:bodyPr wrap="square" lIns="0" tIns="0" rIns="0" bIns="0" anchor="t">
             <a:spAutoFit/>
           </a:bodyPr>
           <a:lstStyle/>
@@ -18857,7 +16169,7 @@
           <a:noFill/>
         </p:spPr>
         <p:txBody>
-          <a:bodyPr wrap="square" anchor="t" lIns="0" rIns="0" tIns="0" bIns="0">
+          <a:bodyPr wrap="square" lIns="0" tIns="0" rIns="0" bIns="0" anchor="t">
             <a:spAutoFit/>
           </a:bodyPr>
           <a:lstStyle/>
@@ -18904,7 +16216,7 @@
           <a:noFill/>
         </p:spPr>
         <p:txBody>
-          <a:bodyPr wrap="square" anchor="t" lIns="0" rIns="0" tIns="0" bIns="0">
+          <a:bodyPr wrap="square" lIns="0" tIns="0" rIns="0" bIns="0" anchor="t">
             <a:spAutoFit/>
           </a:bodyPr>
           <a:lstStyle/>
@@ -18979,6 +16291,7 @@
           <a:lstStyle/>
           <a:p>
             <a:pPr algn="ctr"/>
+            <a:endParaRPr/>
           </a:p>
         </p:txBody>
       </p:sp>
@@ -19023,6 +16336,7 @@
           <a:lstStyle/>
           <a:p>
             <a:pPr algn="ctr"/>
+            <a:endParaRPr/>
           </a:p>
         </p:txBody>
       </p:sp>
@@ -19043,7 +16357,7 @@
           <a:noFill/>
         </p:spPr>
         <p:txBody>
-          <a:bodyPr wrap="square" anchor="t" lIns="0" rIns="0" tIns="0" bIns="0">
+          <a:bodyPr wrap="square" lIns="0" tIns="0" rIns="0" bIns="0" anchor="t">
             <a:spAutoFit/>
           </a:bodyPr>
           <a:lstStyle/>
@@ -19090,7 +16404,7 @@
           <a:noFill/>
         </p:spPr>
         <p:txBody>
-          <a:bodyPr wrap="square" anchor="t" lIns="0" rIns="0" tIns="0" bIns="0">
+          <a:bodyPr wrap="square" lIns="0" tIns="0" rIns="0" bIns="0" anchor="t">
             <a:spAutoFit/>
           </a:bodyPr>
           <a:lstStyle/>
@@ -19165,6 +16479,7 @@
           <a:lstStyle/>
           <a:p>
             <a:pPr algn="ctr"/>
+            <a:endParaRPr/>
           </a:p>
         </p:txBody>
       </p:sp>
@@ -19209,6 +16524,7 @@
           <a:lstStyle/>
           <a:p>
             <a:pPr algn="ctr"/>
+            <a:endParaRPr/>
           </a:p>
         </p:txBody>
       </p:sp>
@@ -19229,7 +16545,7 @@
           <a:noFill/>
         </p:spPr>
         <p:txBody>
-          <a:bodyPr wrap="square" anchor="t" lIns="0" rIns="0" tIns="0" bIns="0">
+          <a:bodyPr wrap="square" lIns="0" tIns="0" rIns="0" bIns="0" anchor="t">
             <a:spAutoFit/>
           </a:bodyPr>
           <a:lstStyle/>
@@ -19276,7 +16592,7 @@
           <a:noFill/>
         </p:spPr>
         <p:txBody>
-          <a:bodyPr wrap="square" anchor="t" lIns="0" rIns="0" tIns="0" bIns="0">
+          <a:bodyPr wrap="square" lIns="0" tIns="0" rIns="0" bIns="0" anchor="t">
             <a:spAutoFit/>
           </a:bodyPr>
           <a:lstStyle/>
@@ -19351,6 +16667,7 @@
           <a:lstStyle/>
           <a:p>
             <a:pPr algn="ctr"/>
+            <a:endParaRPr/>
           </a:p>
         </p:txBody>
       </p:sp>
@@ -19395,6 +16712,7 @@
           <a:lstStyle/>
           <a:p>
             <a:pPr algn="ctr"/>
+            <a:endParaRPr/>
           </a:p>
         </p:txBody>
       </p:sp>
@@ -19415,7 +16733,7 @@
           <a:noFill/>
         </p:spPr>
         <p:txBody>
-          <a:bodyPr wrap="square" anchor="t" lIns="0" rIns="0" tIns="0" bIns="0">
+          <a:bodyPr wrap="square" lIns="0" tIns="0" rIns="0" bIns="0" anchor="t">
             <a:spAutoFit/>
           </a:bodyPr>
           <a:lstStyle/>
@@ -19462,7 +16780,7 @@
           <a:noFill/>
         </p:spPr>
         <p:txBody>
-          <a:bodyPr wrap="square" anchor="t" lIns="0" rIns="0" tIns="0" bIns="0">
+          <a:bodyPr wrap="square" lIns="0" tIns="0" rIns="0" bIns="0" anchor="t">
             <a:spAutoFit/>
           </a:bodyPr>
           <a:lstStyle/>
@@ -19537,6 +16855,7 @@
           <a:lstStyle/>
           <a:p>
             <a:pPr algn="ctr"/>
+            <a:endParaRPr/>
           </a:p>
         </p:txBody>
       </p:sp>
@@ -19581,6 +16900,7 @@
           <a:lstStyle/>
           <a:p>
             <a:pPr algn="ctr"/>
+            <a:endParaRPr/>
           </a:p>
         </p:txBody>
       </p:sp>
@@ -19601,7 +16921,7 @@
           <a:noFill/>
         </p:spPr>
         <p:txBody>
-          <a:bodyPr wrap="square" anchor="t" lIns="0" rIns="0" tIns="0" bIns="0">
+          <a:bodyPr wrap="square" lIns="0" tIns="0" rIns="0" bIns="0" anchor="t">
             <a:spAutoFit/>
           </a:bodyPr>
           <a:lstStyle/>
@@ -19648,7 +16968,7 @@
           <a:noFill/>
         </p:spPr>
         <p:txBody>
-          <a:bodyPr wrap="square" anchor="t" lIns="0" rIns="0" tIns="0" bIns="0">
+          <a:bodyPr wrap="square" lIns="0" tIns="0" rIns="0" bIns="0" anchor="t">
             <a:spAutoFit/>
           </a:bodyPr>
           <a:lstStyle/>
@@ -19723,6 +17043,7 @@
           <a:lstStyle/>
           <a:p>
             <a:pPr algn="ctr"/>
+            <a:endParaRPr/>
           </a:p>
         </p:txBody>
       </p:sp>
@@ -19767,6 +17088,7 @@
           <a:lstStyle/>
           <a:p>
             <a:pPr algn="ctr"/>
+            <a:endParaRPr/>
           </a:p>
         </p:txBody>
       </p:sp>
@@ -19787,7 +17109,7 @@
           <a:noFill/>
         </p:spPr>
         <p:txBody>
-          <a:bodyPr wrap="square" anchor="t" lIns="0" rIns="0" tIns="0" bIns="0">
+          <a:bodyPr wrap="square" lIns="0" tIns="0" rIns="0" bIns="0" anchor="t">
             <a:spAutoFit/>
           </a:bodyPr>
           <a:lstStyle/>
@@ -19834,7 +17156,7 @@
           <a:noFill/>
         </p:spPr>
         <p:txBody>
-          <a:bodyPr wrap="square" anchor="t" lIns="0" rIns="0" tIns="0" bIns="0">
+          <a:bodyPr wrap="square" lIns="0" tIns="0" rIns="0" bIns="0" anchor="t">
             <a:spAutoFit/>
           </a:bodyPr>
           <a:lstStyle/>
@@ -19909,6 +17231,7 @@
           <a:lstStyle/>
           <a:p>
             <a:pPr algn="ctr"/>
+            <a:endParaRPr/>
           </a:p>
         </p:txBody>
       </p:sp>
@@ -19953,6 +17276,7 @@
           <a:lstStyle/>
           <a:p>
             <a:pPr algn="ctr"/>
+            <a:endParaRPr/>
           </a:p>
         </p:txBody>
       </p:sp>
@@ -19973,7 +17297,7 @@
           <a:noFill/>
         </p:spPr>
         <p:txBody>
-          <a:bodyPr wrap="square" anchor="t" lIns="0" rIns="0" tIns="0" bIns="0">
+          <a:bodyPr wrap="square" lIns="0" tIns="0" rIns="0" bIns="0" anchor="t">
             <a:spAutoFit/>
           </a:bodyPr>
           <a:lstStyle/>
@@ -19998,7 +17322,7 @@
                 <a:ea typeface="Microsoft JhengHei"/>
                 <a:cs typeface="Microsoft JhengHei"/>
               </a:rPr>
-              <a:t>1,104</a:t>
+              <a:t>1,176</a:t>
             </a:r>
           </a:p>
         </p:txBody>
@@ -20020,7 +17344,7 @@
           <a:noFill/>
         </p:spPr>
         <p:txBody>
-          <a:bodyPr wrap="square" anchor="t" lIns="0" rIns="0" tIns="0" bIns="0">
+          <a:bodyPr wrap="square" lIns="0" tIns="0" rIns="0" bIns="0" anchor="t">
             <a:spAutoFit/>
           </a:bodyPr>
           <a:lstStyle/>
@@ -20095,6 +17419,7 @@
           <a:lstStyle/>
           <a:p>
             <a:pPr algn="ctr"/>
+            <a:endParaRPr/>
           </a:p>
         </p:txBody>
       </p:sp>
@@ -20139,6 +17464,7 @@
           <a:lstStyle/>
           <a:p>
             <a:pPr algn="ctr"/>
+            <a:endParaRPr/>
           </a:p>
         </p:txBody>
       </p:sp>
@@ -20159,7 +17485,7 @@
           <a:noFill/>
         </p:spPr>
         <p:txBody>
-          <a:bodyPr wrap="square" anchor="t" lIns="0" rIns="0" tIns="0" bIns="0">
+          <a:bodyPr wrap="square" lIns="0" tIns="0" rIns="0" bIns="0" anchor="t">
             <a:spAutoFit/>
           </a:bodyPr>
           <a:lstStyle/>
@@ -20206,7 +17532,7 @@
           <a:noFill/>
         </p:spPr>
         <p:txBody>
-          <a:bodyPr wrap="square" anchor="t" lIns="0" rIns="0" tIns="0" bIns="0">
+          <a:bodyPr wrap="square" lIns="0" tIns="0" rIns="0" bIns="0" anchor="t">
             <a:spAutoFit/>
           </a:bodyPr>
           <a:lstStyle/>
@@ -20253,7 +17579,7 @@
           <a:noFill/>
         </p:spPr>
         <p:txBody>
-          <a:bodyPr wrap="square" anchor="t" lIns="0" rIns="0" tIns="0" bIns="0">
+          <a:bodyPr wrap="square" lIns="0" tIns="0" rIns="0" bIns="0" anchor="t">
             <a:spAutoFit/>
           </a:bodyPr>
           <a:lstStyle/>
@@ -20300,7 +17626,7 @@
           <a:noFill/>
         </p:spPr>
         <p:txBody>
-          <a:bodyPr wrap="square" anchor="t" lIns="0" rIns="0" tIns="0" bIns="0">
+          <a:bodyPr wrap="square" lIns="0" tIns="0" rIns="0" bIns="0" anchor="t">
             <a:spAutoFit/>
           </a:bodyPr>
           <a:lstStyle/>
@@ -20339,7 +17665,7 @@
 </file>
 
 <file path=ppt/slides/slide6.xml><?xml version="1.0" encoding="utf-8"?>
-<p:sld xmlns:a="http://schemas.openxmlformats.org/drawingml/2006/main" xmlns:p="http://schemas.openxmlformats.org/presentationml/2006/main" xmlns:r="http://schemas.openxmlformats.org/officeDocument/2006/relationships">
+<p:sld xmlns:a="http://schemas.openxmlformats.org/drawingml/2006/main" xmlns:r="http://schemas.openxmlformats.org/officeDocument/2006/relationships" xmlns:p="http://schemas.openxmlformats.org/presentationml/2006/main">
   <p:cSld>
     <p:bg>
       <p:bgPr>
@@ -20355,227 +17681,14 @@
         <p:cNvGrpSpPr/>
         <p:nvPr/>
       </p:nvGrpSpPr>
-      <p:grpSpPr/>
-      <p:sp>
-        <p:nvSpPr>
-          <p:cNvPr id="2" name="Rectangle 1"/>
-          <p:cNvSpPr/>
-          <p:nvPr/>
-        </p:nvSpPr>
-        <p:spPr>
-          <a:xfrm rot="1080000">
-            <a:off x="10972800" y="-548640"/>
-            <a:ext cx="22860" cy="2926080"/>
-          </a:xfrm>
-          <a:prstGeom prst="rect">
-            <a:avLst/>
-          </a:prstGeom>
-          <a:solidFill>
-            <a:srgbClr val="F3D9D2"/>
-          </a:solidFill>
-          <a:ln>
-            <a:noFill/>
-          </a:ln>
-          <a:effectLst/>
-        </p:spPr>
-        <p:style>
-          <a:lnRef idx="1">
-            <a:schemeClr val="accent1"/>
-          </a:lnRef>
-          <a:fillRef idx="3">
-            <a:schemeClr val="accent1"/>
-          </a:fillRef>
-          <a:effectRef idx="2">
-            <a:schemeClr val="accent1"/>
-          </a:effectRef>
-          <a:fontRef idx="minor">
-            <a:schemeClr val="lt1"/>
-          </a:fontRef>
-        </p:style>
-        <p:txBody>
-          <a:bodyPr rtlCol="0" anchor="ctr"/>
-          <a:lstStyle/>
-          <a:p>
-            <a:pPr algn="ctr"/>
-          </a:p>
-        </p:txBody>
-      </p:sp>
-      <p:sp>
-        <p:nvSpPr>
-          <p:cNvPr id="3" name="Rectangle 2"/>
-          <p:cNvSpPr/>
-          <p:nvPr/>
-        </p:nvSpPr>
-        <p:spPr>
-          <a:xfrm rot="1800000">
-            <a:off x="10991088" y="-548640"/>
-            <a:ext cx="22860" cy="3063240"/>
-          </a:xfrm>
-          <a:prstGeom prst="rect">
-            <a:avLst/>
-          </a:prstGeom>
-          <a:solidFill>
-            <a:srgbClr val="F3D9D2"/>
-          </a:solidFill>
-          <a:ln>
-            <a:noFill/>
-          </a:ln>
-          <a:effectLst/>
-        </p:spPr>
-        <p:style>
-          <a:lnRef idx="1">
-            <a:schemeClr val="accent1"/>
-          </a:lnRef>
-          <a:fillRef idx="3">
-            <a:schemeClr val="accent1"/>
-          </a:fillRef>
-          <a:effectRef idx="2">
-            <a:schemeClr val="accent1"/>
-          </a:effectRef>
-          <a:fontRef idx="minor">
-            <a:schemeClr val="lt1"/>
-          </a:fontRef>
-        </p:style>
-        <p:txBody>
-          <a:bodyPr rtlCol="0" anchor="ctr"/>
-          <a:lstStyle/>
-          <a:p>
-            <a:pPr algn="ctr"/>
-          </a:p>
-        </p:txBody>
-      </p:sp>
-      <p:sp>
-        <p:nvSpPr>
-          <p:cNvPr id="4" name="Rectangle 3"/>
-          <p:cNvSpPr/>
-          <p:nvPr/>
-        </p:nvSpPr>
-        <p:spPr>
-          <a:xfrm rot="2520000">
-            <a:off x="11009376" y="-548640"/>
-            <a:ext cx="22860" cy="3200400"/>
-          </a:xfrm>
-          <a:prstGeom prst="rect">
-            <a:avLst/>
-          </a:prstGeom>
-          <a:solidFill>
-            <a:srgbClr val="F3D9D2"/>
-          </a:solidFill>
-          <a:ln>
-            <a:noFill/>
-          </a:ln>
-          <a:effectLst/>
-        </p:spPr>
-        <p:style>
-          <a:lnRef idx="1">
-            <a:schemeClr val="accent1"/>
-          </a:lnRef>
-          <a:fillRef idx="3">
-            <a:schemeClr val="accent1"/>
-          </a:fillRef>
-          <a:effectRef idx="2">
-            <a:schemeClr val="accent1"/>
-          </a:effectRef>
-          <a:fontRef idx="minor">
-            <a:schemeClr val="lt1"/>
-          </a:fontRef>
-        </p:style>
-        <p:txBody>
-          <a:bodyPr rtlCol="0" anchor="ctr"/>
-          <a:lstStyle/>
-          <a:p>
-            <a:pPr algn="ctr"/>
-          </a:p>
-        </p:txBody>
-      </p:sp>
-      <p:sp>
-        <p:nvSpPr>
-          <p:cNvPr id="5" name="Rectangle 4"/>
-          <p:cNvSpPr/>
-          <p:nvPr/>
-        </p:nvSpPr>
-        <p:spPr>
-          <a:xfrm rot="3240000">
-            <a:off x="11027664" y="-548640"/>
-            <a:ext cx="22860" cy="3337560"/>
-          </a:xfrm>
-          <a:prstGeom prst="rect">
-            <a:avLst/>
-          </a:prstGeom>
-          <a:solidFill>
-            <a:srgbClr val="F3D9D2"/>
-          </a:solidFill>
-          <a:ln>
-            <a:noFill/>
-          </a:ln>
-          <a:effectLst/>
-        </p:spPr>
-        <p:style>
-          <a:lnRef idx="1">
-            <a:schemeClr val="accent1"/>
-          </a:lnRef>
-          <a:fillRef idx="3">
-            <a:schemeClr val="accent1"/>
-          </a:fillRef>
-          <a:effectRef idx="2">
-            <a:schemeClr val="accent1"/>
-          </a:effectRef>
-          <a:fontRef idx="minor">
-            <a:schemeClr val="lt1"/>
-          </a:fontRef>
-        </p:style>
-        <p:txBody>
-          <a:bodyPr rtlCol="0" anchor="ctr"/>
-          <a:lstStyle/>
-          <a:p>
-            <a:pPr algn="ctr"/>
-          </a:p>
-        </p:txBody>
-      </p:sp>
-      <p:sp>
-        <p:nvSpPr>
-          <p:cNvPr id="6" name="Rectangle 5"/>
-          <p:cNvSpPr/>
-          <p:nvPr/>
-        </p:nvSpPr>
-        <p:spPr>
-          <a:xfrm rot="3960000">
-            <a:off x="11045952" y="-548640"/>
-            <a:ext cx="22860" cy="3474720"/>
-          </a:xfrm>
-          <a:prstGeom prst="rect">
-            <a:avLst/>
-          </a:prstGeom>
-          <a:solidFill>
-            <a:srgbClr val="F3D9D2"/>
-          </a:solidFill>
-          <a:ln>
-            <a:noFill/>
-          </a:ln>
-          <a:effectLst/>
-        </p:spPr>
-        <p:style>
-          <a:lnRef idx="1">
-            <a:schemeClr val="accent1"/>
-          </a:lnRef>
-          <a:fillRef idx="3">
-            <a:schemeClr val="accent1"/>
-          </a:fillRef>
-          <a:effectRef idx="2">
-            <a:schemeClr val="accent1"/>
-          </a:effectRef>
-          <a:fontRef idx="minor">
-            <a:schemeClr val="lt1"/>
-          </a:fontRef>
-        </p:style>
-        <p:txBody>
-          <a:bodyPr rtlCol="0" anchor="ctr"/>
-          <a:lstStyle/>
-          <a:p>
-            <a:pPr algn="ctr"/>
-          </a:p>
-        </p:txBody>
-      </p:sp>
+      <p:grpSpPr>
+        <a:xfrm>
+          <a:off x="0" y="0"/>
+          <a:ext cx="0" cy="0"/>
+          <a:chOff x="0" y="0"/>
+          <a:chExt cx="0" cy="0"/>
+        </a:xfrm>
+      </p:grpSpPr>
       <p:sp>
         <p:nvSpPr>
           <p:cNvPr id="7" name="TextBox 6"/>
@@ -20593,7 +17706,7 @@
           <a:noFill/>
         </p:spPr>
         <p:txBody>
-          <a:bodyPr wrap="square" anchor="t" lIns="0" rIns="0" tIns="0" bIns="0">
+          <a:bodyPr wrap="square" lIns="0" tIns="0" rIns="0" bIns="0" anchor="t">
             <a:spAutoFit/>
           </a:bodyPr>
           <a:lstStyle/>
@@ -20640,7 +17753,7 @@
           <a:noFill/>
         </p:spPr>
         <p:txBody>
-          <a:bodyPr wrap="square" anchor="t" lIns="0" rIns="0" tIns="0" bIns="0">
+          <a:bodyPr wrap="square" lIns="0" tIns="0" rIns="0" bIns="0" anchor="t">
             <a:spAutoFit/>
           </a:bodyPr>
           <a:lstStyle/>
@@ -20687,7 +17800,7 @@
           <a:noFill/>
         </p:spPr>
         <p:txBody>
-          <a:bodyPr wrap="square" anchor="t" lIns="0" rIns="0" tIns="0" bIns="0">
+          <a:bodyPr wrap="square" lIns="0" tIns="0" rIns="0" bIns="0" anchor="t">
             <a:spAutoFit/>
           </a:bodyPr>
           <a:lstStyle/>
@@ -20762,6 +17875,7 @@
           <a:lstStyle/>
           <a:p>
             <a:pPr algn="ctr"/>
+            <a:endParaRPr/>
           </a:p>
         </p:txBody>
       </p:sp>
@@ -20782,7 +17896,7 @@
           <a:noFill/>
         </p:spPr>
         <p:txBody>
-          <a:bodyPr wrap="square" anchor="t" lIns="0" rIns="0" tIns="0" bIns="0">
+          <a:bodyPr wrap="square" lIns="0" tIns="0" rIns="0" bIns="0" anchor="t">
             <a:spAutoFit/>
           </a:bodyPr>
           <a:lstStyle/>
@@ -20881,6 +17995,7 @@
           <a:lstStyle/>
           <a:p>
             <a:pPr algn="ctr"/>
+            <a:endParaRPr/>
           </a:p>
         </p:txBody>
       </p:sp>
@@ -20901,7 +18016,7 @@
           <a:noFill/>
         </p:spPr>
         <p:txBody>
-          <a:bodyPr wrap="square" anchor="t" lIns="0" rIns="0" tIns="0" bIns="0">
+          <a:bodyPr wrap="square" lIns="0" tIns="0" rIns="0" bIns="0" anchor="t">
             <a:spAutoFit/>
           </a:bodyPr>
           <a:lstStyle/>
@@ -20998,6 +18113,7 @@
           <a:lstStyle/>
           <a:p>
             <a:pPr algn="ctr"/>
+            <a:endParaRPr/>
           </a:p>
         </p:txBody>
       </p:sp>
@@ -21018,7 +18134,7 @@
           <a:noFill/>
         </p:spPr>
         <p:txBody>
-          <a:bodyPr wrap="square" anchor="ctr" lIns="0" rIns="0" tIns="0" bIns="0">
+          <a:bodyPr wrap="square" lIns="0" tIns="0" rIns="0" bIns="0" anchor="ctr">
             <a:spAutoFit/>
           </a:bodyPr>
           <a:lstStyle/>
@@ -21115,6 +18231,7 @@
           <a:lstStyle/>
           <a:p>
             <a:pPr algn="ctr"/>
+            <a:endParaRPr/>
           </a:p>
         </p:txBody>
       </p:sp>
@@ -21135,7 +18252,7 @@
           <a:noFill/>
         </p:spPr>
         <p:txBody>
-          <a:bodyPr wrap="square" anchor="ctr" lIns="0" rIns="0" tIns="0" bIns="0">
+          <a:bodyPr wrap="square" lIns="0" tIns="0" rIns="0" bIns="0" anchor="ctr">
             <a:spAutoFit/>
           </a:bodyPr>
           <a:lstStyle/>
@@ -21234,6 +18351,7 @@
           <a:lstStyle/>
           <a:p>
             <a:pPr algn="ctr"/>
+            <a:endParaRPr/>
           </a:p>
         </p:txBody>
       </p:sp>
@@ -21254,7 +18372,7 @@
           <a:noFill/>
         </p:spPr>
         <p:txBody>
-          <a:bodyPr wrap="square" anchor="ctr" lIns="0" rIns="0" tIns="0" bIns="0">
+          <a:bodyPr wrap="square" lIns="0" tIns="0" rIns="0" bIns="0" anchor="ctr">
             <a:spAutoFit/>
           </a:bodyPr>
           <a:lstStyle/>
@@ -21329,6 +18447,7 @@
           <a:lstStyle/>
           <a:p>
             <a:pPr algn="ctr"/>
+            <a:endParaRPr/>
           </a:p>
         </p:txBody>
       </p:sp>
@@ -21349,7 +18468,7 @@
           <a:noFill/>
         </p:spPr>
         <p:txBody>
-          <a:bodyPr wrap="square" anchor="ctr" lIns="0" rIns="0" tIns="0" bIns="0">
+          <a:bodyPr wrap="square" lIns="0" tIns="0" rIns="0" bIns="0" anchor="ctr">
             <a:spAutoFit/>
           </a:bodyPr>
           <a:lstStyle/>
@@ -21424,6 +18543,7 @@
           <a:lstStyle/>
           <a:p>
             <a:pPr algn="ctr"/>
+            <a:endParaRPr/>
           </a:p>
         </p:txBody>
       </p:sp>
@@ -21444,7 +18564,7 @@
           <a:noFill/>
         </p:spPr>
         <p:txBody>
-          <a:bodyPr wrap="square" anchor="ctr" lIns="0" rIns="0" tIns="0" bIns="0">
+          <a:bodyPr wrap="square" lIns="0" tIns="0" rIns="0" bIns="0" anchor="ctr">
             <a:spAutoFit/>
           </a:bodyPr>
           <a:lstStyle/>
@@ -21519,6 +18639,7 @@
           <a:lstStyle/>
           <a:p>
             <a:pPr algn="ctr"/>
+            <a:endParaRPr/>
           </a:p>
         </p:txBody>
       </p:sp>
@@ -21539,7 +18660,7 @@
           <a:noFill/>
         </p:spPr>
         <p:txBody>
-          <a:bodyPr wrap="square" anchor="ctr" lIns="0" rIns="0" tIns="0" bIns="0">
+          <a:bodyPr wrap="square" lIns="0" tIns="0" rIns="0" bIns="0" anchor="ctr">
             <a:spAutoFit/>
           </a:bodyPr>
           <a:lstStyle/>
@@ -21614,6 +18735,7 @@
           <a:lstStyle/>
           <a:p>
             <a:pPr algn="ctr"/>
+            <a:endParaRPr/>
           </a:p>
         </p:txBody>
       </p:sp>
@@ -21634,7 +18756,7 @@
           <a:noFill/>
         </p:spPr>
         <p:txBody>
-          <a:bodyPr wrap="square" anchor="ctr" lIns="0" rIns="0" tIns="0" bIns="0">
+          <a:bodyPr wrap="square" lIns="0" tIns="0" rIns="0" bIns="0" anchor="ctr">
             <a:spAutoFit/>
           </a:bodyPr>
           <a:lstStyle/>
@@ -21709,6 +18831,7 @@
           <a:lstStyle/>
           <a:p>
             <a:pPr algn="ctr"/>
+            <a:endParaRPr/>
           </a:p>
         </p:txBody>
       </p:sp>
@@ -21729,7 +18852,7 @@
           <a:noFill/>
         </p:spPr>
         <p:txBody>
-          <a:bodyPr wrap="square" anchor="ctr" lIns="0" rIns="0" tIns="0" bIns="0">
+          <a:bodyPr wrap="square" lIns="0" tIns="0" rIns="0" bIns="0" anchor="ctr">
             <a:spAutoFit/>
           </a:bodyPr>
           <a:lstStyle/>
@@ -21802,6 +18925,7 @@
           <a:lstStyle/>
           <a:p>
             <a:pPr algn="ctr"/>
+            <a:endParaRPr/>
           </a:p>
         </p:txBody>
       </p:sp>
@@ -21822,7 +18946,7 @@
           <a:noFill/>
         </p:spPr>
         <p:txBody>
-          <a:bodyPr wrap="square" anchor="ctr" lIns="0" rIns="0" tIns="0" bIns="0">
+          <a:bodyPr wrap="square" lIns="0" tIns="0" rIns="0" bIns="0" anchor="ctr">
             <a:spAutoFit/>
           </a:bodyPr>
           <a:lstStyle/>
@@ -21895,6 +19019,7 @@
           <a:lstStyle/>
           <a:p>
             <a:pPr algn="ctr"/>
+            <a:endParaRPr/>
           </a:p>
         </p:txBody>
       </p:sp>
@@ -21915,7 +19040,7 @@
           <a:noFill/>
         </p:spPr>
         <p:txBody>
-          <a:bodyPr wrap="square" anchor="ctr" lIns="0" rIns="0" tIns="0" bIns="0">
+          <a:bodyPr wrap="square" lIns="0" tIns="0" rIns="0" bIns="0" anchor="ctr">
             <a:spAutoFit/>
           </a:bodyPr>
           <a:lstStyle/>
@@ -21988,6 +19113,7 @@
           <a:lstStyle/>
           <a:p>
             <a:pPr algn="ctr"/>
+            <a:endParaRPr/>
           </a:p>
         </p:txBody>
       </p:sp>
@@ -22008,7 +19134,7 @@
           <a:noFill/>
         </p:spPr>
         <p:txBody>
-          <a:bodyPr wrap="square" anchor="ctr" lIns="0" rIns="0" tIns="0" bIns="0">
+          <a:bodyPr wrap="square" lIns="0" tIns="0" rIns="0" bIns="0" anchor="ctr">
             <a:spAutoFit/>
           </a:bodyPr>
           <a:lstStyle/>
@@ -22081,6 +19207,7 @@
           <a:lstStyle/>
           <a:p>
             <a:pPr algn="ctr"/>
+            <a:endParaRPr/>
           </a:p>
         </p:txBody>
       </p:sp>
@@ -22101,7 +19228,7 @@
           <a:noFill/>
         </p:spPr>
         <p:txBody>
-          <a:bodyPr wrap="square" anchor="ctr" lIns="0" rIns="0" tIns="0" bIns="0">
+          <a:bodyPr wrap="square" lIns="0" tIns="0" rIns="0" bIns="0" anchor="ctr">
             <a:spAutoFit/>
           </a:bodyPr>
           <a:lstStyle/>
@@ -22148,7 +19275,7 @@
           <a:noFill/>
         </p:spPr>
         <p:txBody>
-          <a:bodyPr wrap="square" anchor="t" lIns="0" rIns="0" tIns="0" bIns="0">
+          <a:bodyPr wrap="square" lIns="0" tIns="0" rIns="0" bIns="0" anchor="t">
             <a:spAutoFit/>
           </a:bodyPr>
           <a:lstStyle/>
@@ -22195,7 +19322,7 @@
           <a:noFill/>
         </p:spPr>
         <p:txBody>
-          <a:bodyPr wrap="square" anchor="t" lIns="0" rIns="0" tIns="0" bIns="0">
+          <a:bodyPr wrap="square" lIns="0" tIns="0" rIns="0" bIns="0" anchor="t">
             <a:spAutoFit/>
           </a:bodyPr>
           <a:lstStyle/>
@@ -22234,7 +19361,7 @@
 </file>
 
 <file path=ppt/slides/slide7.xml><?xml version="1.0" encoding="utf-8"?>
-<p:sld xmlns:a="http://schemas.openxmlformats.org/drawingml/2006/main" xmlns:p="http://schemas.openxmlformats.org/presentationml/2006/main" xmlns:r="http://schemas.openxmlformats.org/officeDocument/2006/relationships">
+<p:sld xmlns:a="http://schemas.openxmlformats.org/drawingml/2006/main" xmlns:r="http://schemas.openxmlformats.org/officeDocument/2006/relationships" xmlns:p="http://schemas.openxmlformats.org/presentationml/2006/main">
   <p:cSld>
     <p:bg>
       <p:bgPr>
@@ -22250,227 +19377,14 @@
         <p:cNvGrpSpPr/>
         <p:nvPr/>
       </p:nvGrpSpPr>
-      <p:grpSpPr/>
-      <p:sp>
-        <p:nvSpPr>
-          <p:cNvPr id="2" name="Rectangle 1"/>
-          <p:cNvSpPr/>
-          <p:nvPr/>
-        </p:nvSpPr>
-        <p:spPr>
-          <a:xfrm rot="1080000">
-            <a:off x="10972800" y="-548640"/>
-            <a:ext cx="22860" cy="2926080"/>
-          </a:xfrm>
-          <a:prstGeom prst="rect">
-            <a:avLst/>
-          </a:prstGeom>
-          <a:solidFill>
-            <a:srgbClr val="F3D9D2"/>
-          </a:solidFill>
-          <a:ln>
-            <a:noFill/>
-          </a:ln>
-          <a:effectLst/>
-        </p:spPr>
-        <p:style>
-          <a:lnRef idx="1">
-            <a:schemeClr val="accent1"/>
-          </a:lnRef>
-          <a:fillRef idx="3">
-            <a:schemeClr val="accent1"/>
-          </a:fillRef>
-          <a:effectRef idx="2">
-            <a:schemeClr val="accent1"/>
-          </a:effectRef>
-          <a:fontRef idx="minor">
-            <a:schemeClr val="lt1"/>
-          </a:fontRef>
-        </p:style>
-        <p:txBody>
-          <a:bodyPr rtlCol="0" anchor="ctr"/>
-          <a:lstStyle/>
-          <a:p>
-            <a:pPr algn="ctr"/>
-          </a:p>
-        </p:txBody>
-      </p:sp>
-      <p:sp>
-        <p:nvSpPr>
-          <p:cNvPr id="3" name="Rectangle 2"/>
-          <p:cNvSpPr/>
-          <p:nvPr/>
-        </p:nvSpPr>
-        <p:spPr>
-          <a:xfrm rot="1800000">
-            <a:off x="10991088" y="-548640"/>
-            <a:ext cx="22860" cy="3063240"/>
-          </a:xfrm>
-          <a:prstGeom prst="rect">
-            <a:avLst/>
-          </a:prstGeom>
-          <a:solidFill>
-            <a:srgbClr val="F3D9D2"/>
-          </a:solidFill>
-          <a:ln>
-            <a:noFill/>
-          </a:ln>
-          <a:effectLst/>
-        </p:spPr>
-        <p:style>
-          <a:lnRef idx="1">
-            <a:schemeClr val="accent1"/>
-          </a:lnRef>
-          <a:fillRef idx="3">
-            <a:schemeClr val="accent1"/>
-          </a:fillRef>
-          <a:effectRef idx="2">
-            <a:schemeClr val="accent1"/>
-          </a:effectRef>
-          <a:fontRef idx="minor">
-            <a:schemeClr val="lt1"/>
-          </a:fontRef>
-        </p:style>
-        <p:txBody>
-          <a:bodyPr rtlCol="0" anchor="ctr"/>
-          <a:lstStyle/>
-          <a:p>
-            <a:pPr algn="ctr"/>
-          </a:p>
-        </p:txBody>
-      </p:sp>
-      <p:sp>
-        <p:nvSpPr>
-          <p:cNvPr id="4" name="Rectangle 3"/>
-          <p:cNvSpPr/>
-          <p:nvPr/>
-        </p:nvSpPr>
-        <p:spPr>
-          <a:xfrm rot="2520000">
-            <a:off x="11009376" y="-548640"/>
-            <a:ext cx="22860" cy="3200400"/>
-          </a:xfrm>
-          <a:prstGeom prst="rect">
-            <a:avLst/>
-          </a:prstGeom>
-          <a:solidFill>
-            <a:srgbClr val="F3D9D2"/>
-          </a:solidFill>
-          <a:ln>
-            <a:noFill/>
-          </a:ln>
-          <a:effectLst/>
-        </p:spPr>
-        <p:style>
-          <a:lnRef idx="1">
-            <a:schemeClr val="accent1"/>
-          </a:lnRef>
-          <a:fillRef idx="3">
-            <a:schemeClr val="accent1"/>
-          </a:fillRef>
-          <a:effectRef idx="2">
-            <a:schemeClr val="accent1"/>
-          </a:effectRef>
-          <a:fontRef idx="minor">
-            <a:schemeClr val="lt1"/>
-          </a:fontRef>
-        </p:style>
-        <p:txBody>
-          <a:bodyPr rtlCol="0" anchor="ctr"/>
-          <a:lstStyle/>
-          <a:p>
-            <a:pPr algn="ctr"/>
-          </a:p>
-        </p:txBody>
-      </p:sp>
-      <p:sp>
-        <p:nvSpPr>
-          <p:cNvPr id="5" name="Rectangle 4"/>
-          <p:cNvSpPr/>
-          <p:nvPr/>
-        </p:nvSpPr>
-        <p:spPr>
-          <a:xfrm rot="3240000">
-            <a:off x="11027664" y="-548640"/>
-            <a:ext cx="22860" cy="3337560"/>
-          </a:xfrm>
-          <a:prstGeom prst="rect">
-            <a:avLst/>
-          </a:prstGeom>
-          <a:solidFill>
-            <a:srgbClr val="F3D9D2"/>
-          </a:solidFill>
-          <a:ln>
-            <a:noFill/>
-          </a:ln>
-          <a:effectLst/>
-        </p:spPr>
-        <p:style>
-          <a:lnRef idx="1">
-            <a:schemeClr val="accent1"/>
-          </a:lnRef>
-          <a:fillRef idx="3">
-            <a:schemeClr val="accent1"/>
-          </a:fillRef>
-          <a:effectRef idx="2">
-            <a:schemeClr val="accent1"/>
-          </a:effectRef>
-          <a:fontRef idx="minor">
-            <a:schemeClr val="lt1"/>
-          </a:fontRef>
-        </p:style>
-        <p:txBody>
-          <a:bodyPr rtlCol="0" anchor="ctr"/>
-          <a:lstStyle/>
-          <a:p>
-            <a:pPr algn="ctr"/>
-          </a:p>
-        </p:txBody>
-      </p:sp>
-      <p:sp>
-        <p:nvSpPr>
-          <p:cNvPr id="6" name="Rectangle 5"/>
-          <p:cNvSpPr/>
-          <p:nvPr/>
-        </p:nvSpPr>
-        <p:spPr>
-          <a:xfrm rot="3960000">
-            <a:off x="11045952" y="-548640"/>
-            <a:ext cx="22860" cy="3474720"/>
-          </a:xfrm>
-          <a:prstGeom prst="rect">
-            <a:avLst/>
-          </a:prstGeom>
-          <a:solidFill>
-            <a:srgbClr val="F3D9D2"/>
-          </a:solidFill>
-          <a:ln>
-            <a:noFill/>
-          </a:ln>
-          <a:effectLst/>
-        </p:spPr>
-        <p:style>
-          <a:lnRef idx="1">
-            <a:schemeClr val="accent1"/>
-          </a:lnRef>
-          <a:fillRef idx="3">
-            <a:schemeClr val="accent1"/>
-          </a:fillRef>
-          <a:effectRef idx="2">
-            <a:schemeClr val="accent1"/>
-          </a:effectRef>
-          <a:fontRef idx="minor">
-            <a:schemeClr val="lt1"/>
-          </a:fontRef>
-        </p:style>
-        <p:txBody>
-          <a:bodyPr rtlCol="0" anchor="ctr"/>
-          <a:lstStyle/>
-          <a:p>
-            <a:pPr algn="ctr"/>
-          </a:p>
-        </p:txBody>
-      </p:sp>
+      <p:grpSpPr>
+        <a:xfrm>
+          <a:off x="0" y="0"/>
+          <a:ext cx="0" cy="0"/>
+          <a:chOff x="0" y="0"/>
+          <a:chExt cx="0" cy="0"/>
+        </a:xfrm>
+      </p:grpSpPr>
       <p:sp>
         <p:nvSpPr>
           <p:cNvPr id="7" name="TextBox 6"/>
@@ -22488,7 +19402,7 @@
           <a:noFill/>
         </p:spPr>
         <p:txBody>
-          <a:bodyPr wrap="square" anchor="t" lIns="0" rIns="0" tIns="0" bIns="0">
+          <a:bodyPr wrap="square" lIns="0" tIns="0" rIns="0" bIns="0" anchor="t">
             <a:spAutoFit/>
           </a:bodyPr>
           <a:lstStyle/>
@@ -22535,7 +19449,7 @@
           <a:noFill/>
         </p:spPr>
         <p:txBody>
-          <a:bodyPr wrap="square" anchor="t" lIns="0" rIns="0" tIns="0" bIns="0">
+          <a:bodyPr wrap="square" lIns="0" tIns="0" rIns="0" bIns="0" anchor="t">
             <a:spAutoFit/>
           </a:bodyPr>
           <a:lstStyle/>
@@ -22582,7 +19496,7 @@
           <a:noFill/>
         </p:spPr>
         <p:txBody>
-          <a:bodyPr wrap="square" anchor="t" lIns="0" rIns="0" tIns="0" bIns="0">
+          <a:bodyPr wrap="square" lIns="0" tIns="0" rIns="0" bIns="0" anchor="t">
             <a:spAutoFit/>
           </a:bodyPr>
           <a:lstStyle/>
@@ -22657,6 +19571,7 @@
           <a:lstStyle/>
           <a:p>
             <a:pPr algn="ctr"/>
+            <a:endParaRPr/>
           </a:p>
         </p:txBody>
       </p:sp>
@@ -22677,7 +19592,7 @@
           <a:noFill/>
         </p:spPr>
         <p:txBody>
-          <a:bodyPr wrap="square" anchor="t" lIns="0" rIns="0" tIns="0" bIns="0">
+          <a:bodyPr wrap="square" lIns="0" tIns="0" rIns="0" bIns="0" anchor="t">
             <a:spAutoFit/>
           </a:bodyPr>
           <a:lstStyle/>
@@ -22724,7 +19639,7 @@
           <a:noFill/>
         </p:spPr>
         <p:txBody>
-          <a:bodyPr wrap="square" lIns="0" rIns="0" tIns="0" bIns="0">
+          <a:bodyPr wrap="square" lIns="0" tIns="0" rIns="0" bIns="0">
             <a:spAutoFit/>
           </a:bodyPr>
           <a:lstStyle/>
@@ -22835,6 +19750,7 @@
           <a:lstStyle/>
           <a:p>
             <a:pPr algn="ctr"/>
+            <a:endParaRPr/>
           </a:p>
         </p:txBody>
       </p:sp>
@@ -22883,6 +19799,7 @@
           <a:lstStyle/>
           <a:p>
             <a:pPr algn="ctr"/>
+            <a:endParaRPr/>
           </a:p>
         </p:txBody>
       </p:sp>
@@ -22903,7 +19820,7 @@
           <a:noFill/>
         </p:spPr>
         <p:txBody>
-          <a:bodyPr wrap="square" anchor="t" lIns="0" rIns="0" tIns="0" bIns="0">
+          <a:bodyPr wrap="square" lIns="0" tIns="0" rIns="0" bIns="0" anchor="t">
             <a:spAutoFit/>
           </a:bodyPr>
           <a:lstStyle/>
@@ -22950,7 +19867,7 @@
           <a:noFill/>
         </p:spPr>
         <p:txBody>
-          <a:bodyPr wrap="square" lIns="0" rIns="0" tIns="0" bIns="0">
+          <a:bodyPr wrap="square" lIns="0" tIns="0" rIns="0" bIns="0">
             <a:spAutoFit/>
           </a:bodyPr>
           <a:lstStyle/>
@@ -23061,6 +19978,7 @@
           <a:lstStyle/>
           <a:p>
             <a:pPr algn="ctr"/>
+            <a:endParaRPr/>
           </a:p>
         </p:txBody>
       </p:sp>
@@ -23109,6 +20027,7 @@
           <a:lstStyle/>
           <a:p>
             <a:pPr algn="ctr"/>
+            <a:endParaRPr/>
           </a:p>
         </p:txBody>
       </p:sp>
@@ -23129,7 +20048,7 @@
           <a:noFill/>
         </p:spPr>
         <p:txBody>
-          <a:bodyPr wrap="square" anchor="t" lIns="0" rIns="0" tIns="0" bIns="0">
+          <a:bodyPr wrap="square" lIns="0" tIns="0" rIns="0" bIns="0" anchor="t">
             <a:spAutoFit/>
           </a:bodyPr>
           <a:lstStyle/>
@@ -23176,7 +20095,7 @@
           <a:noFill/>
         </p:spPr>
         <p:txBody>
-          <a:bodyPr wrap="square" lIns="0" rIns="0" tIns="0" bIns="0">
+          <a:bodyPr wrap="square" lIns="0" tIns="0" rIns="0" bIns="0">
             <a:spAutoFit/>
           </a:bodyPr>
           <a:lstStyle/>
@@ -23287,6 +20206,7 @@
           <a:lstStyle/>
           <a:p>
             <a:pPr algn="ctr"/>
+            <a:endParaRPr/>
           </a:p>
         </p:txBody>
       </p:sp>
@@ -23335,6 +20255,7 @@
           <a:lstStyle/>
           <a:p>
             <a:pPr algn="ctr"/>
+            <a:endParaRPr/>
           </a:p>
         </p:txBody>
       </p:sp>
@@ -23355,7 +20276,7 @@
           <a:noFill/>
         </p:spPr>
         <p:txBody>
-          <a:bodyPr wrap="square" anchor="t" lIns="0" rIns="0" tIns="0" bIns="0">
+          <a:bodyPr wrap="square" lIns="0" tIns="0" rIns="0" bIns="0" anchor="t">
             <a:spAutoFit/>
           </a:bodyPr>
           <a:lstStyle/>
@@ -23402,7 +20323,7 @@
           <a:noFill/>
         </p:spPr>
         <p:txBody>
-          <a:bodyPr wrap="square" lIns="0" rIns="0" tIns="0" bIns="0">
+          <a:bodyPr wrap="square" lIns="0" tIns="0" rIns="0" bIns="0">
             <a:spAutoFit/>
           </a:bodyPr>
           <a:lstStyle/>
@@ -23489,7 +20410,7 @@
           <a:noFill/>
         </p:spPr>
         <p:txBody>
-          <a:bodyPr wrap="square" anchor="t" lIns="0" rIns="0" tIns="0" bIns="0">
+          <a:bodyPr wrap="square" lIns="0" tIns="0" rIns="0" bIns="0" anchor="t">
             <a:spAutoFit/>
           </a:bodyPr>
           <a:lstStyle/>
@@ -23595,6 +20516,7 @@
           <a:lstStyle/>
           <a:p>
             <a:pPr algn="ctr"/>
+            <a:endParaRPr/>
           </a:p>
         </p:txBody>
       </p:sp>
@@ -23615,7 +20537,7 @@
           <a:noFill/>
         </p:spPr>
         <p:txBody>
-          <a:bodyPr wrap="square" anchor="ctr" lIns="0" rIns="0" tIns="0" bIns="0">
+          <a:bodyPr wrap="square" lIns="0" tIns="0" rIns="0" bIns="0" anchor="ctr">
             <a:spAutoFit/>
           </a:bodyPr>
           <a:lstStyle/>
@@ -23662,7 +20584,7 @@
           <a:noFill/>
         </p:spPr>
         <p:txBody>
-          <a:bodyPr wrap="square" anchor="t" lIns="0" rIns="0" tIns="0" bIns="0">
+          <a:bodyPr wrap="square" lIns="0" tIns="0" rIns="0" bIns="0" anchor="t">
             <a:spAutoFit/>
           </a:bodyPr>
           <a:lstStyle/>
@@ -23701,7 +20623,7 @@
 </file>
 
 <file path=ppt/slides/slide8.xml><?xml version="1.0" encoding="utf-8"?>
-<p:sld xmlns:a="http://schemas.openxmlformats.org/drawingml/2006/main" xmlns:p="http://schemas.openxmlformats.org/presentationml/2006/main" xmlns:r="http://schemas.openxmlformats.org/officeDocument/2006/relationships">
+<p:sld xmlns:a="http://schemas.openxmlformats.org/drawingml/2006/main" xmlns:r="http://schemas.openxmlformats.org/officeDocument/2006/relationships" xmlns:p="http://schemas.openxmlformats.org/presentationml/2006/main">
   <p:cSld>
     <p:bg>
       <p:bgPr>
@@ -23717,227 +20639,14 @@
         <p:cNvGrpSpPr/>
         <p:nvPr/>
       </p:nvGrpSpPr>
-      <p:grpSpPr/>
-      <p:sp>
-        <p:nvSpPr>
-          <p:cNvPr id="2" name="Rectangle 1"/>
-          <p:cNvSpPr/>
-          <p:nvPr/>
-        </p:nvSpPr>
-        <p:spPr>
-          <a:xfrm rot="1080000">
-            <a:off x="10972800" y="-548640"/>
-            <a:ext cx="22860" cy="2926080"/>
-          </a:xfrm>
-          <a:prstGeom prst="rect">
-            <a:avLst/>
-          </a:prstGeom>
-          <a:solidFill>
-            <a:srgbClr val="F3D9D2"/>
-          </a:solidFill>
-          <a:ln>
-            <a:noFill/>
-          </a:ln>
-          <a:effectLst/>
-        </p:spPr>
-        <p:style>
-          <a:lnRef idx="1">
-            <a:schemeClr val="accent1"/>
-          </a:lnRef>
-          <a:fillRef idx="3">
-            <a:schemeClr val="accent1"/>
-          </a:fillRef>
-          <a:effectRef idx="2">
-            <a:schemeClr val="accent1"/>
-          </a:effectRef>
-          <a:fontRef idx="minor">
-            <a:schemeClr val="lt1"/>
-          </a:fontRef>
-        </p:style>
-        <p:txBody>
-          <a:bodyPr rtlCol="0" anchor="ctr"/>
-          <a:lstStyle/>
-          <a:p>
-            <a:pPr algn="ctr"/>
-          </a:p>
-        </p:txBody>
-      </p:sp>
-      <p:sp>
-        <p:nvSpPr>
-          <p:cNvPr id="3" name="Rectangle 2"/>
-          <p:cNvSpPr/>
-          <p:nvPr/>
-        </p:nvSpPr>
-        <p:spPr>
-          <a:xfrm rot="1800000">
-            <a:off x="10991088" y="-548640"/>
-            <a:ext cx="22860" cy="3063240"/>
-          </a:xfrm>
-          <a:prstGeom prst="rect">
-            <a:avLst/>
-          </a:prstGeom>
-          <a:solidFill>
-            <a:srgbClr val="F3D9D2"/>
-          </a:solidFill>
-          <a:ln>
-            <a:noFill/>
-          </a:ln>
-          <a:effectLst/>
-        </p:spPr>
-        <p:style>
-          <a:lnRef idx="1">
-            <a:schemeClr val="accent1"/>
-          </a:lnRef>
-          <a:fillRef idx="3">
-            <a:schemeClr val="accent1"/>
-          </a:fillRef>
-          <a:effectRef idx="2">
-            <a:schemeClr val="accent1"/>
-          </a:effectRef>
-          <a:fontRef idx="minor">
-            <a:schemeClr val="lt1"/>
-          </a:fontRef>
-        </p:style>
-        <p:txBody>
-          <a:bodyPr rtlCol="0" anchor="ctr"/>
-          <a:lstStyle/>
-          <a:p>
-            <a:pPr algn="ctr"/>
-          </a:p>
-        </p:txBody>
-      </p:sp>
-      <p:sp>
-        <p:nvSpPr>
-          <p:cNvPr id="4" name="Rectangle 3"/>
-          <p:cNvSpPr/>
-          <p:nvPr/>
-        </p:nvSpPr>
-        <p:spPr>
-          <a:xfrm rot="2520000">
-            <a:off x="11009376" y="-548640"/>
-            <a:ext cx="22860" cy="3200400"/>
-          </a:xfrm>
-          <a:prstGeom prst="rect">
-            <a:avLst/>
-          </a:prstGeom>
-          <a:solidFill>
-            <a:srgbClr val="F3D9D2"/>
-          </a:solidFill>
-          <a:ln>
-            <a:noFill/>
-          </a:ln>
-          <a:effectLst/>
-        </p:spPr>
-        <p:style>
-          <a:lnRef idx="1">
-            <a:schemeClr val="accent1"/>
-          </a:lnRef>
-          <a:fillRef idx="3">
-            <a:schemeClr val="accent1"/>
-          </a:fillRef>
-          <a:effectRef idx="2">
-            <a:schemeClr val="accent1"/>
-          </a:effectRef>
-          <a:fontRef idx="minor">
-            <a:schemeClr val="lt1"/>
-          </a:fontRef>
-        </p:style>
-        <p:txBody>
-          <a:bodyPr rtlCol="0" anchor="ctr"/>
-          <a:lstStyle/>
-          <a:p>
-            <a:pPr algn="ctr"/>
-          </a:p>
-        </p:txBody>
-      </p:sp>
-      <p:sp>
-        <p:nvSpPr>
-          <p:cNvPr id="5" name="Rectangle 4"/>
-          <p:cNvSpPr/>
-          <p:nvPr/>
-        </p:nvSpPr>
-        <p:spPr>
-          <a:xfrm rot="3240000">
-            <a:off x="11027664" y="-548640"/>
-            <a:ext cx="22860" cy="3337560"/>
-          </a:xfrm>
-          <a:prstGeom prst="rect">
-            <a:avLst/>
-          </a:prstGeom>
-          <a:solidFill>
-            <a:srgbClr val="F3D9D2"/>
-          </a:solidFill>
-          <a:ln>
-            <a:noFill/>
-          </a:ln>
-          <a:effectLst/>
-        </p:spPr>
-        <p:style>
-          <a:lnRef idx="1">
-            <a:schemeClr val="accent1"/>
-          </a:lnRef>
-          <a:fillRef idx="3">
-            <a:schemeClr val="accent1"/>
-          </a:fillRef>
-          <a:effectRef idx="2">
-            <a:schemeClr val="accent1"/>
-          </a:effectRef>
-          <a:fontRef idx="minor">
-            <a:schemeClr val="lt1"/>
-          </a:fontRef>
-        </p:style>
-        <p:txBody>
-          <a:bodyPr rtlCol="0" anchor="ctr"/>
-          <a:lstStyle/>
-          <a:p>
-            <a:pPr algn="ctr"/>
-          </a:p>
-        </p:txBody>
-      </p:sp>
-      <p:sp>
-        <p:nvSpPr>
-          <p:cNvPr id="6" name="Rectangle 5"/>
-          <p:cNvSpPr/>
-          <p:nvPr/>
-        </p:nvSpPr>
-        <p:spPr>
-          <a:xfrm rot="3960000">
-            <a:off x="11045952" y="-548640"/>
-            <a:ext cx="22860" cy="3474720"/>
-          </a:xfrm>
-          <a:prstGeom prst="rect">
-            <a:avLst/>
-          </a:prstGeom>
-          <a:solidFill>
-            <a:srgbClr val="F3D9D2"/>
-          </a:solidFill>
-          <a:ln>
-            <a:noFill/>
-          </a:ln>
-          <a:effectLst/>
-        </p:spPr>
-        <p:style>
-          <a:lnRef idx="1">
-            <a:schemeClr val="accent1"/>
-          </a:lnRef>
-          <a:fillRef idx="3">
-            <a:schemeClr val="accent1"/>
-          </a:fillRef>
-          <a:effectRef idx="2">
-            <a:schemeClr val="accent1"/>
-          </a:effectRef>
-          <a:fontRef idx="minor">
-            <a:schemeClr val="lt1"/>
-          </a:fontRef>
-        </p:style>
-        <p:txBody>
-          <a:bodyPr rtlCol="0" anchor="ctr"/>
-          <a:lstStyle/>
-          <a:p>
-            <a:pPr algn="ctr"/>
-          </a:p>
-        </p:txBody>
-      </p:sp>
+      <p:grpSpPr>
+        <a:xfrm>
+          <a:off x="0" y="0"/>
+          <a:ext cx="0" cy="0"/>
+          <a:chOff x="0" y="0"/>
+          <a:chExt cx="0" cy="0"/>
+        </a:xfrm>
+      </p:grpSpPr>
       <p:sp>
         <p:nvSpPr>
           <p:cNvPr id="7" name="TextBox 6"/>
@@ -23955,7 +20664,7 @@
           <a:noFill/>
         </p:spPr>
         <p:txBody>
-          <a:bodyPr wrap="square" anchor="t" lIns="0" rIns="0" tIns="0" bIns="0">
+          <a:bodyPr wrap="square" lIns="0" tIns="0" rIns="0" bIns="0" anchor="t">
             <a:spAutoFit/>
           </a:bodyPr>
           <a:lstStyle/>
@@ -24002,7 +20711,7 @@
           <a:noFill/>
         </p:spPr>
         <p:txBody>
-          <a:bodyPr wrap="square" anchor="t" lIns="0" rIns="0" tIns="0" bIns="0">
+          <a:bodyPr wrap="square" lIns="0" tIns="0" rIns="0" bIns="0" anchor="t">
             <a:spAutoFit/>
           </a:bodyPr>
           <a:lstStyle/>
@@ -24049,7 +20758,7 @@
           <a:noFill/>
         </p:spPr>
         <p:txBody>
-          <a:bodyPr wrap="square" anchor="t" lIns="0" rIns="0" tIns="0" bIns="0">
+          <a:bodyPr wrap="square" lIns="0" tIns="0" rIns="0" bIns="0" anchor="t">
             <a:spAutoFit/>
           </a:bodyPr>
           <a:lstStyle/>
@@ -24124,6 +20833,7 @@
           <a:lstStyle/>
           <a:p>
             <a:pPr algn="ctr"/>
+            <a:endParaRPr/>
           </a:p>
         </p:txBody>
       </p:sp>
@@ -24168,6 +20878,7 @@
           <a:lstStyle/>
           <a:p>
             <a:pPr algn="ctr"/>
+            <a:endParaRPr/>
           </a:p>
         </p:txBody>
       </p:sp>
@@ -24188,7 +20899,7 @@
           <a:noFill/>
         </p:spPr>
         <p:txBody>
-          <a:bodyPr wrap="square" anchor="ctr" lIns="0" rIns="0" tIns="0" bIns="0">
+          <a:bodyPr wrap="square" lIns="0" tIns="0" rIns="0" bIns="0" anchor="ctr">
             <a:spAutoFit/>
           </a:bodyPr>
           <a:lstStyle/>
@@ -24235,7 +20946,7 @@
           <a:noFill/>
         </p:spPr>
         <p:txBody>
-          <a:bodyPr wrap="square" anchor="t" lIns="0" rIns="0" tIns="0" bIns="0">
+          <a:bodyPr wrap="square" lIns="0" tIns="0" rIns="0" bIns="0" anchor="t">
             <a:spAutoFit/>
           </a:bodyPr>
           <a:lstStyle/>
@@ -24282,7 +20993,7 @@
           <a:noFill/>
         </p:spPr>
         <p:txBody>
-          <a:bodyPr wrap="square" anchor="t" lIns="0" rIns="0" tIns="0" bIns="0">
+          <a:bodyPr wrap="square" lIns="0" tIns="0" rIns="0" bIns="0" anchor="t">
             <a:spAutoFit/>
           </a:bodyPr>
           <a:lstStyle/>
@@ -24329,7 +21040,7 @@
           <a:noFill/>
         </p:spPr>
         <p:txBody>
-          <a:bodyPr wrap="square" anchor="t" lIns="0" rIns="0" tIns="0" bIns="0">
+          <a:bodyPr wrap="square" lIns="0" tIns="0" rIns="0" bIns="0" anchor="t">
             <a:spAutoFit/>
           </a:bodyPr>
           <a:lstStyle/>
@@ -24400,6 +21111,7 @@
           <a:lstStyle/>
           <a:p>
             <a:pPr algn="ctr"/>
+            <a:endParaRPr/>
           </a:p>
         </p:txBody>
       </p:sp>
@@ -24448,6 +21160,7 @@
           <a:lstStyle/>
           <a:p>
             <a:pPr algn="ctr"/>
+            <a:endParaRPr/>
           </a:p>
         </p:txBody>
       </p:sp>
@@ -24492,6 +21205,7 @@
           <a:lstStyle/>
           <a:p>
             <a:pPr algn="ctr"/>
+            <a:endParaRPr/>
           </a:p>
         </p:txBody>
       </p:sp>
@@ -24512,7 +21226,7 @@
           <a:noFill/>
         </p:spPr>
         <p:txBody>
-          <a:bodyPr wrap="square" anchor="ctr" lIns="0" rIns="0" tIns="0" bIns="0">
+          <a:bodyPr wrap="square" lIns="0" tIns="0" rIns="0" bIns="0" anchor="ctr">
             <a:spAutoFit/>
           </a:bodyPr>
           <a:lstStyle/>
@@ -24559,7 +21273,7 @@
           <a:noFill/>
         </p:spPr>
         <p:txBody>
-          <a:bodyPr wrap="square" anchor="t" lIns="0" rIns="0" tIns="0" bIns="0">
+          <a:bodyPr wrap="square" lIns="0" tIns="0" rIns="0" bIns="0" anchor="t">
             <a:spAutoFit/>
           </a:bodyPr>
           <a:lstStyle/>
@@ -24606,7 +21320,7 @@
           <a:noFill/>
         </p:spPr>
         <p:txBody>
-          <a:bodyPr wrap="square" anchor="t" lIns="0" rIns="0" tIns="0" bIns="0">
+          <a:bodyPr wrap="square" lIns="0" tIns="0" rIns="0" bIns="0" anchor="t">
             <a:spAutoFit/>
           </a:bodyPr>
           <a:lstStyle/>
@@ -24653,7 +21367,7 @@
           <a:noFill/>
         </p:spPr>
         <p:txBody>
-          <a:bodyPr wrap="square" anchor="t" lIns="0" rIns="0" tIns="0" bIns="0">
+          <a:bodyPr wrap="square" lIns="0" tIns="0" rIns="0" bIns="0" anchor="t">
             <a:spAutoFit/>
           </a:bodyPr>
           <a:lstStyle/>
@@ -24724,6 +21438,7 @@
           <a:lstStyle/>
           <a:p>
             <a:pPr algn="ctr"/>
+            <a:endParaRPr/>
           </a:p>
         </p:txBody>
       </p:sp>
@@ -24772,6 +21487,7 @@
           <a:lstStyle/>
           <a:p>
             <a:pPr algn="ctr"/>
+            <a:endParaRPr/>
           </a:p>
         </p:txBody>
       </p:sp>
@@ -24816,6 +21532,7 @@
           <a:lstStyle/>
           <a:p>
             <a:pPr algn="ctr"/>
+            <a:endParaRPr/>
           </a:p>
         </p:txBody>
       </p:sp>
@@ -24836,7 +21553,7 @@
           <a:noFill/>
         </p:spPr>
         <p:txBody>
-          <a:bodyPr wrap="square" anchor="ctr" lIns="0" rIns="0" tIns="0" bIns="0">
+          <a:bodyPr wrap="square" lIns="0" tIns="0" rIns="0" bIns="0" anchor="ctr">
             <a:spAutoFit/>
           </a:bodyPr>
           <a:lstStyle/>
@@ -24883,7 +21600,7 @@
           <a:noFill/>
         </p:spPr>
         <p:txBody>
-          <a:bodyPr wrap="square" anchor="t" lIns="0" rIns="0" tIns="0" bIns="0">
+          <a:bodyPr wrap="square" lIns="0" tIns="0" rIns="0" bIns="0" anchor="t">
             <a:spAutoFit/>
           </a:bodyPr>
           <a:lstStyle/>
@@ -24930,7 +21647,7 @@
           <a:noFill/>
         </p:spPr>
         <p:txBody>
-          <a:bodyPr wrap="square" anchor="t" lIns="0" rIns="0" tIns="0" bIns="0">
+          <a:bodyPr wrap="square" lIns="0" tIns="0" rIns="0" bIns="0" anchor="t">
             <a:spAutoFit/>
           </a:bodyPr>
           <a:lstStyle/>
@@ -24977,7 +21694,7 @@
           <a:noFill/>
         </p:spPr>
         <p:txBody>
-          <a:bodyPr wrap="square" anchor="t" lIns="0" rIns="0" tIns="0" bIns="0">
+          <a:bodyPr wrap="square" lIns="0" tIns="0" rIns="0" bIns="0" anchor="t">
             <a:spAutoFit/>
           </a:bodyPr>
           <a:lstStyle/>
@@ -25048,6 +21765,7 @@
           <a:lstStyle/>
           <a:p>
             <a:pPr algn="ctr"/>
+            <a:endParaRPr/>
           </a:p>
         </p:txBody>
       </p:sp>
@@ -25096,6 +21814,7 @@
           <a:lstStyle/>
           <a:p>
             <a:pPr algn="ctr"/>
+            <a:endParaRPr/>
           </a:p>
         </p:txBody>
       </p:sp>
@@ -25140,6 +21859,7 @@
           <a:lstStyle/>
           <a:p>
             <a:pPr algn="ctr"/>
+            <a:endParaRPr/>
           </a:p>
         </p:txBody>
       </p:sp>
@@ -25160,7 +21880,7 @@
           <a:noFill/>
         </p:spPr>
         <p:txBody>
-          <a:bodyPr wrap="square" anchor="ctr" lIns="0" rIns="0" tIns="0" bIns="0">
+          <a:bodyPr wrap="square" lIns="0" tIns="0" rIns="0" bIns="0" anchor="ctr">
             <a:spAutoFit/>
           </a:bodyPr>
           <a:lstStyle/>
@@ -25207,7 +21927,7 @@
           <a:noFill/>
         </p:spPr>
         <p:txBody>
-          <a:bodyPr wrap="square" anchor="t" lIns="0" rIns="0" tIns="0" bIns="0">
+          <a:bodyPr wrap="square" lIns="0" tIns="0" rIns="0" bIns="0" anchor="t">
             <a:spAutoFit/>
           </a:bodyPr>
           <a:lstStyle/>
@@ -25254,7 +21974,7 @@
           <a:noFill/>
         </p:spPr>
         <p:txBody>
-          <a:bodyPr wrap="square" anchor="t" lIns="0" rIns="0" tIns="0" bIns="0">
+          <a:bodyPr wrap="square" lIns="0" tIns="0" rIns="0" bIns="0" anchor="t">
             <a:spAutoFit/>
           </a:bodyPr>
           <a:lstStyle/>
@@ -25301,7 +22021,7 @@
           <a:noFill/>
         </p:spPr>
         <p:txBody>
-          <a:bodyPr wrap="square" anchor="t" lIns="0" rIns="0" tIns="0" bIns="0">
+          <a:bodyPr wrap="square" lIns="0" tIns="0" rIns="0" bIns="0" anchor="t">
             <a:spAutoFit/>
           </a:bodyPr>
           <a:lstStyle/>
@@ -25348,7 +22068,7 @@
           <a:noFill/>
         </p:spPr>
         <p:txBody>
-          <a:bodyPr wrap="square" anchor="t" lIns="0" rIns="0" tIns="0" bIns="0">
+          <a:bodyPr wrap="square" lIns="0" tIns="0" rIns="0" bIns="0" anchor="t">
             <a:spAutoFit/>
           </a:bodyPr>
           <a:lstStyle/>
@@ -25395,7 +22115,7 @@
           <a:noFill/>
         </p:spPr>
         <p:txBody>
-          <a:bodyPr wrap="square" anchor="t" lIns="0" rIns="0" tIns="0" bIns="0">
+          <a:bodyPr wrap="square" lIns="0" tIns="0" rIns="0" bIns="0" anchor="t">
             <a:spAutoFit/>
           </a:bodyPr>
           <a:lstStyle/>
@@ -25434,7 +22154,7 @@
 </file>
 
 <file path=ppt/slides/slide9.xml><?xml version="1.0" encoding="utf-8"?>
-<p:sld xmlns:a="http://schemas.openxmlformats.org/drawingml/2006/main" xmlns:p="http://schemas.openxmlformats.org/presentationml/2006/main" xmlns:r="http://schemas.openxmlformats.org/officeDocument/2006/relationships">
+<p:sld xmlns:a="http://schemas.openxmlformats.org/drawingml/2006/main" xmlns:r="http://schemas.openxmlformats.org/officeDocument/2006/relationships" xmlns:p="http://schemas.openxmlformats.org/presentationml/2006/main">
   <p:cSld>
     <p:bg>
       <p:bgPr>
@@ -25450,227 +22170,14 @@
         <p:cNvGrpSpPr/>
         <p:nvPr/>
       </p:nvGrpSpPr>
-      <p:grpSpPr/>
-      <p:sp>
-        <p:nvSpPr>
-          <p:cNvPr id="2" name="Rectangle 1"/>
-          <p:cNvSpPr/>
-          <p:nvPr/>
-        </p:nvSpPr>
-        <p:spPr>
-          <a:xfrm rot="1080000">
-            <a:off x="10972800" y="-548640"/>
-            <a:ext cx="22860" cy="2926080"/>
-          </a:xfrm>
-          <a:prstGeom prst="rect">
-            <a:avLst/>
-          </a:prstGeom>
-          <a:solidFill>
-            <a:srgbClr val="F3D9D2"/>
-          </a:solidFill>
-          <a:ln>
-            <a:noFill/>
-          </a:ln>
-          <a:effectLst/>
-        </p:spPr>
-        <p:style>
-          <a:lnRef idx="1">
-            <a:schemeClr val="accent1"/>
-          </a:lnRef>
-          <a:fillRef idx="3">
-            <a:schemeClr val="accent1"/>
-          </a:fillRef>
-          <a:effectRef idx="2">
-            <a:schemeClr val="accent1"/>
-          </a:effectRef>
-          <a:fontRef idx="minor">
-            <a:schemeClr val="lt1"/>
-          </a:fontRef>
-        </p:style>
-        <p:txBody>
-          <a:bodyPr rtlCol="0" anchor="ctr"/>
-          <a:lstStyle/>
-          <a:p>
-            <a:pPr algn="ctr"/>
-          </a:p>
-        </p:txBody>
-      </p:sp>
-      <p:sp>
-        <p:nvSpPr>
-          <p:cNvPr id="3" name="Rectangle 2"/>
-          <p:cNvSpPr/>
-          <p:nvPr/>
-        </p:nvSpPr>
-        <p:spPr>
-          <a:xfrm rot="1800000">
-            <a:off x="10991088" y="-548640"/>
-            <a:ext cx="22860" cy="3063240"/>
-          </a:xfrm>
-          <a:prstGeom prst="rect">
-            <a:avLst/>
-          </a:prstGeom>
-          <a:solidFill>
-            <a:srgbClr val="F3D9D2"/>
-          </a:solidFill>
-          <a:ln>
-            <a:noFill/>
-          </a:ln>
-          <a:effectLst/>
-        </p:spPr>
-        <p:style>
-          <a:lnRef idx="1">
-            <a:schemeClr val="accent1"/>
-          </a:lnRef>
-          <a:fillRef idx="3">
-            <a:schemeClr val="accent1"/>
-          </a:fillRef>
-          <a:effectRef idx="2">
-            <a:schemeClr val="accent1"/>
-          </a:effectRef>
-          <a:fontRef idx="minor">
-            <a:schemeClr val="lt1"/>
-          </a:fontRef>
-        </p:style>
-        <p:txBody>
-          <a:bodyPr rtlCol="0" anchor="ctr"/>
-          <a:lstStyle/>
-          <a:p>
-            <a:pPr algn="ctr"/>
-          </a:p>
-        </p:txBody>
-      </p:sp>
-      <p:sp>
-        <p:nvSpPr>
-          <p:cNvPr id="4" name="Rectangle 3"/>
-          <p:cNvSpPr/>
-          <p:nvPr/>
-        </p:nvSpPr>
-        <p:spPr>
-          <a:xfrm rot="2520000">
-            <a:off x="11009376" y="-548640"/>
-            <a:ext cx="22860" cy="3200400"/>
-          </a:xfrm>
-          <a:prstGeom prst="rect">
-            <a:avLst/>
-          </a:prstGeom>
-          <a:solidFill>
-            <a:srgbClr val="F3D9D2"/>
-          </a:solidFill>
-          <a:ln>
-            <a:noFill/>
-          </a:ln>
-          <a:effectLst/>
-        </p:spPr>
-        <p:style>
-          <a:lnRef idx="1">
-            <a:schemeClr val="accent1"/>
-          </a:lnRef>
-          <a:fillRef idx="3">
-            <a:schemeClr val="accent1"/>
-          </a:fillRef>
-          <a:effectRef idx="2">
-            <a:schemeClr val="accent1"/>
-          </a:effectRef>
-          <a:fontRef idx="minor">
-            <a:schemeClr val="lt1"/>
-          </a:fontRef>
-        </p:style>
-        <p:txBody>
-          <a:bodyPr rtlCol="0" anchor="ctr"/>
-          <a:lstStyle/>
-          <a:p>
-            <a:pPr algn="ctr"/>
-          </a:p>
-        </p:txBody>
-      </p:sp>
-      <p:sp>
-        <p:nvSpPr>
-          <p:cNvPr id="5" name="Rectangle 4"/>
-          <p:cNvSpPr/>
-          <p:nvPr/>
-        </p:nvSpPr>
-        <p:spPr>
-          <a:xfrm rot="3240000">
-            <a:off x="11027664" y="-548640"/>
-            <a:ext cx="22860" cy="3337560"/>
-          </a:xfrm>
-          <a:prstGeom prst="rect">
-            <a:avLst/>
-          </a:prstGeom>
-          <a:solidFill>
-            <a:srgbClr val="F3D9D2"/>
-          </a:solidFill>
-          <a:ln>
-            <a:noFill/>
-          </a:ln>
-          <a:effectLst/>
-        </p:spPr>
-        <p:style>
-          <a:lnRef idx="1">
-            <a:schemeClr val="accent1"/>
-          </a:lnRef>
-          <a:fillRef idx="3">
-            <a:schemeClr val="accent1"/>
-          </a:fillRef>
-          <a:effectRef idx="2">
-            <a:schemeClr val="accent1"/>
-          </a:effectRef>
-          <a:fontRef idx="minor">
-            <a:schemeClr val="lt1"/>
-          </a:fontRef>
-        </p:style>
-        <p:txBody>
-          <a:bodyPr rtlCol="0" anchor="ctr"/>
-          <a:lstStyle/>
-          <a:p>
-            <a:pPr algn="ctr"/>
-          </a:p>
-        </p:txBody>
-      </p:sp>
-      <p:sp>
-        <p:nvSpPr>
-          <p:cNvPr id="6" name="Rectangle 5"/>
-          <p:cNvSpPr/>
-          <p:nvPr/>
-        </p:nvSpPr>
-        <p:spPr>
-          <a:xfrm rot="3960000">
-            <a:off x="11045952" y="-548640"/>
-            <a:ext cx="22860" cy="3474720"/>
-          </a:xfrm>
-          <a:prstGeom prst="rect">
-            <a:avLst/>
-          </a:prstGeom>
-          <a:solidFill>
-            <a:srgbClr val="F3D9D2"/>
-          </a:solidFill>
-          <a:ln>
-            <a:noFill/>
-          </a:ln>
-          <a:effectLst/>
-        </p:spPr>
-        <p:style>
-          <a:lnRef idx="1">
-            <a:schemeClr val="accent1"/>
-          </a:lnRef>
-          <a:fillRef idx="3">
-            <a:schemeClr val="accent1"/>
-          </a:fillRef>
-          <a:effectRef idx="2">
-            <a:schemeClr val="accent1"/>
-          </a:effectRef>
-          <a:fontRef idx="minor">
-            <a:schemeClr val="lt1"/>
-          </a:fontRef>
-        </p:style>
-        <p:txBody>
-          <a:bodyPr rtlCol="0" anchor="ctr"/>
-          <a:lstStyle/>
-          <a:p>
-            <a:pPr algn="ctr"/>
-          </a:p>
-        </p:txBody>
-      </p:sp>
+      <p:grpSpPr>
+        <a:xfrm>
+          <a:off x="0" y="0"/>
+          <a:ext cx="0" cy="0"/>
+          <a:chOff x="0" y="0"/>
+          <a:chExt cx="0" cy="0"/>
+        </a:xfrm>
+      </p:grpSpPr>
       <p:sp>
         <p:nvSpPr>
           <p:cNvPr id="7" name="TextBox 6"/>
@@ -25688,7 +22195,7 @@
           <a:noFill/>
         </p:spPr>
         <p:txBody>
-          <a:bodyPr wrap="square" anchor="t" lIns="0" rIns="0" tIns="0" bIns="0">
+          <a:bodyPr wrap="square" lIns="0" tIns="0" rIns="0" bIns="0" anchor="t">
             <a:spAutoFit/>
           </a:bodyPr>
           <a:lstStyle/>
@@ -25735,7 +22242,7 @@
           <a:noFill/>
         </p:spPr>
         <p:txBody>
-          <a:bodyPr wrap="square" anchor="t" lIns="0" rIns="0" tIns="0" bIns="0">
+          <a:bodyPr wrap="square" lIns="0" tIns="0" rIns="0" bIns="0" anchor="t">
             <a:spAutoFit/>
           </a:bodyPr>
           <a:lstStyle/>
@@ -25782,7 +22289,7 @@
           <a:noFill/>
         </p:spPr>
         <p:txBody>
-          <a:bodyPr wrap="square" anchor="t" lIns="0" rIns="0" tIns="0" bIns="0">
+          <a:bodyPr wrap="square" lIns="0" tIns="0" rIns="0" bIns="0" anchor="t">
             <a:spAutoFit/>
           </a:bodyPr>
           <a:lstStyle/>
@@ -25857,6 +22364,7 @@
           <a:lstStyle/>
           <a:p>
             <a:pPr algn="ctr"/>
+            <a:endParaRPr/>
           </a:p>
         </p:txBody>
       </p:sp>
@@ -25901,6 +22409,7 @@
           <a:lstStyle/>
           <a:p>
             <a:pPr algn="ctr"/>
+            <a:endParaRPr/>
           </a:p>
         </p:txBody>
       </p:sp>
@@ -25921,7 +22430,7 @@
           <a:noFill/>
         </p:spPr>
         <p:txBody>
-          <a:bodyPr wrap="square" anchor="t" lIns="0" rIns="0" tIns="0" bIns="0">
+          <a:bodyPr wrap="square" lIns="0" tIns="0" rIns="0" bIns="0" anchor="t">
             <a:spAutoFit/>
           </a:bodyPr>
           <a:lstStyle/>
@@ -25968,7 +22477,7 @@
           <a:noFill/>
         </p:spPr>
         <p:txBody>
-          <a:bodyPr wrap="square" anchor="t" lIns="0" rIns="0" tIns="0" bIns="0">
+          <a:bodyPr wrap="square" lIns="0" tIns="0" rIns="0" bIns="0" anchor="t">
             <a:spAutoFit/>
           </a:bodyPr>
           <a:lstStyle/>
@@ -26043,6 +22552,7 @@
           <a:lstStyle/>
           <a:p>
             <a:pPr algn="ctr"/>
+            <a:endParaRPr/>
           </a:p>
         </p:txBody>
       </p:sp>
@@ -26087,6 +22597,7 @@
           <a:lstStyle/>
           <a:p>
             <a:pPr algn="ctr"/>
+            <a:endParaRPr/>
           </a:p>
         </p:txBody>
       </p:sp>
@@ -26107,7 +22618,7 @@
           <a:noFill/>
         </p:spPr>
         <p:txBody>
-          <a:bodyPr wrap="square" anchor="t" lIns="0" rIns="0" tIns="0" bIns="0">
+          <a:bodyPr wrap="square" lIns="0" tIns="0" rIns="0" bIns="0" anchor="t">
             <a:spAutoFit/>
           </a:bodyPr>
           <a:lstStyle/>
@@ -26154,7 +22665,7 @@
           <a:noFill/>
         </p:spPr>
         <p:txBody>
-          <a:bodyPr wrap="square" anchor="t" lIns="0" rIns="0" tIns="0" bIns="0">
+          <a:bodyPr wrap="square" lIns="0" tIns="0" rIns="0" bIns="0" anchor="t">
             <a:spAutoFit/>
           </a:bodyPr>
           <a:lstStyle/>
@@ -26229,6 +22740,7 @@
           <a:lstStyle/>
           <a:p>
             <a:pPr algn="ctr"/>
+            <a:endParaRPr/>
           </a:p>
         </p:txBody>
       </p:sp>
@@ -26273,6 +22785,7 @@
           <a:lstStyle/>
           <a:p>
             <a:pPr algn="ctr"/>
+            <a:endParaRPr/>
           </a:p>
         </p:txBody>
       </p:sp>
@@ -26293,7 +22806,7 @@
           <a:noFill/>
         </p:spPr>
         <p:txBody>
-          <a:bodyPr wrap="square" anchor="t" lIns="0" rIns="0" tIns="0" bIns="0">
+          <a:bodyPr wrap="square" lIns="0" tIns="0" rIns="0" bIns="0" anchor="t">
             <a:spAutoFit/>
           </a:bodyPr>
           <a:lstStyle/>
@@ -26340,7 +22853,7 @@
           <a:noFill/>
         </p:spPr>
         <p:txBody>
-          <a:bodyPr wrap="square" anchor="t" lIns="0" rIns="0" tIns="0" bIns="0">
+          <a:bodyPr wrap="square" lIns="0" tIns="0" rIns="0" bIns="0" anchor="t">
             <a:spAutoFit/>
           </a:bodyPr>
           <a:lstStyle/>
@@ -26415,6 +22928,7 @@
           <a:lstStyle/>
           <a:p>
             <a:pPr algn="ctr"/>
+            <a:endParaRPr/>
           </a:p>
         </p:txBody>
       </p:sp>
@@ -26459,6 +22973,7 @@
           <a:lstStyle/>
           <a:p>
             <a:pPr algn="ctr"/>
+            <a:endParaRPr/>
           </a:p>
         </p:txBody>
       </p:sp>
@@ -26479,7 +22994,7 @@
           <a:noFill/>
         </p:spPr>
         <p:txBody>
-          <a:bodyPr wrap="square" anchor="t" lIns="0" rIns="0" tIns="0" bIns="0">
+          <a:bodyPr wrap="square" lIns="0" tIns="0" rIns="0" bIns="0" anchor="t">
             <a:spAutoFit/>
           </a:bodyPr>
           <a:lstStyle/>
@@ -26526,7 +23041,7 @@
           <a:noFill/>
         </p:spPr>
         <p:txBody>
-          <a:bodyPr wrap="square" anchor="t" lIns="0" rIns="0" tIns="0" bIns="0">
+          <a:bodyPr wrap="square" lIns="0" tIns="0" rIns="0" bIns="0" anchor="t">
             <a:spAutoFit/>
           </a:bodyPr>
           <a:lstStyle/>
@@ -26573,7 +23088,7 @@
           <a:noFill/>
         </p:spPr>
         <p:txBody>
-          <a:bodyPr wrap="square" anchor="t" lIns="0" rIns="0" tIns="0" bIns="0">
+          <a:bodyPr wrap="square" lIns="0" tIns="0" rIns="0" bIns="0" anchor="t">
             <a:spAutoFit/>
           </a:bodyPr>
           <a:lstStyle/>
@@ -26620,7 +23135,7 @@
           <a:noFill/>
         </p:spPr>
         <p:txBody>
-          <a:bodyPr wrap="square" anchor="t" lIns="0" rIns="0" tIns="0" bIns="0">
+          <a:bodyPr wrap="square" lIns="0" tIns="0" rIns="0" bIns="0" anchor="t">
             <a:spAutoFit/>
           </a:bodyPr>
           <a:lstStyle/>

--- a/比賽簡報_升級版.pptx
+++ b/比賽簡報_升級版.pptx
@@ -4315,7 +4315,7 @@
                 <a:ea typeface="Microsoft JhengHei"/>
                 <a:cs typeface="Microsoft JhengHei"/>
               </a:rPr>
-              <a:t>原始圖譜有 211 個同名 ROE 節點、數值掛在關係上，檢索常抓錯期間；各家術語與單位又不一致。</a:t>
+              <a:t>原始圖譜有 211 個同名 ROE 節點、數值掛在關係上，檢索常抓錯期間；單位寫法實測有 24 種，「拾億元」被誤判成「億元」，讓 92 筆存放款整批少一個量級。</a:t>
             </a:r>
           </a:p>
         </p:txBody>
@@ -4552,7 +4552,7 @@
                 <a:ea typeface="Microsoft JhengHei"/>
                 <a:cs typeface="Microsoft JhengHei"/>
               </a:rPr>
-              <a:t>語義欄位固化　</a:t>
+              <a:t>量級稽核　</a:t>
             </a:r>
             <a:r>
               <a:rPr sz="1500">
@@ -4563,7 +4563,7 @@
                 <a:ea typeface="Microsoft JhengHei"/>
                 <a:cs typeface="Microsoft JhengHei"/>
               </a:rPr>
-              <a:t>累計別／層級／單位／可比性入欄</a:t>
+              <a:t>回填 126 筆漏標、校正 150 筆換算錯誤</a:t>
             </a:r>
           </a:p>
           <a:p>
@@ -5878,7 +5878,7 @@
                 <a:ea typeface="Microsoft JhengHei"/>
                 <a:cs typeface="Microsoft JhengHei"/>
               </a:rPr>
-              <a:t>五層推定，涵蓋率 97%，推定值標＊</a:t>
+              <a:t>五層推定，涵蓋率 99.3%，推定值標＊</a:t>
             </a:r>
           </a:p>
           <a:p>
@@ -7396,7 +7396,7 @@
                 <a:ea typeface="Microsoft JhengHei"/>
                 <a:cs typeface="Microsoft JhengHei"/>
               </a:rPr>
-              <a:t>EAP 數字與本地不符自動標紅</a:t>
+              <a:t>EAP 數字與本地不符自動標紅、可一鍵取正解</a:t>
             </a:r>
           </a:p>
           <a:p>
@@ -7428,7 +7428,7 @@
                 <a:ea typeface="Microsoft JhengHei"/>
                 <a:cs typeface="Microsoft JhengHei"/>
               </a:rPr>
-              <a:t>一鍵取正解　</a:t>
+              <a:t>Vector RAG 補強　</a:t>
             </a:r>
             <a:r>
               <a:rPr sz="1500">
@@ -7439,7 +7439,7 @@
                 <a:ea typeface="Microsoft JhengHei"/>
                 <a:cs typeface="Microsoft JhengHei"/>
               </a:rPr>
-              <a:t>紅框可切回本地公式驗證值</a:t>
+              <a:t>EAP 查無資料時，改用本地逐字稿檢索再交由 EAP 生成</a:t>
             </a:r>
           </a:p>
           <a:p>
@@ -17322,7 +17322,7 @@
                 <a:ea typeface="Microsoft JhengHei"/>
                 <a:cs typeface="Microsoft JhengHei"/>
               </a:rPr>
-              <a:t>1,176</a:t>
+              <a:t>1,255</a:t>
             </a:r>
           </a:p>
         </p:txBody>
@@ -17510,7 +17510,7 @@
                 <a:ea typeface="Microsoft JhengHei"/>
                 <a:cs typeface="Microsoft JhengHei"/>
               </a:rPr>
-              <a:t>313</a:t>
+              <a:t>360</a:t>
             </a:r>
           </a:p>
         </p:txBody>

--- a/比賽簡報_升級版.pptx
+++ b/比賽簡報_升級版.pptx
@@ -5910,7 +5910,7 @@
                 <a:ea typeface="Microsoft JhengHei"/>
                 <a:cs typeface="Microsoft JhengHei"/>
               </a:rPr>
-              <a:t>誠實揭露　</a:t>
+              <a:t>載入不留白　</a:t>
             </a:r>
             <a:r>
               <a:rPr sz="1500">
@@ -5921,7 +5921,7 @@
                 <a:ea typeface="Microsoft JhengHei"/>
                 <a:cs typeface="Microsoft JhengHei"/>
               </a:rPr>
-              <a:t>推不出單位就標「單位未標示」</a:t>
+              <a:t>冷啟動顯示骨架與進度，不是一片空白</a:t>
             </a:r>
           </a:p>
           <a:p>
@@ -5953,7 +5953,7 @@
                 <a:ea typeface="Microsoft JhengHei"/>
                 <a:cs typeface="Microsoft JhengHei"/>
               </a:rPr>
-              <a:t>懸停趨勢＋術語　</a:t>
+              <a:t>趨勢與術語　</a:t>
             </a:r>
             <a:r>
               <a:rPr sz="1500">
@@ -5964,7 +5964,7 @@
                 <a:ea typeface="Microsoft JhengHei"/>
                 <a:cs typeface="Microsoft JhengHei"/>
               </a:rPr>
-              <a:t>六期 sparkline、白話定義 tooltip</a:t>
+              <a:t>六期 sparkline、白話術語解釋；滑鼠、觸控、鍵盤三種操作都能開</a:t>
             </a:r>
           </a:p>
         </p:txBody>
@@ -7299,7 +7299,7 @@
                 <a:ea typeface="Microsoft JhengHei"/>
                 <a:cs typeface="Microsoft JhengHei"/>
               </a:rPr>
-              <a:t>EAP Hybrid RAG 對話　</a:t>
+              <a:t>逐字串流回答　</a:t>
             </a:r>
             <a:r>
               <a:rPr sz="1500">
@@ -7310,7 +7310,7 @@
                 <a:ea typeface="Microsoft JhengHei"/>
                 <a:cs typeface="Microsoft JhengHei"/>
               </a:rPr>
-              <a:t>主引擎，答案走 EAP 平台</a:t>
+              <a:t>SSE 串流，先報進度再逐字輸出，不用乾等十幾秒</a:t>
             </a:r>
           </a:p>
           <a:p>
@@ -9488,7 +9488,7 @@
                 <a:ea typeface="Microsoft JhengHei"/>
                 <a:cs typeface="Microsoft JhengHei"/>
               </a:rPr>
-              <a:t>以 Vibe Coding 短時間串成能跑、能 Demo、能部署的系統——具市場成熟度。</a:t>
+              <a:t>以 Vibe Coding 串成能跑、能 Demo、能部署的系統，並補強雲端實務：串流心跳、原子寫入、路徑清理。</a:t>
             </a:r>
           </a:p>
         </p:txBody>

--- a/比賽簡報_升級版.pptx
+++ b/比賽簡報_升級版.pptx
@@ -4172,7 +4172,7 @@
                 <a:ea typeface="Microsoft JhengHei"/>
                 <a:cs typeface="Microsoft JhengHei"/>
               </a:rPr>
-              <a:t>把資料整乾淨，AI 才不會答錯</a:t>
+              <a:t>Garbage in, garbage out——資料治理是 RAG 可信的根本</a:t>
             </a:r>
           </a:p>
         </p:txBody>
@@ -17604,7 +17604,7 @@
                 <a:ea typeface="Microsoft JhengHei"/>
                 <a:cs typeface="Microsoft JhengHei"/>
               </a:rPr>
-              <a:t>中信 · 國泰 · 玉山 · 第一金控——皆公開資料、跨機構結構相近，最能凸顯「難以並排比較」的真實痛點。</a:t>
+              <a:t>中信 · 國泰 · 玉山 · 第一金控——皆公開資料，最能凸顯「難以並排比較」的痛點；第一金控為上線後經網頁上傳新增，可持續擴充。</a:t>
             </a:r>
           </a:p>
         </p:txBody>
@@ -20435,7 +20435,7 @@
                 <a:ea typeface="Microsoft JhengHei"/>
                 <a:cs typeface="Microsoft JhengHei"/>
               </a:rPr>
-              <a:t>核心：</a:t>
+              <a:t>主引擎：</a:t>
             </a:r>
             <a:r>
               <a:rPr sz="1500" b="1">
@@ -20457,7 +20457,7 @@
                 <a:ea typeface="Microsoft JhengHei"/>
                 <a:cs typeface="Microsoft JhengHei"/>
               </a:rPr>
-              <a:t>　｜　輔助：</a:t>
+              <a:t>　｜　備援：</a:t>
             </a:r>
             <a:r>
               <a:rPr sz="1500" b="0">
@@ -20468,7 +20468,7 @@
                 <a:ea typeface="Microsoft JhengHei"/>
                 <a:cs typeface="Microsoft JhengHei"/>
               </a:rPr>
-              <a:t>Gemini（VLM／STT／備援 LLM）</a:t>
+              <a:t>Gemini（VLM／STT）＋本地 Vector RAG。EAP 查無資料時自動降級補上，來源標示清楚</a:t>
             </a:r>
           </a:p>
         </p:txBody>

--- a/比賽簡報_升級版.pptx
+++ b/比賽簡報_升級版.pptx
@@ -319,7 +319,7 @@
           <a:p>
             <a:fld id="{5BCAD085-E8A6-8845-BD4E-CB4CCA059FC4}" type="datetimeFigureOut">
               <a:rPr lang="en-US" smtClean="0"/>
-              <a:t>7/20/2026</a:t>
+              <a:t>7/22/2026</a:t>
             </a:fld>
             <a:endParaRPr lang="en-US"/>
           </a:p>
@@ -487,7 +487,7 @@
           <a:p>
             <a:fld id="{5BCAD085-E8A6-8845-BD4E-CB4CCA059FC4}" type="datetimeFigureOut">
               <a:rPr lang="en-US" smtClean="0"/>
-              <a:t>7/20/2026</a:t>
+              <a:t>7/22/2026</a:t>
             </a:fld>
             <a:endParaRPr lang="en-US"/>
           </a:p>
@@ -665,7 +665,7 @@
           <a:p>
             <a:fld id="{5BCAD085-E8A6-8845-BD4E-CB4CCA059FC4}" type="datetimeFigureOut">
               <a:rPr lang="en-US" smtClean="0"/>
-              <a:t>7/20/2026</a:t>
+              <a:t>7/22/2026</a:t>
             </a:fld>
             <a:endParaRPr lang="en-US"/>
           </a:p>
@@ -833,7 +833,7 @@
           <a:p>
             <a:fld id="{5BCAD085-E8A6-8845-BD4E-CB4CCA059FC4}" type="datetimeFigureOut">
               <a:rPr lang="en-US" smtClean="0"/>
-              <a:t>7/20/2026</a:t>
+              <a:t>7/22/2026</a:t>
             </a:fld>
             <a:endParaRPr lang="en-US"/>
           </a:p>
@@ -1078,7 +1078,7 @@
           <a:p>
             <a:fld id="{5BCAD085-E8A6-8845-BD4E-CB4CCA059FC4}" type="datetimeFigureOut">
               <a:rPr lang="en-US" smtClean="0"/>
-              <a:t>7/20/2026</a:t>
+              <a:t>7/22/2026</a:t>
             </a:fld>
             <a:endParaRPr lang="en-US"/>
           </a:p>
@@ -1363,7 +1363,7 @@
           <a:p>
             <a:fld id="{5BCAD085-E8A6-8845-BD4E-CB4CCA059FC4}" type="datetimeFigureOut">
               <a:rPr lang="en-US" smtClean="0"/>
-              <a:t>7/20/2026</a:t>
+              <a:t>7/22/2026</a:t>
             </a:fld>
             <a:endParaRPr lang="en-US"/>
           </a:p>
@@ -1782,7 +1782,7 @@
           <a:p>
             <a:fld id="{5BCAD085-E8A6-8845-BD4E-CB4CCA059FC4}" type="datetimeFigureOut">
               <a:rPr lang="en-US" smtClean="0"/>
-              <a:t>7/20/2026</a:t>
+              <a:t>7/22/2026</a:t>
             </a:fld>
             <a:endParaRPr lang="en-US"/>
           </a:p>
@@ -1899,7 +1899,7 @@
           <a:p>
             <a:fld id="{5BCAD085-E8A6-8845-BD4E-CB4CCA059FC4}" type="datetimeFigureOut">
               <a:rPr lang="en-US" smtClean="0"/>
-              <a:t>7/20/2026</a:t>
+              <a:t>7/22/2026</a:t>
             </a:fld>
             <a:endParaRPr lang="en-US"/>
           </a:p>
@@ -1994,7 +1994,7 @@
           <a:p>
             <a:fld id="{5BCAD085-E8A6-8845-BD4E-CB4CCA059FC4}" type="datetimeFigureOut">
               <a:rPr lang="en-US" smtClean="0"/>
-              <a:t>7/20/2026</a:t>
+              <a:t>7/22/2026</a:t>
             </a:fld>
             <a:endParaRPr lang="en-US"/>
           </a:p>
@@ -2269,7 +2269,7 @@
           <a:p>
             <a:fld id="{5BCAD085-E8A6-8845-BD4E-CB4CCA059FC4}" type="datetimeFigureOut">
               <a:rPr lang="en-US" smtClean="0"/>
-              <a:t>7/20/2026</a:t>
+              <a:t>7/22/2026</a:t>
             </a:fld>
             <a:endParaRPr lang="en-US"/>
           </a:p>
@@ -2521,7 +2521,7 @@
           <a:p>
             <a:fld id="{5BCAD085-E8A6-8845-BD4E-CB4CCA059FC4}" type="datetimeFigureOut">
               <a:rPr lang="en-US" smtClean="0"/>
-              <a:t>7/20/2026</a:t>
+              <a:t>7/22/2026</a:t>
             </a:fld>
             <a:endParaRPr lang="en-US"/>
           </a:p>
@@ -2732,7 +2732,7 @@
           <a:p>
             <a:fld id="{5BCAD085-E8A6-8845-BD4E-CB4CCA059FC4}" type="datetimeFigureOut">
               <a:rPr lang="en-US" smtClean="0"/>
-              <a:t>7/20/2026</a:t>
+              <a:t>7/22/2026</a:t>
             </a:fld>
             <a:endParaRPr lang="en-US"/>
           </a:p>
@@ -5171,7 +5171,7 @@
                 <a:ea typeface="Microsoft JhengHei"/>
                 <a:cs typeface="Microsoft JhengHei"/>
               </a:rPr>
-              <a:t>✓ 公式驗證：自有資本 ÷ 股東權益，</a:t>
+              <a:t>✓ 公式驗證：稅後淨利 ÷ 股東權益，</a:t>
             </a:r>
           </a:p>
           <a:p>
@@ -5552,7 +5552,7 @@
                 <a:ea typeface="Microsoft JhengHei"/>
                 <a:cs typeface="Microsoft JhengHei"/>
               </a:rPr>
-              <a:t>附出處可回溯，並與本地數值交叉核對。</a:t>
+              <a:t>附出處可回溯；交叉核對抓到平台換算差 10 倍並標紅。</a:t>
             </a:r>
           </a:p>
         </p:txBody>
@@ -9723,7 +9723,7 @@
         <p:spPr>
           <a:xfrm>
             <a:off x="640080" y="2057400"/>
-            <a:ext cx="5029200" cy="457200"/>
+            <a:ext cx="5029200" cy="261610"/>
           </a:xfrm>
           <a:prstGeom prst="rect">
             <a:avLst/>
@@ -9748,7 +9748,7 @@
               </a:spcAft>
             </a:pPr>
             <a:r>
-              <a:rPr sz="1700" b="1">
+              <a:rPr sz="1700" b="1" dirty="0" err="1">
                 <a:solidFill>
                   <a:srgbClr val="E8654E"/>
                 </a:solidFill>
@@ -9756,8 +9756,16 @@
                 <a:ea typeface="Microsoft JhengHei"/>
                 <a:cs typeface="Microsoft JhengHei"/>
               </a:rPr>
-              <a:t>使用者角色（B2B）</a:t>
-            </a:r>
+              <a:t>使用者角色</a:t>
+            </a:r>
+            <a:endParaRPr sz="1700" b="1" dirty="0">
+              <a:solidFill>
+                <a:srgbClr val="E8654E"/>
+              </a:solidFill>
+              <a:latin typeface="Microsoft JhengHei"/>
+              <a:ea typeface="Microsoft JhengHei"/>
+              <a:cs typeface="Microsoft JhengHei"/>
+            </a:endParaRPr>
           </a:p>
         </p:txBody>
       </p:sp>
@@ -22314,7 +22322,7 @@
                 <a:ea typeface="Microsoft JhengHei"/>
                 <a:cs typeface="Microsoft JhengHei"/>
               </a:rPr>
-              <a:t>讓 AI 只依證據回答，數字有公式、說法有出處</a:t>
+              <a:t>兩層設計：EAP 平台端 ＋ 本地端，讓 AI 只依證據回答</a:t>
             </a:r>
           </a:p>
         </p:txBody>
@@ -23113,7 +23121,7 @@
                 <a:ea typeface="Microsoft JhengHei"/>
                 <a:cs typeface="Microsoft JhengHei"/>
               </a:rPr>
-              <a:t>最高守則：100% 依檢索證據回答，嚴禁編造——這是能被投資決策採用的前提。</a:t>
+              <a:t>最高守則：100% 依檢索證據回答，嚴禁編造。實測發現平台端提示詞在生成階段約束力有限，因此改由本地交叉驗證把關。</a:t>
             </a:r>
           </a:p>
         </p:txBody>

--- a/比賽簡報_升級版.pptx
+++ b/比賽簡報_升級版.pptx
@@ -3517,7 +3517,7 @@
                 <a:ea typeface="Microsoft JhengHei"/>
                 <a:cs typeface="Microsoft JhengHei"/>
               </a:rPr>
-              <a:t>技術亮點 ① · GraphRAG</a:t>
+              <a:t>技術亮點 ① · 本地指標庫</a:t>
             </a:r>
           </a:p>
         </p:txBody>
@@ -3869,7 +3869,7 @@
                 <a:ea typeface="Microsoft JhengHei"/>
                 <a:cs typeface="Microsoft JhengHei"/>
               </a:rPr>
-              <a:t>數值由 GraphRAG 以公式算出，非 LLM 生成</a:t>
+              <a:t>數值由本地指標庫以公式算出，非 LLM 生成</a:t>
             </a:r>
           </a:p>
           <a:p>
@@ -4923,7 +4923,7 @@
                 <a:ea typeface="Microsoft JhengHei"/>
                 <a:cs typeface="Microsoft JhengHei"/>
               </a:rPr>
-              <a:t>① 計算驗證（GraphRAG）</a:t>
+              <a:t>① 計算驗證（本地指標庫）</a:t>
             </a:r>
           </a:p>
         </p:txBody>
@@ -20570,7 +20570,7 @@
                 <a:ea typeface="Microsoft JhengHei"/>
                 <a:cs typeface="Microsoft JhengHei"/>
               </a:rPr>
-              <a:t>數值一律由 GraphRAG 以公式計算，不是 LLM 生成——可信、可驗證、可稽核。</a:t>
+              <a:t>數值一律由本地指標庫以公式計算，不是 LLM 生成——可信、可驗證、可稽核。</a:t>
             </a:r>
           </a:p>
         </p:txBody>

--- a/比賽簡報_升級版.pptx
+++ b/比賽簡報_升級版.pptx
@@ -3933,6 +3933,49 @@
                 <a:ea typeface="Microsoft JhengHei"/>
                 <a:cs typeface="Microsoft JhengHei"/>
               </a:rPr>
+              <a:t>●  累計防呆　跨季不亂比；平台拿全年比首季會被攔下標示</a:t>
+            </a:r>
+            <a:r>
+              <a:rPr sz="1500" b="1">
+                <a:solidFill>
+                  <a:srgbClr val="1E3A5F"/>
+                </a:solidFill>
+                <a:latin typeface="Microsoft JhengHei"/>
+                <a:ea typeface="Microsoft JhengHei"/>
+                <a:cs typeface="Microsoft JhengHei"/>
+              </a:rPr>
+              <a:t/>
+            </a:r>
+            <a:r>
+              <a:rPr sz="1500">
+                <a:solidFill>
+                  <a:srgbClr val="434343"/>
+                </a:solidFill>
+                <a:latin typeface="Microsoft JhengHei"/>
+                <a:ea typeface="Microsoft JhengHei"/>
+                <a:cs typeface="Microsoft JhengHei"/>
+              </a:rPr>
+              <a:t/>
+            </a:r>
+          </a:p>
+          <a:p>
+            <a:pPr>
+              <a:lnSpc>
+                <a:spcPct val="115000"/>
+              </a:lnSpc>
+              <a:spcAft>
+                <a:spcPts val="1200"/>
+              </a:spcAft>
+            </a:pPr>
+            <a:r>
+              <a:rPr sz="1300" b="1">
+                <a:solidFill>
+                  <a:srgbClr val="E8654E"/>
+                </a:solidFill>
+                <a:latin typeface="Microsoft JhengHei"/>
+                <a:ea typeface="Microsoft JhengHei"/>
+                <a:cs typeface="Microsoft JhengHei"/>
+              </a:rPr>
               <a:t>●  </a:t>
             </a:r>
             <a:r>
@@ -3944,7 +3987,7 @@
                 <a:ea typeface="Microsoft JhengHei"/>
                 <a:cs typeface="Microsoft JhengHei"/>
               </a:rPr>
-              <a:t>累計防呆　</a:t>
+              <a:t>變化率　</a:t>
             </a:r>
             <a:r>
               <a:rPr sz="1500">
@@ -3955,7 +3998,7 @@
                 <a:ea typeface="Microsoft JhengHei"/>
                 <a:cs typeface="Microsoft JhengHei"/>
               </a:rPr>
-              <a:t>年初至今累計，跨季不亂比</a:t>
+              <a:t>QoQ／YoY 自動算，台灣慣例上紅下綠</a:t>
             </a:r>
           </a:p>
           <a:p>
@@ -3976,7 +4019,7 @@
                 <a:ea typeface="Microsoft JhengHei"/>
                 <a:cs typeface="Microsoft JhengHei"/>
               </a:rPr>
-              <a:t>●  </a:t>
+              <a:t>●  誠實揭露　驗過幾筆、哪幾筆本地沒有，畫面上分得清楚</a:t>
             </a:r>
             <a:r>
               <a:rPr sz="1500" b="1">
@@ -3987,7 +4030,7 @@
                 <a:ea typeface="Microsoft JhengHei"/>
                 <a:cs typeface="Microsoft JhengHei"/>
               </a:rPr>
-              <a:t>變化率　</a:t>
+              <a:t/>
             </a:r>
             <a:r>
               <a:rPr sz="1500">
@@ -3998,7 +4041,7 @@
                 <a:ea typeface="Microsoft JhengHei"/>
                 <a:cs typeface="Microsoft JhengHei"/>
               </a:rPr>
-              <a:t>QoQ／YoY 自動算，台灣慣例上紅下綠</a:t>
+              <a:t/>
             </a:r>
           </a:p>
         </p:txBody>
@@ -5552,7 +5595,7 @@
                 <a:ea typeface="Microsoft JhengHei"/>
                 <a:cs typeface="Microsoft JhengHei"/>
               </a:rPr>
-              <a:t>附出處可回溯；交叉核對抓到平台換算差 10 倍並標紅。</a:t>
+              <a:t>附出處可回溯；攔下 10 倍換算錯與累計值跨季亂比。</a:t>
             </a:r>
           </a:p>
         </p:txBody>
